--- a/NewOS.pptx
+++ b/NewOS.pptx
@@ -5,12 +5,13 @@
     <p:sldMasterId id="2147483648" r:id="rId1"/>
   </p:sldMasterIdLst>
   <p:notesMasterIdLst>
-    <p:notesMasterId r:id="rId7"/>
+    <p:notesMasterId r:id="rId8"/>
   </p:notesMasterIdLst>
   <p:sldIdLst>
     <p:sldId id="256" r:id="rId4"/>
     <p:sldId id="257" r:id="rId5"/>
     <p:sldId id="258" r:id="rId6"/>
+    <p:sldId id="259" r:id="rId7"/>
   </p:sldIdLst>
   <p:sldSz cx="12192000" cy="6858000"/>
   <p:notesSz cx="6858000" cy="9144000"/>
@@ -136,7 +137,7 @@
       </p:grpSpPr>
       <p:sp>
         <p:nvSpPr>
-          <p:cNvPr id="384737883" name="Header Placeholder 1"/>
+          <p:cNvPr id="1473793375" name="Header Placeholder 1"/>
           <p:cNvSpPr>
             <a:spLocks noGrp="1"/>
           </p:cNvSpPr>
@@ -170,7 +171,7 @@
       </p:sp>
       <p:sp>
         <p:nvSpPr>
-          <p:cNvPr id="1357724531" name="Date Placeholder 2"/>
+          <p:cNvPr id="1563391357" name="Date Placeholder 2"/>
           <p:cNvSpPr>
             <a:spLocks noGrp="1"/>
           </p:cNvSpPr>
@@ -208,7 +209,7 @@
       </p:sp>
       <p:sp>
         <p:nvSpPr>
-          <p:cNvPr id="1644314312" name="Slide Image Placeholder 3"/>
+          <p:cNvPr id="1021045015" name="Slide Image Placeholder 3"/>
           <p:cNvSpPr>
             <a:spLocks noChangeAspect="1" noGrp="1" noRot="1"/>
           </p:cNvSpPr>
@@ -244,7 +245,7 @@
       </p:sp>
       <p:sp>
         <p:nvSpPr>
-          <p:cNvPr id="1441560918" name="Notes Placeholder 4"/>
+          <p:cNvPr id="517078223" name="Notes Placeholder 4"/>
           <p:cNvSpPr>
             <a:spLocks noGrp="1"/>
           </p:cNvSpPr>
@@ -318,7 +319,7 @@
       </p:sp>
       <p:sp>
         <p:nvSpPr>
-          <p:cNvPr id="2068409812" name="Footer Placeholder 5"/>
+          <p:cNvPr id="1763938598" name="Footer Placeholder 5"/>
           <p:cNvSpPr>
             <a:spLocks noGrp="1"/>
           </p:cNvSpPr>
@@ -352,7 +353,7 @@
       </p:sp>
       <p:sp>
         <p:nvSpPr>
-          <p:cNvPr id="341387065" name="Slide Number Placeholder 6"/>
+          <p:cNvPr id="473448971" name="Slide Number Placeholder 6"/>
           <p:cNvSpPr>
             <a:spLocks noGrp="1"/>
           </p:cNvSpPr>
@@ -505,7 +506,7 @@
       </p:grpSpPr>
       <p:sp>
         <p:nvSpPr>
-          <p:cNvPr id="1320883897" name="Slide Image Placeholder 1"/>
+          <p:cNvPr id="171801191" name="Slide Image Placeholder 1"/>
           <p:cNvSpPr>
             <a:spLocks noChangeAspect="1" noGrp="1" noRot="1"/>
           </p:cNvSpPr>
@@ -522,7 +523,7 @@
       </p:sp>
       <p:sp>
         <p:nvSpPr>
-          <p:cNvPr id="1284962591" name="Notes Placeholder 2"/>
+          <p:cNvPr id="745782767" name="Notes Placeholder 2"/>
           <p:cNvSpPr>
             <a:spLocks noGrp="1"/>
           </p:cNvSpPr>
@@ -547,7 +548,7 @@
       </p:sp>
       <p:sp>
         <p:nvSpPr>
-          <p:cNvPr id="2058709017" name="Slide Number Placeholder 3"/>
+          <p:cNvPr id="728365975" name="Slide Number Placeholder 3"/>
           <p:cNvSpPr>
             <a:spLocks noGrp="1"/>
           </p:cNvSpPr>
@@ -598,7 +599,7 @@
       </p:grpSpPr>
       <p:sp>
         <p:nvSpPr>
-          <p:cNvPr id="1288696348" name="Slide Image Placeholder 1"/>
+          <p:cNvPr id="1226976177" name="Slide Image Placeholder 1"/>
           <p:cNvSpPr>
             <a:spLocks noChangeAspect="1" noGrp="1" noRot="1"/>
           </p:cNvSpPr>
@@ -610,7 +611,7 @@
       </p:sp>
       <p:sp>
         <p:nvSpPr>
-          <p:cNvPr id="1269300706" name="Notes Placeholder 2"/>
+          <p:cNvPr id="144414598" name="Notes Placeholder 2"/>
           <p:cNvSpPr>
             <a:spLocks noGrp="1"/>
           </p:cNvSpPr>
@@ -632,7 +633,7 @@
       </p:sp>
       <p:sp>
         <p:nvSpPr>
-          <p:cNvPr id="542211491" name="Slide Number Placeholder 3"/>
+          <p:cNvPr id="1335422231" name="Slide Number Placeholder 3"/>
           <p:cNvSpPr>
             <a:spLocks noGrp="1"/>
           </p:cNvSpPr>
@@ -648,7 +649,7 @@
             <a:pPr>
               <a:defRPr/>
             </a:pPr>
-            <a:fld id="{FE555457-6B51-A976-6F8F-14631A76EC6C}" type="slidenum">
+            <a:fld id="{624947E7-31F4-FC21-E445-8AD8B8180D94}" type="slidenum">
               <a:rPr/>
               <a:t/>
             </a:fld>
@@ -683,7 +684,7 @@
       </p:grpSpPr>
       <p:sp>
         <p:nvSpPr>
-          <p:cNvPr id="362256060" name="Slide Image Placeholder 1"/>
+          <p:cNvPr id="2" name="Slide Image Placeholder 1"/>
           <p:cNvSpPr>
             <a:spLocks noChangeAspect="1" noGrp="1" noRot="1"/>
           </p:cNvSpPr>
@@ -695,7 +696,7 @@
       </p:sp>
       <p:sp>
         <p:nvSpPr>
-          <p:cNvPr id="2052514753" name="Notes Placeholder 2"/>
+          <p:cNvPr id="3" name="Notes Placeholder 2"/>
           <p:cNvSpPr>
             <a:spLocks noGrp="1"/>
           </p:cNvSpPr>
@@ -717,7 +718,7 @@
       </p:sp>
       <p:sp>
         <p:nvSpPr>
-          <p:cNvPr id="2065525312" name="Slide Number Placeholder 3"/>
+          <p:cNvPr id="4" name="Slide Number Placeholder 3"/>
           <p:cNvSpPr>
             <a:spLocks noGrp="1"/>
           </p:cNvSpPr>
@@ -733,7 +734,92 @@
             <a:pPr>
               <a:defRPr/>
             </a:pPr>
-            <a:fld id="{624947E7-31F4-FC21-E445-8AD8B8180D94}" type="slidenum">
+            <a:fld id="{D575FE4D-16C6-0674-AA1D-BD1F9A3B9458}" type="slidenum">
+              <a:rPr/>
+              <a:t/>
+            </a:fld>
+            <a:endParaRPr/>
+          </a:p>
+        </p:txBody>
+      </p:sp>
+    </p:spTree>
+  </p:cSld>
+  <p:clrMapOvr>
+    <a:masterClrMapping/>
+  </p:clrMapOvr>
+</p:notes>
+</file>
+
+<file path=ppt/notesSlides/notesSlide4.xml><?xml version="1.0" encoding="utf-8"?>
+<p:notes xmlns:a="http://schemas.openxmlformats.org/drawingml/2006/main" xmlns:r="http://schemas.openxmlformats.org/officeDocument/2006/relationships" xmlns:p="http://schemas.openxmlformats.org/presentationml/2006/main" xmlns:m="http://schemas.openxmlformats.org/officeDocument/2006/math" xmlns:w="http://schemas.openxmlformats.org/wordprocessingml/2006/main">
+  <p:cSld name="">
+    <p:spTree>
+      <p:nvGrpSpPr>
+        <p:cNvPr id="1" name=""/>
+        <p:cNvGrpSpPr/>
+        <p:nvPr/>
+      </p:nvGrpSpPr>
+      <p:grpSpPr bwMode="auto">
+        <a:xfrm>
+          <a:off x="0" y="0"/>
+          <a:ext cx="0" cy="0"/>
+          <a:chOff x="0" y="0"/>
+          <a:chExt cx="0" cy="0"/>
+        </a:xfrm>
+      </p:grpSpPr>
+      <p:sp>
+        <p:nvSpPr>
+          <p:cNvPr id="830155011" name="Slide Image Placeholder 1"/>
+          <p:cNvSpPr>
+            <a:spLocks noChangeAspect="1" noGrp="1" noRot="1"/>
+          </p:cNvSpPr>
+          <p:nvPr>
+            <p:ph type="sldImg"/>
+          </p:nvPr>
+        </p:nvSpPr>
+        <p:spPr bwMode="auto"/>
+      </p:sp>
+      <p:sp>
+        <p:nvSpPr>
+          <p:cNvPr id="461568217" name="Notes Placeholder 2"/>
+          <p:cNvSpPr>
+            <a:spLocks noGrp="1"/>
+          </p:cNvSpPr>
+          <p:nvPr>
+            <p:ph type="body" idx="1"/>
+          </p:nvPr>
+        </p:nvSpPr>
+        <p:spPr bwMode="auto"/>
+        <p:txBody>
+          <a:bodyPr/>
+          <a:lstStyle/>
+          <a:p>
+            <a:pPr>
+              <a:defRPr/>
+            </a:pPr>
+            <a:endParaRPr/>
+          </a:p>
+        </p:txBody>
+      </p:sp>
+      <p:sp>
+        <p:nvSpPr>
+          <p:cNvPr id="840923310" name="Slide Number Placeholder 3"/>
+          <p:cNvSpPr>
+            <a:spLocks noGrp="1"/>
+          </p:cNvSpPr>
+          <p:nvPr>
+            <p:ph type="sldNum" sz="quarter" idx="10"/>
+          </p:nvPr>
+        </p:nvSpPr>
+        <p:spPr bwMode="auto"/>
+        <p:txBody>
+          <a:bodyPr/>
+          <a:lstStyle/>
+          <a:p>
+            <a:pPr>
+              <a:defRPr/>
+            </a:pPr>
+            <a:fld id="{FE555457-6B51-A976-6F8F-14631A76EC6C}" type="slidenum">
               <a:rPr/>
               <a:t/>
             </a:fld>
@@ -768,7 +854,7 @@
       </p:grpSpPr>
       <p:sp>
         <p:nvSpPr>
-          <p:cNvPr id="2026677189" name="Shape 1059"/>
+          <p:cNvPr id="1837584545" name="Shape 1059"/>
           <p:cNvSpPr>
             <a:spLocks noChangeArrowheads="1" noGrp="1"/>
           </p:cNvSpPr>
@@ -891,7 +977,7 @@
       </p:sp>
       <p:sp>
         <p:nvSpPr>
-          <p:cNvPr id="1526984459" name="Shape 1060"/>
+          <p:cNvPr id="1067815885" name="Shape 1060"/>
           <p:cNvSpPr>
             <a:spLocks noChangeArrowheads="1" noGrp="1"/>
           </p:cNvSpPr>
@@ -982,7 +1068,7 @@
       </p:sp>
       <p:sp>
         <p:nvSpPr>
-          <p:cNvPr id="599778806" name="Shape 1061"/>
+          <p:cNvPr id="191631039" name="Shape 1061"/>
           <p:cNvSpPr>
             <a:spLocks noChangeArrowheads="1" noGrp="1"/>
           </p:cNvSpPr>
@@ -1068,7 +1154,7 @@
       </p:sp>
       <p:sp>
         <p:nvSpPr>
-          <p:cNvPr id="1427290337" name="Shape 1062"/>
+          <p:cNvPr id="2093490920" name="Shape 1062"/>
           <p:cNvSpPr>
             <a:spLocks noChangeArrowheads="1" noGrp="1"/>
           </p:cNvSpPr>
@@ -1146,7 +1232,7 @@
       </p:sp>
       <p:sp>
         <p:nvSpPr>
-          <p:cNvPr id="2044976205" name="Shape 1063"/>
+          <p:cNvPr id="393498946" name="Shape 1063"/>
           <p:cNvSpPr>
             <a:spLocks noChangeArrowheads="1" noGrp="1"/>
           </p:cNvSpPr>
@@ -1224,7 +1310,7 @@
       </p:sp>
       <p:sp>
         <p:nvSpPr>
-          <p:cNvPr id="1941877897" name="Subtitle 2"/>
+          <p:cNvPr id="406675149" name="Subtitle 2"/>
           <p:cNvSpPr>
             <a:spLocks noGrp="1"/>
           </p:cNvSpPr>
@@ -1347,7 +1433,7 @@
       </p:sp>
       <p:sp>
         <p:nvSpPr>
-          <p:cNvPr id="1460064875" name="Date Placeholder 3"/>
+          <p:cNvPr id="1339093656" name="Date Placeholder 3"/>
           <p:cNvSpPr>
             <a:spLocks noGrp="1"/>
           </p:cNvSpPr>
@@ -1373,7 +1459,7 @@
       </p:sp>
       <p:sp>
         <p:nvSpPr>
-          <p:cNvPr id="66825871" name="Footer Placeholder 4"/>
+          <p:cNvPr id="357430217" name="Footer Placeholder 4"/>
           <p:cNvSpPr>
             <a:spLocks noGrp="1"/>
           </p:cNvSpPr>
@@ -1395,7 +1481,7 @@
       </p:sp>
       <p:sp>
         <p:nvSpPr>
-          <p:cNvPr id="261450754" name="Slide Number Placeholder 5"/>
+          <p:cNvPr id="1703972731" name="Slide Number Placeholder 5"/>
           <p:cNvSpPr>
             <a:spLocks noGrp="1"/>
           </p:cNvSpPr>
@@ -1421,7 +1507,7 @@
       </p:sp>
       <p:sp>
         <p:nvSpPr>
-          <p:cNvPr id="903669428" name="Title 6"/>
+          <p:cNvPr id="1521105589" name="Title 6"/>
           <p:cNvSpPr>
             <a:spLocks noGrp="1"/>
           </p:cNvSpPr>
@@ -1481,7 +1567,7 @@
       </p:grpSpPr>
       <p:sp>
         <p:nvSpPr>
-          <p:cNvPr id="306627147" name="Title 1"/>
+          <p:cNvPr id="1585731061" name="Title 1"/>
           <p:cNvSpPr>
             <a:spLocks noGrp="1"/>
           </p:cNvSpPr>
@@ -1507,7 +1593,7 @@
       </p:sp>
       <p:sp>
         <p:nvSpPr>
-          <p:cNvPr id="1027071144" name="Vertical Text Placeholder 2"/>
+          <p:cNvPr id="262992165" name="Vertical Text Placeholder 2"/>
           <p:cNvSpPr>
             <a:spLocks noGrp="1"/>
           </p:cNvSpPr>
@@ -1573,7 +1659,7 @@
       </p:sp>
       <p:sp>
         <p:nvSpPr>
-          <p:cNvPr id="928547243" name="Date Placeholder 3"/>
+          <p:cNvPr id="1414929686" name="Date Placeholder 3"/>
           <p:cNvSpPr>
             <a:spLocks noGrp="1"/>
           </p:cNvSpPr>
@@ -1599,7 +1685,7 @@
       </p:sp>
       <p:sp>
         <p:nvSpPr>
-          <p:cNvPr id="799338722" name="Footer Placeholder 4"/>
+          <p:cNvPr id="1485601386" name="Footer Placeholder 4"/>
           <p:cNvSpPr>
             <a:spLocks noGrp="1"/>
           </p:cNvSpPr>
@@ -1621,7 +1707,7 @@
       </p:sp>
       <p:sp>
         <p:nvSpPr>
-          <p:cNvPr id="1350437668" name="Slide Number Placeholder 5"/>
+          <p:cNvPr id="971412643" name="Slide Number Placeholder 5"/>
           <p:cNvSpPr>
             <a:spLocks noGrp="1"/>
           </p:cNvSpPr>
@@ -1672,7 +1758,7 @@
       </p:grpSpPr>
       <p:sp>
         <p:nvSpPr>
-          <p:cNvPr id="93048536" name="Vertical Title 1"/>
+          <p:cNvPr id="2035614908" name="Vertical Title 1"/>
           <p:cNvSpPr>
             <a:spLocks noGrp="1"/>
           </p:cNvSpPr>
@@ -1707,7 +1793,7 @@
       </p:sp>
       <p:sp>
         <p:nvSpPr>
-          <p:cNvPr id="1205380001" name="Vertical Text Placeholder 2"/>
+          <p:cNvPr id="2062669697" name="Vertical Text Placeholder 2"/>
           <p:cNvSpPr>
             <a:spLocks noGrp="1"/>
           </p:cNvSpPr>
@@ -1778,7 +1864,7 @@
       </p:sp>
       <p:sp>
         <p:nvSpPr>
-          <p:cNvPr id="858178230" name="Date Placeholder 3"/>
+          <p:cNvPr id="83642929" name="Date Placeholder 3"/>
           <p:cNvSpPr>
             <a:spLocks noGrp="1"/>
           </p:cNvSpPr>
@@ -1804,7 +1890,7 @@
       </p:sp>
       <p:sp>
         <p:nvSpPr>
-          <p:cNvPr id="911608347" name="Footer Placeholder 4"/>
+          <p:cNvPr id="967030483" name="Footer Placeholder 4"/>
           <p:cNvSpPr>
             <a:spLocks noGrp="1"/>
           </p:cNvSpPr>
@@ -1826,7 +1912,7 @@
       </p:sp>
       <p:sp>
         <p:nvSpPr>
-          <p:cNvPr id="75290300" name="Slide Number Placeholder 5"/>
+          <p:cNvPr id="1574307598" name="Slide Number Placeholder 5"/>
           <p:cNvSpPr>
             <a:spLocks noGrp="1"/>
           </p:cNvSpPr>
@@ -1877,7 +1963,7 @@
       </p:grpSpPr>
       <p:sp>
         <p:nvSpPr>
-          <p:cNvPr id="1828511351" name="Title 1"/>
+          <p:cNvPr id="1093121916" name="Title 1"/>
           <p:cNvSpPr>
             <a:spLocks noGrp="1"/>
           </p:cNvSpPr>
@@ -1903,7 +1989,7 @@
       </p:sp>
       <p:sp>
         <p:nvSpPr>
-          <p:cNvPr id="2066605236" name="Content Placeholder 2"/>
+          <p:cNvPr id="40243370" name="Content Placeholder 2"/>
           <p:cNvSpPr>
             <a:spLocks noGrp="1"/>
           </p:cNvSpPr>
@@ -1969,7 +2055,7 @@
       </p:sp>
       <p:sp>
         <p:nvSpPr>
-          <p:cNvPr id="1389627108" name="Date Placeholder 3"/>
+          <p:cNvPr id="1877521974" name="Date Placeholder 3"/>
           <p:cNvSpPr>
             <a:spLocks noGrp="1"/>
           </p:cNvSpPr>
@@ -1995,7 +2081,7 @@
       </p:sp>
       <p:sp>
         <p:nvSpPr>
-          <p:cNvPr id="1489436060" name="Footer Placeholder 4"/>
+          <p:cNvPr id="554815718" name="Footer Placeholder 4"/>
           <p:cNvSpPr>
             <a:spLocks noGrp="1"/>
           </p:cNvSpPr>
@@ -2017,7 +2103,7 @@
       </p:sp>
       <p:sp>
         <p:nvSpPr>
-          <p:cNvPr id="168341511" name="Slide Number Placeholder 5"/>
+          <p:cNvPr id="789512437" name="Slide Number Placeholder 5"/>
           <p:cNvSpPr>
             <a:spLocks noGrp="1"/>
           </p:cNvSpPr>
@@ -2068,7 +2154,7 @@
       </p:grpSpPr>
       <p:sp>
         <p:nvSpPr>
-          <p:cNvPr id="2126463647" name="Title 1"/>
+          <p:cNvPr id="435935308" name="Title 1"/>
           <p:cNvSpPr>
             <a:spLocks noGrp="1"/>
           </p:cNvSpPr>
@@ -2103,7 +2189,7 @@
       </p:sp>
       <p:sp>
         <p:nvSpPr>
-          <p:cNvPr id="1885146287" name="Text Placeholder 2"/>
+          <p:cNvPr id="739147948" name="Text Placeholder 2"/>
           <p:cNvSpPr>
             <a:spLocks noGrp="1"/>
           </p:cNvSpPr>
@@ -2225,7 +2311,7 @@
       </p:sp>
       <p:sp>
         <p:nvSpPr>
-          <p:cNvPr id="1034242835" name="Date Placeholder 3"/>
+          <p:cNvPr id="2032927988" name="Date Placeholder 3"/>
           <p:cNvSpPr>
             <a:spLocks noGrp="1"/>
           </p:cNvSpPr>
@@ -2251,7 +2337,7 @@
       </p:sp>
       <p:sp>
         <p:nvSpPr>
-          <p:cNvPr id="986770858" name="Footer Placeholder 4"/>
+          <p:cNvPr id="86515810" name="Footer Placeholder 4"/>
           <p:cNvSpPr>
             <a:spLocks noGrp="1"/>
           </p:cNvSpPr>
@@ -2273,7 +2359,7 @@
       </p:sp>
       <p:sp>
         <p:nvSpPr>
-          <p:cNvPr id="1120495501" name="Slide Number Placeholder 5"/>
+          <p:cNvPr id="643745617" name="Slide Number Placeholder 5"/>
           <p:cNvSpPr>
             <a:spLocks noGrp="1"/>
           </p:cNvSpPr>
@@ -2324,7 +2410,7 @@
       </p:grpSpPr>
       <p:sp>
         <p:nvSpPr>
-          <p:cNvPr id="99492428" name="Title 1"/>
+          <p:cNvPr id="1977827141" name="Title 1"/>
           <p:cNvSpPr>
             <a:spLocks noGrp="1"/>
           </p:cNvSpPr>
@@ -2350,7 +2436,7 @@
       </p:sp>
       <p:sp>
         <p:nvSpPr>
-          <p:cNvPr id="1421740029" name="Content Placeholder 2"/>
+          <p:cNvPr id="1391740785" name="Content Placeholder 2"/>
           <p:cNvSpPr>
             <a:spLocks noGrp="1"/>
           </p:cNvSpPr>
@@ -2449,7 +2535,7 @@
       </p:sp>
       <p:sp>
         <p:nvSpPr>
-          <p:cNvPr id="741883623" name="Content Placeholder 3"/>
+          <p:cNvPr id="148385659" name="Content Placeholder 3"/>
           <p:cNvSpPr>
             <a:spLocks noGrp="1"/>
           </p:cNvSpPr>
@@ -2548,7 +2634,7 @@
       </p:sp>
       <p:sp>
         <p:nvSpPr>
-          <p:cNvPr id="768176988" name="Date Placeholder 4"/>
+          <p:cNvPr id="1011682855" name="Date Placeholder 4"/>
           <p:cNvSpPr>
             <a:spLocks noGrp="1"/>
           </p:cNvSpPr>
@@ -2574,7 +2660,7 @@
       </p:sp>
       <p:sp>
         <p:nvSpPr>
-          <p:cNvPr id="538185513" name="Footer Placeholder 5"/>
+          <p:cNvPr id="606420595" name="Footer Placeholder 5"/>
           <p:cNvSpPr>
             <a:spLocks noGrp="1"/>
           </p:cNvSpPr>
@@ -2596,7 +2682,7 @@
       </p:sp>
       <p:sp>
         <p:nvSpPr>
-          <p:cNvPr id="224391065" name="Slide Number Placeholder 6"/>
+          <p:cNvPr id="233389371" name="Slide Number Placeholder 6"/>
           <p:cNvSpPr>
             <a:spLocks noGrp="1"/>
           </p:cNvSpPr>
@@ -2647,7 +2733,7 @@
       </p:grpSpPr>
       <p:sp>
         <p:nvSpPr>
-          <p:cNvPr id="1615100972" name="Title 1"/>
+          <p:cNvPr id="2082089253" name="Title 1"/>
           <p:cNvSpPr>
             <a:spLocks noGrp="1"/>
           </p:cNvSpPr>
@@ -2677,7 +2763,7 @@
       </p:sp>
       <p:sp>
         <p:nvSpPr>
-          <p:cNvPr id="1365184095" name="Text Placeholder 2"/>
+          <p:cNvPr id="1209205604" name="Text Placeholder 2"/>
           <p:cNvSpPr>
             <a:spLocks noGrp="1"/>
           </p:cNvSpPr>
@@ -2745,7 +2831,7 @@
       </p:sp>
       <p:sp>
         <p:nvSpPr>
-          <p:cNvPr id="1767709692" name="Content Placeholder 3"/>
+          <p:cNvPr id="980547401" name="Content Placeholder 3"/>
           <p:cNvSpPr>
             <a:spLocks noGrp="1"/>
           </p:cNvSpPr>
@@ -2844,7 +2930,7 @@
       </p:sp>
       <p:sp>
         <p:nvSpPr>
-          <p:cNvPr id="18670573" name="Text Placeholder 4"/>
+          <p:cNvPr id="816400543" name="Text Placeholder 4"/>
           <p:cNvSpPr>
             <a:spLocks noGrp="1"/>
           </p:cNvSpPr>
@@ -2912,7 +2998,7 @@
       </p:sp>
       <p:sp>
         <p:nvSpPr>
-          <p:cNvPr id="2115012405" name="Content Placeholder 5"/>
+          <p:cNvPr id="1940183667" name="Content Placeholder 5"/>
           <p:cNvSpPr>
             <a:spLocks noGrp="1"/>
           </p:cNvSpPr>
@@ -3011,7 +3097,7 @@
       </p:sp>
       <p:sp>
         <p:nvSpPr>
-          <p:cNvPr id="1562928700" name="Date Placeholder 6"/>
+          <p:cNvPr id="1537915971" name="Date Placeholder 6"/>
           <p:cNvSpPr>
             <a:spLocks noGrp="1"/>
           </p:cNvSpPr>
@@ -3037,7 +3123,7 @@
       </p:sp>
       <p:sp>
         <p:nvSpPr>
-          <p:cNvPr id="275960861" name="Footer Placeholder 7"/>
+          <p:cNvPr id="1968526181" name="Footer Placeholder 7"/>
           <p:cNvSpPr>
             <a:spLocks noGrp="1"/>
           </p:cNvSpPr>
@@ -3059,7 +3145,7 @@
       </p:sp>
       <p:sp>
         <p:nvSpPr>
-          <p:cNvPr id="1505642763" name="Slide Number Placeholder 8"/>
+          <p:cNvPr id="612360336" name="Slide Number Placeholder 8"/>
           <p:cNvSpPr>
             <a:spLocks noGrp="1"/>
           </p:cNvSpPr>
@@ -3110,7 +3196,7 @@
       </p:grpSpPr>
       <p:sp>
         <p:nvSpPr>
-          <p:cNvPr id="1168928262" name="Title 1"/>
+          <p:cNvPr id="1239730146" name="Title 1"/>
           <p:cNvSpPr>
             <a:spLocks noGrp="1"/>
           </p:cNvSpPr>
@@ -3136,7 +3222,7 @@
       </p:sp>
       <p:sp>
         <p:nvSpPr>
-          <p:cNvPr id="1517683295" name="Date Placeholder 2"/>
+          <p:cNvPr id="541239928" name="Date Placeholder 2"/>
           <p:cNvSpPr>
             <a:spLocks noGrp="1"/>
           </p:cNvSpPr>
@@ -3162,7 +3248,7 @@
       </p:sp>
       <p:sp>
         <p:nvSpPr>
-          <p:cNvPr id="929164286" name="Footer Placeholder 3"/>
+          <p:cNvPr id="1712999162" name="Footer Placeholder 3"/>
           <p:cNvSpPr>
             <a:spLocks noGrp="1"/>
           </p:cNvSpPr>
@@ -3184,7 +3270,7 @@
       </p:sp>
       <p:sp>
         <p:nvSpPr>
-          <p:cNvPr id="327752810" name="Slide Number Placeholder 4"/>
+          <p:cNvPr id="554134081" name="Slide Number Placeholder 4"/>
           <p:cNvSpPr>
             <a:spLocks noGrp="1"/>
           </p:cNvSpPr>
@@ -3235,7 +3321,7 @@
       </p:grpSpPr>
       <p:sp>
         <p:nvSpPr>
-          <p:cNvPr id="681637791" name="Date Placeholder 1"/>
+          <p:cNvPr id="1309054067" name="Date Placeholder 1"/>
           <p:cNvSpPr>
             <a:spLocks noGrp="1"/>
           </p:cNvSpPr>
@@ -3261,7 +3347,7 @@
       </p:sp>
       <p:sp>
         <p:nvSpPr>
-          <p:cNvPr id="2099844640" name="Footer Placeholder 2"/>
+          <p:cNvPr id="680356049" name="Footer Placeholder 2"/>
           <p:cNvSpPr>
             <a:spLocks noGrp="1"/>
           </p:cNvSpPr>
@@ -3283,7 +3369,7 @@
       </p:sp>
       <p:sp>
         <p:nvSpPr>
-          <p:cNvPr id="1286086885" name="Slide Number Placeholder 3"/>
+          <p:cNvPr id="1779416505" name="Slide Number Placeholder 3"/>
           <p:cNvSpPr>
             <a:spLocks noGrp="1"/>
           </p:cNvSpPr>
@@ -3334,7 +3420,7 @@
       </p:grpSpPr>
       <p:sp>
         <p:nvSpPr>
-          <p:cNvPr id="1127558528" name="Title 1"/>
+          <p:cNvPr id="180750771" name="Title 1"/>
           <p:cNvSpPr>
             <a:spLocks noGrp="1"/>
           </p:cNvSpPr>
@@ -3369,7 +3455,7 @@
       </p:sp>
       <p:sp>
         <p:nvSpPr>
-          <p:cNvPr id="113058756" name="Content Placeholder 2"/>
+          <p:cNvPr id="467617651" name="Content Placeholder 2"/>
           <p:cNvSpPr>
             <a:spLocks noGrp="1"/>
           </p:cNvSpPr>
@@ -3468,7 +3554,7 @@
       </p:sp>
       <p:sp>
         <p:nvSpPr>
-          <p:cNvPr id="924211712" name="Text Placeholder 3"/>
+          <p:cNvPr id="1615464784" name="Text Placeholder 3"/>
           <p:cNvSpPr>
             <a:spLocks noGrp="1"/>
           </p:cNvSpPr>
@@ -3536,7 +3622,7 @@
       </p:sp>
       <p:sp>
         <p:nvSpPr>
-          <p:cNvPr id="378689534" name="Date Placeholder 4"/>
+          <p:cNvPr id="79159959" name="Date Placeholder 4"/>
           <p:cNvSpPr>
             <a:spLocks noGrp="1"/>
           </p:cNvSpPr>
@@ -3562,7 +3648,7 @@
       </p:sp>
       <p:sp>
         <p:nvSpPr>
-          <p:cNvPr id="1046326186" name="Footer Placeholder 5"/>
+          <p:cNvPr id="575835355" name="Footer Placeholder 5"/>
           <p:cNvSpPr>
             <a:spLocks noGrp="1"/>
           </p:cNvSpPr>
@@ -3584,7 +3670,7 @@
       </p:sp>
       <p:sp>
         <p:nvSpPr>
-          <p:cNvPr id="811128797" name="Slide Number Placeholder 6"/>
+          <p:cNvPr id="561421194" name="Slide Number Placeholder 6"/>
           <p:cNvSpPr>
             <a:spLocks noGrp="1"/>
           </p:cNvSpPr>
@@ -3635,7 +3721,7 @@
       </p:grpSpPr>
       <p:sp>
         <p:nvSpPr>
-          <p:cNvPr id="1493999160" name="Title 1"/>
+          <p:cNvPr id="1253288243" name="Title 1"/>
           <p:cNvSpPr>
             <a:spLocks noGrp="1"/>
           </p:cNvSpPr>
@@ -3670,7 +3756,7 @@
       </p:sp>
       <p:sp>
         <p:nvSpPr>
-          <p:cNvPr id="1820435003" name="Picture Placeholder 2"/>
+          <p:cNvPr id="805908272" name="Picture Placeholder 2"/>
           <p:cNvSpPr>
             <a:spLocks noGrp="1"/>
           </p:cNvSpPr>
@@ -3734,7 +3820,7 @@
       </p:sp>
       <p:sp>
         <p:nvSpPr>
-          <p:cNvPr id="399278223" name="Text Placeholder 3"/>
+          <p:cNvPr id="505303960" name="Text Placeholder 3"/>
           <p:cNvSpPr>
             <a:spLocks noGrp="1"/>
           </p:cNvSpPr>
@@ -3802,7 +3888,7 @@
       </p:sp>
       <p:sp>
         <p:nvSpPr>
-          <p:cNvPr id="1987191544" name="Date Placeholder 4"/>
+          <p:cNvPr id="1867125503" name="Date Placeholder 4"/>
           <p:cNvSpPr>
             <a:spLocks noGrp="1"/>
           </p:cNvSpPr>
@@ -3828,7 +3914,7 @@
       </p:sp>
       <p:sp>
         <p:nvSpPr>
-          <p:cNvPr id="56039818" name="Footer Placeholder 5"/>
+          <p:cNvPr id="108147678" name="Footer Placeholder 5"/>
           <p:cNvSpPr>
             <a:spLocks noGrp="1"/>
           </p:cNvSpPr>
@@ -3850,7 +3936,7 @@
       </p:sp>
       <p:sp>
         <p:nvSpPr>
-          <p:cNvPr id="1727950361" name="Slide Number Placeholder 6"/>
+          <p:cNvPr id="625603293" name="Slide Number Placeholder 6"/>
           <p:cNvSpPr>
             <a:spLocks noGrp="1"/>
           </p:cNvSpPr>
@@ -3906,7 +3992,7 @@
       </p:grpSpPr>
       <p:sp>
         <p:nvSpPr>
-          <p:cNvPr id="1720701535" name="Shape 1059"/>
+          <p:cNvPr id="199800047" name="Shape 1059"/>
           <p:cNvSpPr>
             <a:spLocks noChangeArrowheads="1" noGrp="1"/>
           </p:cNvSpPr>
@@ -3984,7 +4070,7 @@
       </p:sp>
       <p:sp>
         <p:nvSpPr>
-          <p:cNvPr id="1093036181" name="Shape 1060"/>
+          <p:cNvPr id="666520458" name="Shape 1060"/>
           <p:cNvSpPr>
             <a:spLocks noChangeArrowheads="1" noGrp="1"/>
           </p:cNvSpPr>
@@ -4065,7 +4151,7 @@
       </p:sp>
       <p:sp>
         <p:nvSpPr>
-          <p:cNvPr id="1530092017" name="Shape 1061"/>
+          <p:cNvPr id="395012210" name="Shape 1061"/>
           <p:cNvSpPr>
             <a:spLocks noChangeArrowheads="1" noGrp="1"/>
           </p:cNvSpPr>
@@ -4183,7 +4269,7 @@
       </p:sp>
       <p:sp>
         <p:nvSpPr>
-          <p:cNvPr id="1176943548" name="Title 1"/>
+          <p:cNvPr id="244951113" name="Title 1"/>
           <p:cNvSpPr>
             <a:spLocks noGrp="1"/>
           </p:cNvSpPr>
@@ -4219,7 +4305,7 @@
       </p:sp>
       <p:sp>
         <p:nvSpPr>
-          <p:cNvPr id="2072047656" name="Text Placeholder 2"/>
+          <p:cNvPr id="1970895436" name="Text Placeholder 2"/>
           <p:cNvSpPr>
             <a:spLocks noGrp="1"/>
           </p:cNvSpPr>
@@ -4295,7 +4381,7 @@
       </p:sp>
       <p:sp>
         <p:nvSpPr>
-          <p:cNvPr id="1331518569" name="Date Placeholder 3"/>
+          <p:cNvPr id="604357387" name="Date Placeholder 3"/>
           <p:cNvSpPr>
             <a:spLocks noGrp="1"/>
           </p:cNvSpPr>
@@ -4339,7 +4425,7 @@
       </p:sp>
       <p:sp>
         <p:nvSpPr>
-          <p:cNvPr id="1578432886" name="Footer Placeholder 4"/>
+          <p:cNvPr id="1009607023" name="Footer Placeholder 4"/>
           <p:cNvSpPr>
             <a:spLocks noGrp="1"/>
           </p:cNvSpPr>
@@ -4379,7 +4465,7 @@
       </p:sp>
       <p:sp>
         <p:nvSpPr>
-          <p:cNvPr id="581309297" name="Slide Number Placeholder 5"/>
+          <p:cNvPr id="1983273979" name="Slide Number Placeholder 5"/>
           <p:cNvSpPr>
             <a:spLocks noGrp="1"/>
           </p:cNvSpPr>
@@ -4727,7 +4813,7 @@
       </p:grpSpPr>
       <p:sp>
         <p:nvSpPr>
-          <p:cNvPr id="1328512007" name="Title 1"/>
+          <p:cNvPr id="90034246" name="Title 1"/>
           <p:cNvSpPr>
             <a:spLocks noGrp="1"/>
           </p:cNvSpPr>
@@ -4753,7 +4839,7 @@
       </p:sp>
       <p:sp>
         <p:nvSpPr>
-          <p:cNvPr id="363318649" name="Subtitle 2"/>
+          <p:cNvPr id="278813642" name="Subtitle 2"/>
           <p:cNvSpPr>
             <a:spLocks noGrp="1"/>
           </p:cNvSpPr>
@@ -4806,89 +4892,51 @@
           <a:chExt cx="0" cy="0"/>
         </a:xfrm>
       </p:grpSpPr>
-      <p:graphicFrame>
-        <p:nvGraphicFramePr>
-          <p:cNvPr id="1726197217" name=""/>
-          <p:cNvGraphicFramePr>
-            <a:graphicFrameLocks xmlns:a="http://schemas.openxmlformats.org/drawingml/2006/main" noChangeAspect="1"/>
-          </p:cNvGraphicFramePr>
-          <p:nvPr/>
-        </p:nvGraphicFramePr>
-        <p:xfrm flipH="0" flipV="0">
-          <a:off x="609599" y="647227"/>
-          <a:ext cx="10972800" cy="5563544"/>
-        </p:xfrm>
-        <a:graphic>
-          <a:graphicData uri="http://schemas.openxmlformats.org/presentationml/2006/ole">
-            <p:oleObj name="oleObj" r:id="rId4" imgW="10972800" imgH="5562600" progId="Excel.Sheet.12">
-              <p:embed/>
-              <p:pic>
-                <p:nvPicPr>
-                  <p:cNvPr id="1726197217" name=""/>
-                  <p:cNvPicPr/>
-                  <p:nvPr/>
-                </p:nvPicPr>
-                <p:blipFill rotWithShape="1">
-                  <a:blip r:embed="rId3"/>
-                  <a:stretch/>
-                </p:blipFill>
-                <p:spPr bwMode="auto">
-                  <a:xfrm flipH="0" flipV="0">
-                    <a:off x="609599" y="647227"/>
-                    <a:ext cx="10972800" cy="5563544"/>
-                  </a:xfrm>
-                  <a:prstGeom prst="rect">
-                    <a:avLst/>
-                  </a:prstGeom>
-                </p:spPr>
-              </p:pic>
-            </p:oleObj>
-          </a:graphicData>
-        </a:graphic>
-      </p:graphicFrame>
-      <p:sp>
-        <p:nvSpPr>
-          <p:cNvPr id="1229242038" name=""/>
-          <p:cNvSpPr txBox="1"/>
-          <p:nvPr/>
-        </p:nvSpPr>
-        <p:spPr bwMode="auto">
-          <a:xfrm rot="0" flipH="0" flipV="0">
-            <a:off x="609599" y="217713"/>
-            <a:ext cx="9279905" cy="366119"/>
-          </a:xfrm>
-          <a:prstGeom prst="rect">
-            <a:avLst/>
-          </a:prstGeom>
-          <a:noFill/>
-        </p:spPr>
-        <p:txBody>
-          <a:bodyPr vertOverflow="overflow" horzOverflow="overflow" vert="horz" wrap="square" lIns="91440" tIns="45720" rIns="91440" bIns="45720" numCol="1" spcCol="0" rtlCol="0" fromWordArt="0" anchor="t" anchorCtr="0" forceAA="0" upright="0" compatLnSpc="0">
-            <a:spAutoFit/>
-          </a:bodyPr>
-          <a:p>
-            <a:pPr>
-              <a:defRPr/>
-            </a:pPr>
-            <a:r>
-              <a:rPr lang="ru-RU">
-                <a:solidFill>
-                  <a:schemeClr val="tx1">
-                    <a:lumMod val="65000"/>
-                    <a:lumOff val="35000"/>
-                  </a:schemeClr>
-                </a:solidFill>
-              </a:rPr>
-              <a:t>Таблица сравнения популярных дистрибутивов с основными идеями новой ОС</a:t>
-            </a:r>
-            <a:endParaRPr>
-              <a:solidFill>
-                <a:schemeClr val="tx1">
-                  <a:lumMod val="65000"/>
-                  <a:lumOff val="35000"/>
-                </a:schemeClr>
-              </a:solidFill>
-            </a:endParaRPr>
+      <p:sp>
+        <p:nvSpPr>
+          <p:cNvPr id="721113485" name="Title 1"/>
+          <p:cNvSpPr>
+            <a:spLocks noGrp="1"/>
+          </p:cNvSpPr>
+          <p:nvPr>
+            <p:ph type="title"/>
+          </p:nvPr>
+        </p:nvSpPr>
+        <p:spPr bwMode="auto"/>
+        <p:txBody>
+          <a:bodyPr/>
+          <a:lstStyle/>
+          <a:p>
+            <a:pPr>
+              <a:defRPr/>
+            </a:pPr>
+            <a:r>
+              <a:rPr lang="ru-RU"/>
+              <a:t>Основное устройство системы</a:t>
+            </a:r>
+            <a:endParaRPr/>
+          </a:p>
+        </p:txBody>
+      </p:sp>
+      <p:sp>
+        <p:nvSpPr>
+          <p:cNvPr id="1778221795" name="Content Placeholder 2"/>
+          <p:cNvSpPr>
+            <a:spLocks noGrp="1"/>
+          </p:cNvSpPr>
+          <p:nvPr>
+            <p:ph idx="1"/>
+          </p:nvPr>
+        </p:nvSpPr>
+        <p:spPr bwMode="auto"/>
+        <p:txBody>
+          <a:bodyPr/>
+          <a:lstStyle/>
+          <a:p>
+            <a:pPr>
+              <a:defRPr/>
+            </a:pPr>
+            <a:endParaRPr/>
           </a:p>
         </p:txBody>
       </p:sp>
@@ -4927,7 +4975,7 @@
       </p:grpSpPr>
       <p:sp>
         <p:nvSpPr>
-          <p:cNvPr id="1135823101" name="Title 1"/>
+          <p:cNvPr id="1264777157" name="Title 1"/>
           <p:cNvSpPr>
             <a:spLocks noGrp="1"/>
           </p:cNvSpPr>
@@ -4943,13 +4991,17 @@
             <a:pPr>
               <a:defRPr/>
             </a:pPr>
-            <a:endParaRPr/>
-          </a:p>
-        </p:txBody>
-      </p:sp>
-      <p:sp>
-        <p:nvSpPr>
-          <p:cNvPr id="96060154" name="Content Placeholder 2"/>
+            <a:r>
+              <a:rPr lang="ru-RU"/>
+              <a:t>Отличия от других дистрибутивов</a:t>
+            </a:r>
+            <a:endParaRPr/>
+          </a:p>
+        </p:txBody>
+      </p:sp>
+      <p:sp>
+        <p:nvSpPr>
+          <p:cNvPr id="1896332224" name="Content Placeholder 2"/>
           <p:cNvSpPr>
             <a:spLocks noGrp="1"/>
           </p:cNvSpPr>
@@ -4966,6 +5018,125 @@
               <a:defRPr/>
             </a:pPr>
             <a:endParaRPr/>
+          </a:p>
+        </p:txBody>
+      </p:sp>
+    </p:spTree>
+  </p:cSld>
+  <p:clrMapOvr>
+    <a:masterClrMapping/>
+  </p:clrMapOvr>
+  <mc:AlternateContent xmlns:mc="http://schemas.openxmlformats.org/markup-compatibility/2006">
+    <mc:Choice xmlns:p159="http://schemas.microsoft.com/office/powerpoint/2015/09/main" xmlns:p14="http://schemas.microsoft.com/office/powerpoint/2010/main" Requires="p159">
+      <p:transition p14:dur="2000" advClick="1"/>
+    </mc:Choice>
+    <mc:Fallback>
+      <p:transition advClick="1"/>
+    </mc:Fallback>
+  </mc:AlternateContent>
+</p:sld>
+</file>
+
+<file path=ppt/slides/slide4.xml><?xml version="1.0" encoding="utf-8"?>
+<p:sld xmlns:a="http://schemas.openxmlformats.org/drawingml/2006/main" xmlns:r="http://schemas.openxmlformats.org/officeDocument/2006/relationships" xmlns:p="http://schemas.openxmlformats.org/presentationml/2006/main" xmlns:m="http://schemas.openxmlformats.org/officeDocument/2006/math" xmlns:w="http://schemas.openxmlformats.org/wordprocessingml/2006/main" xmlns:mc="http://schemas.openxmlformats.org/markup-compatibility/2006" showMasterPhAnim="0" showMasterSp="1" show="1">
+  <p:cSld name="">
+    <p:spTree>
+      <p:nvGrpSpPr>
+        <p:cNvPr id="1" name=""/>
+        <p:cNvGrpSpPr/>
+        <p:nvPr/>
+      </p:nvGrpSpPr>
+      <p:grpSpPr bwMode="auto">
+        <a:xfrm>
+          <a:off x="0" y="0"/>
+          <a:ext cx="0" cy="0"/>
+          <a:chOff x="0" y="0"/>
+          <a:chExt cx="0" cy="0"/>
+        </a:xfrm>
+      </p:grpSpPr>
+      <p:graphicFrame>
+        <p:nvGraphicFramePr>
+          <p:cNvPr id="1396273831" name=""/>
+          <p:cNvGraphicFramePr>
+            <a:graphicFrameLocks xmlns:a="http://schemas.openxmlformats.org/drawingml/2006/main" noChangeAspect="1"/>
+          </p:cNvGraphicFramePr>
+          <p:nvPr/>
+        </p:nvGraphicFramePr>
+        <p:xfrm flipH="0" flipV="0">
+          <a:off x="609599" y="647227"/>
+          <a:ext cx="10972800" cy="5563544"/>
+        </p:xfrm>
+        <a:graphic>
+          <a:graphicData uri="http://schemas.openxmlformats.org/presentationml/2006/ole">
+            <p:oleObj name="oleObj" r:id="rId4" imgW="10972800" imgH="5562600" progId="Excel.Sheet.12">
+              <p:embed/>
+              <p:pic>
+                <p:nvPicPr>
+                  <p:cNvPr id="1396273831" name=""/>
+                  <p:cNvPicPr/>
+                  <p:nvPr/>
+                </p:nvPicPr>
+                <p:blipFill rotWithShape="1">
+                  <a:blip r:embed="rId3"/>
+                  <a:stretch/>
+                </p:blipFill>
+                <p:spPr bwMode="auto">
+                  <a:xfrm flipH="0" flipV="0">
+                    <a:off x="609599" y="647227"/>
+                    <a:ext cx="10972800" cy="5563544"/>
+                  </a:xfrm>
+                  <a:prstGeom prst="rect">
+                    <a:avLst/>
+                  </a:prstGeom>
+                </p:spPr>
+              </p:pic>
+            </p:oleObj>
+          </a:graphicData>
+        </a:graphic>
+      </p:graphicFrame>
+      <p:sp>
+        <p:nvSpPr>
+          <p:cNvPr id="1520609233" name=""/>
+          <p:cNvSpPr txBox="1"/>
+          <p:nvPr/>
+        </p:nvSpPr>
+        <p:spPr bwMode="auto">
+          <a:xfrm rot="0" flipH="0" flipV="0">
+            <a:off x="609599" y="217713"/>
+            <a:ext cx="9279905" cy="366119"/>
+          </a:xfrm>
+          <a:prstGeom prst="rect">
+            <a:avLst/>
+          </a:prstGeom>
+          <a:noFill/>
+        </p:spPr>
+        <p:txBody>
+          <a:bodyPr vertOverflow="overflow" horzOverflow="overflow" vert="horz" wrap="square" lIns="91440" tIns="45720" rIns="91440" bIns="45720" numCol="1" spcCol="0" rtlCol="0" fromWordArt="0" anchor="t" anchorCtr="0" forceAA="0" upright="0" compatLnSpc="0">
+            <a:spAutoFit/>
+          </a:bodyPr>
+          <a:p>
+            <a:pPr>
+              <a:defRPr/>
+            </a:pPr>
+            <a:r>
+              <a:rPr lang="ru-RU">
+                <a:solidFill>
+                  <a:schemeClr val="tx1">
+                    <a:lumMod val="65000"/>
+                    <a:lumOff val="35000"/>
+                  </a:schemeClr>
+                </a:solidFill>
+              </a:rPr>
+              <a:t>Таблица сравнения популярных дистрибутивов с основными идеями новой ОС</a:t>
+            </a:r>
+            <a:endParaRPr>
+              <a:solidFill>
+                <a:schemeClr val="tx1">
+                  <a:lumMod val="65000"/>
+                  <a:lumOff val="35000"/>
+                </a:schemeClr>
+              </a:solidFill>
+            </a:endParaRPr>
           </a:p>
         </p:txBody>
       </p:sp>

--- a/NewOS.pptx
+++ b/NewOS.pptx
@@ -5,13 +5,16 @@
     <p:sldMasterId id="2147483648" r:id="rId1"/>
   </p:sldMasterIdLst>
   <p:notesMasterIdLst>
-    <p:notesMasterId r:id="rId8"/>
+    <p:notesMasterId r:id="rId11"/>
   </p:notesMasterIdLst>
   <p:sldIdLst>
     <p:sldId id="256" r:id="rId4"/>
     <p:sldId id="257" r:id="rId5"/>
     <p:sldId id="258" r:id="rId6"/>
     <p:sldId id="259" r:id="rId7"/>
+    <p:sldId id="260" r:id="rId8"/>
+    <p:sldId id="261" r:id="rId9"/>
+    <p:sldId id="262" r:id="rId10"/>
   </p:sldIdLst>
   <p:sldSz cx="12192000" cy="6858000"/>
   <p:notesSz cx="6858000" cy="9144000"/>
@@ -137,7 +140,7 @@
       </p:grpSpPr>
       <p:sp>
         <p:nvSpPr>
-          <p:cNvPr id="1473793375" name="Header Placeholder 1"/>
+          <p:cNvPr id="639087279" name="Header Placeholder 1"/>
           <p:cNvSpPr>
             <a:spLocks noGrp="1"/>
           </p:cNvSpPr>
@@ -171,7 +174,7 @@
       </p:sp>
       <p:sp>
         <p:nvSpPr>
-          <p:cNvPr id="1563391357" name="Date Placeholder 2"/>
+          <p:cNvPr id="1458410344" name="Date Placeholder 2"/>
           <p:cNvSpPr>
             <a:spLocks noGrp="1"/>
           </p:cNvSpPr>
@@ -209,7 +212,7 @@
       </p:sp>
       <p:sp>
         <p:nvSpPr>
-          <p:cNvPr id="1021045015" name="Slide Image Placeholder 3"/>
+          <p:cNvPr id="744356146" name="Slide Image Placeholder 3"/>
           <p:cNvSpPr>
             <a:spLocks noChangeAspect="1" noGrp="1" noRot="1"/>
           </p:cNvSpPr>
@@ -245,7 +248,7 @@
       </p:sp>
       <p:sp>
         <p:nvSpPr>
-          <p:cNvPr id="517078223" name="Notes Placeholder 4"/>
+          <p:cNvPr id="1782463795" name="Notes Placeholder 4"/>
           <p:cNvSpPr>
             <a:spLocks noGrp="1"/>
           </p:cNvSpPr>
@@ -319,7 +322,7 @@
       </p:sp>
       <p:sp>
         <p:nvSpPr>
-          <p:cNvPr id="1763938598" name="Footer Placeholder 5"/>
+          <p:cNvPr id="2041844558" name="Footer Placeholder 5"/>
           <p:cNvSpPr>
             <a:spLocks noGrp="1"/>
           </p:cNvSpPr>
@@ -353,7 +356,7 @@
       </p:sp>
       <p:sp>
         <p:nvSpPr>
-          <p:cNvPr id="473448971" name="Slide Number Placeholder 6"/>
+          <p:cNvPr id="1391059004" name="Slide Number Placeholder 6"/>
           <p:cNvSpPr>
             <a:spLocks noGrp="1"/>
           </p:cNvSpPr>
@@ -506,7 +509,7 @@
       </p:grpSpPr>
       <p:sp>
         <p:nvSpPr>
-          <p:cNvPr id="171801191" name="Slide Image Placeholder 1"/>
+          <p:cNvPr id="1567567906" name="Slide Image Placeholder 1"/>
           <p:cNvSpPr>
             <a:spLocks noChangeAspect="1" noGrp="1" noRot="1"/>
           </p:cNvSpPr>
@@ -523,7 +526,7 @@
       </p:sp>
       <p:sp>
         <p:nvSpPr>
-          <p:cNvPr id="745782767" name="Notes Placeholder 2"/>
+          <p:cNvPr id="1729913295" name="Notes Placeholder 2"/>
           <p:cNvSpPr>
             <a:spLocks noGrp="1"/>
           </p:cNvSpPr>
@@ -548,7 +551,7 @@
       </p:sp>
       <p:sp>
         <p:nvSpPr>
-          <p:cNvPr id="728365975" name="Slide Number Placeholder 3"/>
+          <p:cNvPr id="1888425671" name="Slide Number Placeholder 3"/>
           <p:cNvSpPr>
             <a:spLocks noGrp="1"/>
           </p:cNvSpPr>
@@ -599,7 +602,7 @@
       </p:grpSpPr>
       <p:sp>
         <p:nvSpPr>
-          <p:cNvPr id="1226976177" name="Slide Image Placeholder 1"/>
+          <p:cNvPr id="1956330286" name="Slide Image Placeholder 1"/>
           <p:cNvSpPr>
             <a:spLocks noChangeAspect="1" noGrp="1" noRot="1"/>
           </p:cNvSpPr>
@@ -611,7 +614,7 @@
       </p:sp>
       <p:sp>
         <p:nvSpPr>
-          <p:cNvPr id="144414598" name="Notes Placeholder 2"/>
+          <p:cNvPr id="287990369" name="Notes Placeholder 2"/>
           <p:cNvSpPr>
             <a:spLocks noGrp="1"/>
           </p:cNvSpPr>
@@ -633,7 +636,7 @@
       </p:sp>
       <p:sp>
         <p:nvSpPr>
-          <p:cNvPr id="1335422231" name="Slide Number Placeholder 3"/>
+          <p:cNvPr id="402690931" name="Slide Number Placeholder 3"/>
           <p:cNvSpPr>
             <a:spLocks noGrp="1"/>
           </p:cNvSpPr>
@@ -684,7 +687,7 @@
       </p:grpSpPr>
       <p:sp>
         <p:nvSpPr>
-          <p:cNvPr id="2" name="Slide Image Placeholder 1"/>
+          <p:cNvPr id="1670007757" name="Slide Image Placeholder 1"/>
           <p:cNvSpPr>
             <a:spLocks noChangeAspect="1" noGrp="1" noRot="1"/>
           </p:cNvSpPr>
@@ -696,7 +699,7 @@
       </p:sp>
       <p:sp>
         <p:nvSpPr>
-          <p:cNvPr id="3" name="Notes Placeholder 2"/>
+          <p:cNvPr id="189563855" name="Notes Placeholder 2"/>
           <p:cNvSpPr>
             <a:spLocks noGrp="1"/>
           </p:cNvSpPr>
@@ -718,7 +721,7 @@
       </p:sp>
       <p:sp>
         <p:nvSpPr>
-          <p:cNvPr id="4" name="Slide Number Placeholder 3"/>
+          <p:cNvPr id="1905213075" name="Slide Number Placeholder 3"/>
           <p:cNvSpPr>
             <a:spLocks noGrp="1"/>
           </p:cNvSpPr>
@@ -769,7 +772,7 @@
       </p:grpSpPr>
       <p:sp>
         <p:nvSpPr>
-          <p:cNvPr id="830155011" name="Slide Image Placeholder 1"/>
+          <p:cNvPr id="2" name="Slide Image Placeholder 1"/>
           <p:cNvSpPr>
             <a:spLocks noChangeAspect="1" noGrp="1" noRot="1"/>
           </p:cNvSpPr>
@@ -781,7 +784,7 @@
       </p:sp>
       <p:sp>
         <p:nvSpPr>
-          <p:cNvPr id="461568217" name="Notes Placeholder 2"/>
+          <p:cNvPr id="3" name="Notes Placeholder 2"/>
           <p:cNvSpPr>
             <a:spLocks noGrp="1"/>
           </p:cNvSpPr>
@@ -803,7 +806,262 @@
       </p:sp>
       <p:sp>
         <p:nvSpPr>
-          <p:cNvPr id="840923310" name="Slide Number Placeholder 3"/>
+          <p:cNvPr id="4" name="Slide Number Placeholder 3"/>
+          <p:cNvSpPr>
+            <a:spLocks noGrp="1"/>
+          </p:cNvSpPr>
+          <p:nvPr>
+            <p:ph type="sldNum" sz="quarter" idx="10"/>
+          </p:nvPr>
+        </p:nvSpPr>
+        <p:spPr bwMode="auto"/>
+        <p:txBody>
+          <a:bodyPr/>
+          <a:lstStyle/>
+          <a:p>
+            <a:pPr>
+              <a:defRPr/>
+            </a:pPr>
+            <a:fld id="{AEA6BF44-F722-C903-71DE-C4E232C9016C}" type="slidenum">
+              <a:rPr/>
+              <a:t/>
+            </a:fld>
+            <a:endParaRPr/>
+          </a:p>
+        </p:txBody>
+      </p:sp>
+    </p:spTree>
+  </p:cSld>
+  <p:clrMapOvr>
+    <a:masterClrMapping/>
+  </p:clrMapOvr>
+</p:notes>
+</file>
+
+<file path=ppt/notesSlides/notesSlide5.xml><?xml version="1.0" encoding="utf-8"?>
+<p:notes xmlns:a="http://schemas.openxmlformats.org/drawingml/2006/main" xmlns:r="http://schemas.openxmlformats.org/officeDocument/2006/relationships" xmlns:p="http://schemas.openxmlformats.org/presentationml/2006/main" xmlns:m="http://schemas.openxmlformats.org/officeDocument/2006/math" xmlns:w="http://schemas.openxmlformats.org/wordprocessingml/2006/main">
+  <p:cSld name="">
+    <p:spTree>
+      <p:nvGrpSpPr>
+        <p:cNvPr id="1" name=""/>
+        <p:cNvGrpSpPr/>
+        <p:nvPr/>
+      </p:nvGrpSpPr>
+      <p:grpSpPr bwMode="auto">
+        <a:xfrm>
+          <a:off x="0" y="0"/>
+          <a:ext cx="0" cy="0"/>
+          <a:chOff x="0" y="0"/>
+          <a:chExt cx="0" cy="0"/>
+        </a:xfrm>
+      </p:grpSpPr>
+      <p:sp>
+        <p:nvSpPr>
+          <p:cNvPr id="2" name="Slide Image Placeholder 1"/>
+          <p:cNvSpPr>
+            <a:spLocks noChangeAspect="1" noGrp="1" noRot="1"/>
+          </p:cNvSpPr>
+          <p:nvPr>
+            <p:ph type="sldImg"/>
+          </p:nvPr>
+        </p:nvSpPr>
+        <p:spPr bwMode="auto"/>
+      </p:sp>
+      <p:sp>
+        <p:nvSpPr>
+          <p:cNvPr id="3" name="Notes Placeholder 2"/>
+          <p:cNvSpPr>
+            <a:spLocks noGrp="1"/>
+          </p:cNvSpPr>
+          <p:nvPr>
+            <p:ph type="body" idx="1"/>
+          </p:nvPr>
+        </p:nvSpPr>
+        <p:spPr bwMode="auto"/>
+        <p:txBody>
+          <a:bodyPr/>
+          <a:lstStyle/>
+          <a:p>
+            <a:pPr>
+              <a:defRPr/>
+            </a:pPr>
+            <a:endParaRPr/>
+          </a:p>
+        </p:txBody>
+      </p:sp>
+      <p:sp>
+        <p:nvSpPr>
+          <p:cNvPr id="4" name="Slide Number Placeholder 3"/>
+          <p:cNvSpPr>
+            <a:spLocks noGrp="1"/>
+          </p:cNvSpPr>
+          <p:nvPr>
+            <p:ph type="sldNum" sz="quarter" idx="10"/>
+          </p:nvPr>
+        </p:nvSpPr>
+        <p:spPr bwMode="auto"/>
+        <p:txBody>
+          <a:bodyPr/>
+          <a:lstStyle/>
+          <a:p>
+            <a:pPr>
+              <a:defRPr/>
+            </a:pPr>
+            <a:fld id="{1B5C3871-37B8-A084-1EB9-71D316FA2BBA}" type="slidenum">
+              <a:rPr/>
+              <a:t/>
+            </a:fld>
+            <a:endParaRPr/>
+          </a:p>
+        </p:txBody>
+      </p:sp>
+    </p:spTree>
+  </p:cSld>
+  <p:clrMapOvr>
+    <a:masterClrMapping/>
+  </p:clrMapOvr>
+</p:notes>
+</file>
+
+<file path=ppt/notesSlides/notesSlide6.xml><?xml version="1.0" encoding="utf-8"?>
+<p:notes xmlns:a="http://schemas.openxmlformats.org/drawingml/2006/main" xmlns:r="http://schemas.openxmlformats.org/officeDocument/2006/relationships" xmlns:p="http://schemas.openxmlformats.org/presentationml/2006/main" xmlns:m="http://schemas.openxmlformats.org/officeDocument/2006/math" xmlns:w="http://schemas.openxmlformats.org/wordprocessingml/2006/main">
+  <p:cSld name="">
+    <p:spTree>
+      <p:nvGrpSpPr>
+        <p:cNvPr id="1" name=""/>
+        <p:cNvGrpSpPr/>
+        <p:nvPr/>
+      </p:nvGrpSpPr>
+      <p:grpSpPr bwMode="auto">
+        <a:xfrm>
+          <a:off x="0" y="0"/>
+          <a:ext cx="0" cy="0"/>
+          <a:chOff x="0" y="0"/>
+          <a:chExt cx="0" cy="0"/>
+        </a:xfrm>
+      </p:grpSpPr>
+      <p:sp>
+        <p:nvSpPr>
+          <p:cNvPr id="2" name="Slide Image Placeholder 1"/>
+          <p:cNvSpPr>
+            <a:spLocks noChangeAspect="1" noGrp="1" noRot="1"/>
+          </p:cNvSpPr>
+          <p:nvPr>
+            <p:ph type="sldImg"/>
+          </p:nvPr>
+        </p:nvSpPr>
+        <p:spPr bwMode="auto"/>
+      </p:sp>
+      <p:sp>
+        <p:nvSpPr>
+          <p:cNvPr id="3" name="Notes Placeholder 2"/>
+          <p:cNvSpPr>
+            <a:spLocks noGrp="1"/>
+          </p:cNvSpPr>
+          <p:nvPr>
+            <p:ph type="body" idx="1"/>
+          </p:nvPr>
+        </p:nvSpPr>
+        <p:spPr bwMode="auto"/>
+        <p:txBody>
+          <a:bodyPr/>
+          <a:lstStyle/>
+          <a:p>
+            <a:pPr>
+              <a:defRPr/>
+            </a:pPr>
+            <a:endParaRPr/>
+          </a:p>
+        </p:txBody>
+      </p:sp>
+      <p:sp>
+        <p:nvSpPr>
+          <p:cNvPr id="4" name="Slide Number Placeholder 3"/>
+          <p:cNvSpPr>
+            <a:spLocks noGrp="1"/>
+          </p:cNvSpPr>
+          <p:nvPr>
+            <p:ph type="sldNum" sz="quarter" idx="10"/>
+          </p:nvPr>
+        </p:nvSpPr>
+        <p:spPr bwMode="auto"/>
+        <p:txBody>
+          <a:bodyPr/>
+          <a:lstStyle/>
+          <a:p>
+            <a:pPr>
+              <a:defRPr/>
+            </a:pPr>
+            <a:fld id="{14E332DF-2599-28D2-AA37-6680C3DB7713}" type="slidenum">
+              <a:rPr/>
+              <a:t/>
+            </a:fld>
+            <a:endParaRPr/>
+          </a:p>
+        </p:txBody>
+      </p:sp>
+    </p:spTree>
+  </p:cSld>
+  <p:clrMapOvr>
+    <a:masterClrMapping/>
+  </p:clrMapOvr>
+</p:notes>
+</file>
+
+<file path=ppt/notesSlides/notesSlide7.xml><?xml version="1.0" encoding="utf-8"?>
+<p:notes xmlns:a="http://schemas.openxmlformats.org/drawingml/2006/main" xmlns:r="http://schemas.openxmlformats.org/officeDocument/2006/relationships" xmlns:p="http://schemas.openxmlformats.org/presentationml/2006/main" xmlns:m="http://schemas.openxmlformats.org/officeDocument/2006/math" xmlns:w="http://schemas.openxmlformats.org/wordprocessingml/2006/main">
+  <p:cSld name="">
+    <p:spTree>
+      <p:nvGrpSpPr>
+        <p:cNvPr id="1" name=""/>
+        <p:cNvGrpSpPr/>
+        <p:nvPr/>
+      </p:nvGrpSpPr>
+      <p:grpSpPr bwMode="auto">
+        <a:xfrm>
+          <a:off x="0" y="0"/>
+          <a:ext cx="0" cy="0"/>
+          <a:chOff x="0" y="0"/>
+          <a:chExt cx="0" cy="0"/>
+        </a:xfrm>
+      </p:grpSpPr>
+      <p:sp>
+        <p:nvSpPr>
+          <p:cNvPr id="529859288" name="Slide Image Placeholder 1"/>
+          <p:cNvSpPr>
+            <a:spLocks noChangeAspect="1" noGrp="1" noRot="1"/>
+          </p:cNvSpPr>
+          <p:nvPr>
+            <p:ph type="sldImg"/>
+          </p:nvPr>
+        </p:nvSpPr>
+        <p:spPr bwMode="auto"/>
+      </p:sp>
+      <p:sp>
+        <p:nvSpPr>
+          <p:cNvPr id="1126598975" name="Notes Placeholder 2"/>
+          <p:cNvSpPr>
+            <a:spLocks noGrp="1"/>
+          </p:cNvSpPr>
+          <p:nvPr>
+            <p:ph type="body" idx="1"/>
+          </p:nvPr>
+        </p:nvSpPr>
+        <p:spPr bwMode="auto"/>
+        <p:txBody>
+          <a:bodyPr/>
+          <a:lstStyle/>
+          <a:p>
+            <a:pPr>
+              <a:defRPr/>
+            </a:pPr>
+            <a:endParaRPr/>
+          </a:p>
+        </p:txBody>
+      </p:sp>
+      <p:sp>
+        <p:nvSpPr>
+          <p:cNvPr id="218619152" name="Slide Number Placeholder 3"/>
           <p:cNvSpPr>
             <a:spLocks noGrp="1"/>
           </p:cNvSpPr>
@@ -854,7 +1112,7 @@
       </p:grpSpPr>
       <p:sp>
         <p:nvSpPr>
-          <p:cNvPr id="1837584545" name="Shape 1059"/>
+          <p:cNvPr id="759510649" name="Shape 1059"/>
           <p:cNvSpPr>
             <a:spLocks noChangeArrowheads="1" noGrp="1"/>
           </p:cNvSpPr>
@@ -977,7 +1235,7 @@
       </p:sp>
       <p:sp>
         <p:nvSpPr>
-          <p:cNvPr id="1067815885" name="Shape 1060"/>
+          <p:cNvPr id="1499148453" name="Shape 1060"/>
           <p:cNvSpPr>
             <a:spLocks noChangeArrowheads="1" noGrp="1"/>
           </p:cNvSpPr>
@@ -1068,7 +1326,7 @@
       </p:sp>
       <p:sp>
         <p:nvSpPr>
-          <p:cNvPr id="191631039" name="Shape 1061"/>
+          <p:cNvPr id="90348516" name="Shape 1061"/>
           <p:cNvSpPr>
             <a:spLocks noChangeArrowheads="1" noGrp="1"/>
           </p:cNvSpPr>
@@ -1154,7 +1412,7 @@
       </p:sp>
       <p:sp>
         <p:nvSpPr>
-          <p:cNvPr id="2093490920" name="Shape 1062"/>
+          <p:cNvPr id="1033458491" name="Shape 1062"/>
           <p:cNvSpPr>
             <a:spLocks noChangeArrowheads="1" noGrp="1"/>
           </p:cNvSpPr>
@@ -1232,7 +1490,7 @@
       </p:sp>
       <p:sp>
         <p:nvSpPr>
-          <p:cNvPr id="393498946" name="Shape 1063"/>
+          <p:cNvPr id="1712314939" name="Shape 1063"/>
           <p:cNvSpPr>
             <a:spLocks noChangeArrowheads="1" noGrp="1"/>
           </p:cNvSpPr>
@@ -1310,7 +1568,7 @@
       </p:sp>
       <p:sp>
         <p:nvSpPr>
-          <p:cNvPr id="406675149" name="Subtitle 2"/>
+          <p:cNvPr id="1769507907" name="Subtitle 2"/>
           <p:cNvSpPr>
             <a:spLocks noGrp="1"/>
           </p:cNvSpPr>
@@ -1433,7 +1691,7 @@
       </p:sp>
       <p:sp>
         <p:nvSpPr>
-          <p:cNvPr id="1339093656" name="Date Placeholder 3"/>
+          <p:cNvPr id="1648982241" name="Date Placeholder 3"/>
           <p:cNvSpPr>
             <a:spLocks noGrp="1"/>
           </p:cNvSpPr>
@@ -1459,7 +1717,7 @@
       </p:sp>
       <p:sp>
         <p:nvSpPr>
-          <p:cNvPr id="357430217" name="Footer Placeholder 4"/>
+          <p:cNvPr id="120346733" name="Footer Placeholder 4"/>
           <p:cNvSpPr>
             <a:spLocks noGrp="1"/>
           </p:cNvSpPr>
@@ -1481,7 +1739,7 @@
       </p:sp>
       <p:sp>
         <p:nvSpPr>
-          <p:cNvPr id="1703972731" name="Slide Number Placeholder 5"/>
+          <p:cNvPr id="674026237" name="Slide Number Placeholder 5"/>
           <p:cNvSpPr>
             <a:spLocks noGrp="1"/>
           </p:cNvSpPr>
@@ -1507,7 +1765,7 @@
       </p:sp>
       <p:sp>
         <p:nvSpPr>
-          <p:cNvPr id="1521105589" name="Title 6"/>
+          <p:cNvPr id="1990541284" name="Title 6"/>
           <p:cNvSpPr>
             <a:spLocks noGrp="1"/>
           </p:cNvSpPr>
@@ -1567,7 +1825,7 @@
       </p:grpSpPr>
       <p:sp>
         <p:nvSpPr>
-          <p:cNvPr id="1585731061" name="Title 1"/>
+          <p:cNvPr id="1971036045" name="Title 1"/>
           <p:cNvSpPr>
             <a:spLocks noGrp="1"/>
           </p:cNvSpPr>
@@ -1593,7 +1851,7 @@
       </p:sp>
       <p:sp>
         <p:nvSpPr>
-          <p:cNvPr id="262992165" name="Vertical Text Placeholder 2"/>
+          <p:cNvPr id="1181778545" name="Vertical Text Placeholder 2"/>
           <p:cNvSpPr>
             <a:spLocks noGrp="1"/>
           </p:cNvSpPr>
@@ -1659,7 +1917,7 @@
       </p:sp>
       <p:sp>
         <p:nvSpPr>
-          <p:cNvPr id="1414929686" name="Date Placeholder 3"/>
+          <p:cNvPr id="1342280512" name="Date Placeholder 3"/>
           <p:cNvSpPr>
             <a:spLocks noGrp="1"/>
           </p:cNvSpPr>
@@ -1685,7 +1943,7 @@
       </p:sp>
       <p:sp>
         <p:nvSpPr>
-          <p:cNvPr id="1485601386" name="Footer Placeholder 4"/>
+          <p:cNvPr id="1716307415" name="Footer Placeholder 4"/>
           <p:cNvSpPr>
             <a:spLocks noGrp="1"/>
           </p:cNvSpPr>
@@ -1707,7 +1965,7 @@
       </p:sp>
       <p:sp>
         <p:nvSpPr>
-          <p:cNvPr id="971412643" name="Slide Number Placeholder 5"/>
+          <p:cNvPr id="1837420746" name="Slide Number Placeholder 5"/>
           <p:cNvSpPr>
             <a:spLocks noGrp="1"/>
           </p:cNvSpPr>
@@ -1758,7 +2016,7 @@
       </p:grpSpPr>
       <p:sp>
         <p:nvSpPr>
-          <p:cNvPr id="2035614908" name="Vertical Title 1"/>
+          <p:cNvPr id="1020016780" name="Vertical Title 1"/>
           <p:cNvSpPr>
             <a:spLocks noGrp="1"/>
           </p:cNvSpPr>
@@ -1793,7 +2051,7 @@
       </p:sp>
       <p:sp>
         <p:nvSpPr>
-          <p:cNvPr id="2062669697" name="Vertical Text Placeholder 2"/>
+          <p:cNvPr id="624851759" name="Vertical Text Placeholder 2"/>
           <p:cNvSpPr>
             <a:spLocks noGrp="1"/>
           </p:cNvSpPr>
@@ -1864,7 +2122,7 @@
       </p:sp>
       <p:sp>
         <p:nvSpPr>
-          <p:cNvPr id="83642929" name="Date Placeholder 3"/>
+          <p:cNvPr id="773970874" name="Date Placeholder 3"/>
           <p:cNvSpPr>
             <a:spLocks noGrp="1"/>
           </p:cNvSpPr>
@@ -1890,7 +2148,7 @@
       </p:sp>
       <p:sp>
         <p:nvSpPr>
-          <p:cNvPr id="967030483" name="Footer Placeholder 4"/>
+          <p:cNvPr id="1550844171" name="Footer Placeholder 4"/>
           <p:cNvSpPr>
             <a:spLocks noGrp="1"/>
           </p:cNvSpPr>
@@ -1912,7 +2170,7 @@
       </p:sp>
       <p:sp>
         <p:nvSpPr>
-          <p:cNvPr id="1574307598" name="Slide Number Placeholder 5"/>
+          <p:cNvPr id="1961346807" name="Slide Number Placeholder 5"/>
           <p:cNvSpPr>
             <a:spLocks noGrp="1"/>
           </p:cNvSpPr>
@@ -1963,7 +2221,7 @@
       </p:grpSpPr>
       <p:sp>
         <p:nvSpPr>
-          <p:cNvPr id="1093121916" name="Title 1"/>
+          <p:cNvPr id="305390640" name="Title 1"/>
           <p:cNvSpPr>
             <a:spLocks noGrp="1"/>
           </p:cNvSpPr>
@@ -1989,7 +2247,7 @@
       </p:sp>
       <p:sp>
         <p:nvSpPr>
-          <p:cNvPr id="40243370" name="Content Placeholder 2"/>
+          <p:cNvPr id="1863760731" name="Content Placeholder 2"/>
           <p:cNvSpPr>
             <a:spLocks noGrp="1"/>
           </p:cNvSpPr>
@@ -2055,7 +2313,7 @@
       </p:sp>
       <p:sp>
         <p:nvSpPr>
-          <p:cNvPr id="1877521974" name="Date Placeholder 3"/>
+          <p:cNvPr id="962656500" name="Date Placeholder 3"/>
           <p:cNvSpPr>
             <a:spLocks noGrp="1"/>
           </p:cNvSpPr>
@@ -2081,7 +2339,7 @@
       </p:sp>
       <p:sp>
         <p:nvSpPr>
-          <p:cNvPr id="554815718" name="Footer Placeholder 4"/>
+          <p:cNvPr id="45267147" name="Footer Placeholder 4"/>
           <p:cNvSpPr>
             <a:spLocks noGrp="1"/>
           </p:cNvSpPr>
@@ -2103,7 +2361,7 @@
       </p:sp>
       <p:sp>
         <p:nvSpPr>
-          <p:cNvPr id="789512437" name="Slide Number Placeholder 5"/>
+          <p:cNvPr id="413283285" name="Slide Number Placeholder 5"/>
           <p:cNvSpPr>
             <a:spLocks noGrp="1"/>
           </p:cNvSpPr>
@@ -2154,7 +2412,7 @@
       </p:grpSpPr>
       <p:sp>
         <p:nvSpPr>
-          <p:cNvPr id="435935308" name="Title 1"/>
+          <p:cNvPr id="172875140" name="Title 1"/>
           <p:cNvSpPr>
             <a:spLocks noGrp="1"/>
           </p:cNvSpPr>
@@ -2189,7 +2447,7 @@
       </p:sp>
       <p:sp>
         <p:nvSpPr>
-          <p:cNvPr id="739147948" name="Text Placeholder 2"/>
+          <p:cNvPr id="1079583559" name="Text Placeholder 2"/>
           <p:cNvSpPr>
             <a:spLocks noGrp="1"/>
           </p:cNvSpPr>
@@ -2311,7 +2569,7 @@
       </p:sp>
       <p:sp>
         <p:nvSpPr>
-          <p:cNvPr id="2032927988" name="Date Placeholder 3"/>
+          <p:cNvPr id="1107535263" name="Date Placeholder 3"/>
           <p:cNvSpPr>
             <a:spLocks noGrp="1"/>
           </p:cNvSpPr>
@@ -2337,7 +2595,7 @@
       </p:sp>
       <p:sp>
         <p:nvSpPr>
-          <p:cNvPr id="86515810" name="Footer Placeholder 4"/>
+          <p:cNvPr id="34517582" name="Footer Placeholder 4"/>
           <p:cNvSpPr>
             <a:spLocks noGrp="1"/>
           </p:cNvSpPr>
@@ -2359,7 +2617,7 @@
       </p:sp>
       <p:sp>
         <p:nvSpPr>
-          <p:cNvPr id="643745617" name="Slide Number Placeholder 5"/>
+          <p:cNvPr id="198496166" name="Slide Number Placeholder 5"/>
           <p:cNvSpPr>
             <a:spLocks noGrp="1"/>
           </p:cNvSpPr>
@@ -2410,7 +2668,7 @@
       </p:grpSpPr>
       <p:sp>
         <p:nvSpPr>
-          <p:cNvPr id="1977827141" name="Title 1"/>
+          <p:cNvPr id="1603560526" name="Title 1"/>
           <p:cNvSpPr>
             <a:spLocks noGrp="1"/>
           </p:cNvSpPr>
@@ -2436,7 +2694,7 @@
       </p:sp>
       <p:sp>
         <p:nvSpPr>
-          <p:cNvPr id="1391740785" name="Content Placeholder 2"/>
+          <p:cNvPr id="310929868" name="Content Placeholder 2"/>
           <p:cNvSpPr>
             <a:spLocks noGrp="1"/>
           </p:cNvSpPr>
@@ -2535,7 +2793,7 @@
       </p:sp>
       <p:sp>
         <p:nvSpPr>
-          <p:cNvPr id="148385659" name="Content Placeholder 3"/>
+          <p:cNvPr id="230314355" name="Content Placeholder 3"/>
           <p:cNvSpPr>
             <a:spLocks noGrp="1"/>
           </p:cNvSpPr>
@@ -2634,7 +2892,7 @@
       </p:sp>
       <p:sp>
         <p:nvSpPr>
-          <p:cNvPr id="1011682855" name="Date Placeholder 4"/>
+          <p:cNvPr id="593388606" name="Date Placeholder 4"/>
           <p:cNvSpPr>
             <a:spLocks noGrp="1"/>
           </p:cNvSpPr>
@@ -2660,7 +2918,7 @@
       </p:sp>
       <p:sp>
         <p:nvSpPr>
-          <p:cNvPr id="606420595" name="Footer Placeholder 5"/>
+          <p:cNvPr id="1738007481" name="Footer Placeholder 5"/>
           <p:cNvSpPr>
             <a:spLocks noGrp="1"/>
           </p:cNvSpPr>
@@ -2682,7 +2940,7 @@
       </p:sp>
       <p:sp>
         <p:nvSpPr>
-          <p:cNvPr id="233389371" name="Slide Number Placeholder 6"/>
+          <p:cNvPr id="1653987066" name="Slide Number Placeholder 6"/>
           <p:cNvSpPr>
             <a:spLocks noGrp="1"/>
           </p:cNvSpPr>
@@ -2733,7 +2991,7 @@
       </p:grpSpPr>
       <p:sp>
         <p:nvSpPr>
-          <p:cNvPr id="2082089253" name="Title 1"/>
+          <p:cNvPr id="1474327859" name="Title 1"/>
           <p:cNvSpPr>
             <a:spLocks noGrp="1"/>
           </p:cNvSpPr>
@@ -2763,7 +3021,7 @@
       </p:sp>
       <p:sp>
         <p:nvSpPr>
-          <p:cNvPr id="1209205604" name="Text Placeholder 2"/>
+          <p:cNvPr id="500349629" name="Text Placeholder 2"/>
           <p:cNvSpPr>
             <a:spLocks noGrp="1"/>
           </p:cNvSpPr>
@@ -2831,7 +3089,7 @@
       </p:sp>
       <p:sp>
         <p:nvSpPr>
-          <p:cNvPr id="980547401" name="Content Placeholder 3"/>
+          <p:cNvPr id="1910818692" name="Content Placeholder 3"/>
           <p:cNvSpPr>
             <a:spLocks noGrp="1"/>
           </p:cNvSpPr>
@@ -2930,7 +3188,7 @@
       </p:sp>
       <p:sp>
         <p:nvSpPr>
-          <p:cNvPr id="816400543" name="Text Placeholder 4"/>
+          <p:cNvPr id="1664108475" name="Text Placeholder 4"/>
           <p:cNvSpPr>
             <a:spLocks noGrp="1"/>
           </p:cNvSpPr>
@@ -2998,7 +3256,7 @@
       </p:sp>
       <p:sp>
         <p:nvSpPr>
-          <p:cNvPr id="1940183667" name="Content Placeholder 5"/>
+          <p:cNvPr id="1105455651" name="Content Placeholder 5"/>
           <p:cNvSpPr>
             <a:spLocks noGrp="1"/>
           </p:cNvSpPr>
@@ -3097,7 +3355,7 @@
       </p:sp>
       <p:sp>
         <p:nvSpPr>
-          <p:cNvPr id="1537915971" name="Date Placeholder 6"/>
+          <p:cNvPr id="1234822573" name="Date Placeholder 6"/>
           <p:cNvSpPr>
             <a:spLocks noGrp="1"/>
           </p:cNvSpPr>
@@ -3123,7 +3381,7 @@
       </p:sp>
       <p:sp>
         <p:nvSpPr>
-          <p:cNvPr id="1968526181" name="Footer Placeholder 7"/>
+          <p:cNvPr id="1615028625" name="Footer Placeholder 7"/>
           <p:cNvSpPr>
             <a:spLocks noGrp="1"/>
           </p:cNvSpPr>
@@ -3145,7 +3403,7 @@
       </p:sp>
       <p:sp>
         <p:nvSpPr>
-          <p:cNvPr id="612360336" name="Slide Number Placeholder 8"/>
+          <p:cNvPr id="416797400" name="Slide Number Placeholder 8"/>
           <p:cNvSpPr>
             <a:spLocks noGrp="1"/>
           </p:cNvSpPr>
@@ -3196,7 +3454,7 @@
       </p:grpSpPr>
       <p:sp>
         <p:nvSpPr>
-          <p:cNvPr id="1239730146" name="Title 1"/>
+          <p:cNvPr id="1709345242" name="Title 1"/>
           <p:cNvSpPr>
             <a:spLocks noGrp="1"/>
           </p:cNvSpPr>
@@ -3222,7 +3480,7 @@
       </p:sp>
       <p:sp>
         <p:nvSpPr>
-          <p:cNvPr id="541239928" name="Date Placeholder 2"/>
+          <p:cNvPr id="1580993518" name="Date Placeholder 2"/>
           <p:cNvSpPr>
             <a:spLocks noGrp="1"/>
           </p:cNvSpPr>
@@ -3248,7 +3506,7 @@
       </p:sp>
       <p:sp>
         <p:nvSpPr>
-          <p:cNvPr id="1712999162" name="Footer Placeholder 3"/>
+          <p:cNvPr id="753761172" name="Footer Placeholder 3"/>
           <p:cNvSpPr>
             <a:spLocks noGrp="1"/>
           </p:cNvSpPr>
@@ -3270,7 +3528,7 @@
       </p:sp>
       <p:sp>
         <p:nvSpPr>
-          <p:cNvPr id="554134081" name="Slide Number Placeholder 4"/>
+          <p:cNvPr id="1760195208" name="Slide Number Placeholder 4"/>
           <p:cNvSpPr>
             <a:spLocks noGrp="1"/>
           </p:cNvSpPr>
@@ -3321,7 +3579,7 @@
       </p:grpSpPr>
       <p:sp>
         <p:nvSpPr>
-          <p:cNvPr id="1309054067" name="Date Placeholder 1"/>
+          <p:cNvPr id="622495079" name="Date Placeholder 1"/>
           <p:cNvSpPr>
             <a:spLocks noGrp="1"/>
           </p:cNvSpPr>
@@ -3347,7 +3605,7 @@
       </p:sp>
       <p:sp>
         <p:nvSpPr>
-          <p:cNvPr id="680356049" name="Footer Placeholder 2"/>
+          <p:cNvPr id="2033747925" name="Footer Placeholder 2"/>
           <p:cNvSpPr>
             <a:spLocks noGrp="1"/>
           </p:cNvSpPr>
@@ -3369,7 +3627,7 @@
       </p:sp>
       <p:sp>
         <p:nvSpPr>
-          <p:cNvPr id="1779416505" name="Slide Number Placeholder 3"/>
+          <p:cNvPr id="521899360" name="Slide Number Placeholder 3"/>
           <p:cNvSpPr>
             <a:spLocks noGrp="1"/>
           </p:cNvSpPr>
@@ -3420,7 +3678,7 @@
       </p:grpSpPr>
       <p:sp>
         <p:nvSpPr>
-          <p:cNvPr id="180750771" name="Title 1"/>
+          <p:cNvPr id="21233582" name="Title 1"/>
           <p:cNvSpPr>
             <a:spLocks noGrp="1"/>
           </p:cNvSpPr>
@@ -3455,7 +3713,7 @@
       </p:sp>
       <p:sp>
         <p:nvSpPr>
-          <p:cNvPr id="467617651" name="Content Placeholder 2"/>
+          <p:cNvPr id="1465728476" name="Content Placeholder 2"/>
           <p:cNvSpPr>
             <a:spLocks noGrp="1"/>
           </p:cNvSpPr>
@@ -3554,7 +3812,7 @@
       </p:sp>
       <p:sp>
         <p:nvSpPr>
-          <p:cNvPr id="1615464784" name="Text Placeholder 3"/>
+          <p:cNvPr id="1186243950" name="Text Placeholder 3"/>
           <p:cNvSpPr>
             <a:spLocks noGrp="1"/>
           </p:cNvSpPr>
@@ -3622,7 +3880,7 @@
       </p:sp>
       <p:sp>
         <p:nvSpPr>
-          <p:cNvPr id="79159959" name="Date Placeholder 4"/>
+          <p:cNvPr id="936451826" name="Date Placeholder 4"/>
           <p:cNvSpPr>
             <a:spLocks noGrp="1"/>
           </p:cNvSpPr>
@@ -3648,7 +3906,7 @@
       </p:sp>
       <p:sp>
         <p:nvSpPr>
-          <p:cNvPr id="575835355" name="Footer Placeholder 5"/>
+          <p:cNvPr id="1066830190" name="Footer Placeholder 5"/>
           <p:cNvSpPr>
             <a:spLocks noGrp="1"/>
           </p:cNvSpPr>
@@ -3670,7 +3928,7 @@
       </p:sp>
       <p:sp>
         <p:nvSpPr>
-          <p:cNvPr id="561421194" name="Slide Number Placeholder 6"/>
+          <p:cNvPr id="163108283" name="Slide Number Placeholder 6"/>
           <p:cNvSpPr>
             <a:spLocks noGrp="1"/>
           </p:cNvSpPr>
@@ -3721,7 +3979,7 @@
       </p:grpSpPr>
       <p:sp>
         <p:nvSpPr>
-          <p:cNvPr id="1253288243" name="Title 1"/>
+          <p:cNvPr id="1805375120" name="Title 1"/>
           <p:cNvSpPr>
             <a:spLocks noGrp="1"/>
           </p:cNvSpPr>
@@ -3756,7 +4014,7 @@
       </p:sp>
       <p:sp>
         <p:nvSpPr>
-          <p:cNvPr id="805908272" name="Picture Placeholder 2"/>
+          <p:cNvPr id="437331093" name="Picture Placeholder 2"/>
           <p:cNvSpPr>
             <a:spLocks noGrp="1"/>
           </p:cNvSpPr>
@@ -3820,7 +4078,7 @@
       </p:sp>
       <p:sp>
         <p:nvSpPr>
-          <p:cNvPr id="505303960" name="Text Placeholder 3"/>
+          <p:cNvPr id="597662439" name="Text Placeholder 3"/>
           <p:cNvSpPr>
             <a:spLocks noGrp="1"/>
           </p:cNvSpPr>
@@ -3888,7 +4146,7 @@
       </p:sp>
       <p:sp>
         <p:nvSpPr>
-          <p:cNvPr id="1867125503" name="Date Placeholder 4"/>
+          <p:cNvPr id="1713697431" name="Date Placeholder 4"/>
           <p:cNvSpPr>
             <a:spLocks noGrp="1"/>
           </p:cNvSpPr>
@@ -3914,7 +4172,7 @@
       </p:sp>
       <p:sp>
         <p:nvSpPr>
-          <p:cNvPr id="108147678" name="Footer Placeholder 5"/>
+          <p:cNvPr id="87580160" name="Footer Placeholder 5"/>
           <p:cNvSpPr>
             <a:spLocks noGrp="1"/>
           </p:cNvSpPr>
@@ -3936,7 +4194,7 @@
       </p:sp>
       <p:sp>
         <p:nvSpPr>
-          <p:cNvPr id="625603293" name="Slide Number Placeholder 6"/>
+          <p:cNvPr id="876200382" name="Slide Number Placeholder 6"/>
           <p:cNvSpPr>
             <a:spLocks noGrp="1"/>
           </p:cNvSpPr>
@@ -3992,7 +4250,7 @@
       </p:grpSpPr>
       <p:sp>
         <p:nvSpPr>
-          <p:cNvPr id="199800047" name="Shape 1059"/>
+          <p:cNvPr id="537139414" name="Shape 1059"/>
           <p:cNvSpPr>
             <a:spLocks noChangeArrowheads="1" noGrp="1"/>
           </p:cNvSpPr>
@@ -4070,7 +4328,7 @@
       </p:sp>
       <p:sp>
         <p:nvSpPr>
-          <p:cNvPr id="666520458" name="Shape 1060"/>
+          <p:cNvPr id="1181219286" name="Shape 1060"/>
           <p:cNvSpPr>
             <a:spLocks noChangeArrowheads="1" noGrp="1"/>
           </p:cNvSpPr>
@@ -4151,7 +4409,7 @@
       </p:sp>
       <p:sp>
         <p:nvSpPr>
-          <p:cNvPr id="395012210" name="Shape 1061"/>
+          <p:cNvPr id="839222690" name="Shape 1061"/>
           <p:cNvSpPr>
             <a:spLocks noChangeArrowheads="1" noGrp="1"/>
           </p:cNvSpPr>
@@ -4269,7 +4527,7 @@
       </p:sp>
       <p:sp>
         <p:nvSpPr>
-          <p:cNvPr id="244951113" name="Title 1"/>
+          <p:cNvPr id="791242161" name="Title 1"/>
           <p:cNvSpPr>
             <a:spLocks noGrp="1"/>
           </p:cNvSpPr>
@@ -4305,7 +4563,7 @@
       </p:sp>
       <p:sp>
         <p:nvSpPr>
-          <p:cNvPr id="1970895436" name="Text Placeholder 2"/>
+          <p:cNvPr id="708936342" name="Text Placeholder 2"/>
           <p:cNvSpPr>
             <a:spLocks noGrp="1"/>
           </p:cNvSpPr>
@@ -4381,7 +4639,7 @@
       </p:sp>
       <p:sp>
         <p:nvSpPr>
-          <p:cNvPr id="604357387" name="Date Placeholder 3"/>
+          <p:cNvPr id="107735909" name="Date Placeholder 3"/>
           <p:cNvSpPr>
             <a:spLocks noGrp="1"/>
           </p:cNvSpPr>
@@ -4425,7 +4683,7 @@
       </p:sp>
       <p:sp>
         <p:nvSpPr>
-          <p:cNvPr id="1009607023" name="Footer Placeholder 4"/>
+          <p:cNvPr id="212372439" name="Footer Placeholder 4"/>
           <p:cNvSpPr>
             <a:spLocks noGrp="1"/>
           </p:cNvSpPr>
@@ -4465,7 +4723,7 @@
       </p:sp>
       <p:sp>
         <p:nvSpPr>
-          <p:cNvPr id="1983273979" name="Slide Number Placeholder 5"/>
+          <p:cNvPr id="2070104045" name="Slide Number Placeholder 5"/>
           <p:cNvSpPr>
             <a:spLocks noGrp="1"/>
           </p:cNvSpPr>
@@ -4813,7 +5071,7 @@
       </p:grpSpPr>
       <p:sp>
         <p:nvSpPr>
-          <p:cNvPr id="90034246" name="Title 1"/>
+          <p:cNvPr id="864066989" name="Title 1"/>
           <p:cNvSpPr>
             <a:spLocks noGrp="1"/>
           </p:cNvSpPr>
@@ -4839,7 +5097,7 @@
       </p:sp>
       <p:sp>
         <p:nvSpPr>
-          <p:cNvPr id="278813642" name="Subtitle 2"/>
+          <p:cNvPr id="1907240843" name="Subtitle 2"/>
           <p:cNvSpPr>
             <a:spLocks noGrp="1"/>
           </p:cNvSpPr>
@@ -4894,7 +5152,7 @@
       </p:grpSpPr>
       <p:sp>
         <p:nvSpPr>
-          <p:cNvPr id="721113485" name="Title 1"/>
+          <p:cNvPr id="322261228" name="Title 1"/>
           <p:cNvSpPr>
             <a:spLocks noGrp="1"/>
           </p:cNvSpPr>
@@ -4920,7 +5178,7 @@
       </p:sp>
       <p:sp>
         <p:nvSpPr>
-          <p:cNvPr id="1778221795" name="Content Placeholder 2"/>
+          <p:cNvPr id="872800922" name="Content Placeholder 2"/>
           <p:cNvSpPr>
             <a:spLocks noGrp="1"/>
           </p:cNvSpPr>
@@ -4932,6 +5190,68 @@
         <p:txBody>
           <a:bodyPr/>
           <a:lstStyle/>
+          <a:p>
+            <a:pPr>
+              <a:defRPr/>
+            </a:pPr>
+            <a:r>
+              <a:rPr lang="ru-RU" sz="3200" b="0" i="0" u="none" strike="noStrike" cap="none" spc="0">
+                <a:solidFill>
+                  <a:schemeClr val="tx1">
+                    <a:lumMod val="75000"/>
+                    <a:lumOff val="25000"/>
+                  </a:schemeClr>
+                </a:solidFill>
+                <a:latin typeface="+mn-lt"/>
+                <a:ea typeface="+mn-ea"/>
+                <a:cs typeface="+mn-cs"/>
+              </a:rPr>
+              <a:t>Ключевая особенность идеи – декларативный принцип. Конфигом будет определяться вся система (система инициализации, пакеты, пользователи, ...)</a:t>
+            </a:r>
+            <a:r>
+              <a:rPr lang="ru-RU" sz="3200" b="0" i="0" u="none" strike="noStrike" cap="none" spc="0">
+                <a:solidFill>
+                  <a:schemeClr val="tx1">
+                    <a:lumMod val="75000"/>
+                    <a:lumOff val="25000"/>
+                  </a:schemeClr>
+                </a:solidFill>
+                <a:latin typeface="+mn-lt"/>
+                <a:ea typeface="+mn-ea"/>
+                <a:cs typeface="+mn-cs"/>
+              </a:rPr>
+              <a:t>. Пакеты будут расположены в </a:t>
+            </a:r>
+            <a:r>
+              <a:rPr lang="en-US" sz="3200" b="0" i="0" u="none" strike="noStrike" cap="none" spc="0">
+                <a:solidFill>
+                  <a:schemeClr val="tx1">
+                    <a:lumMod val="75000"/>
+                    <a:lumOff val="25000"/>
+                  </a:schemeClr>
+                </a:solidFill>
+                <a:latin typeface="Arial"/>
+                <a:ea typeface="Arial"/>
+                <a:cs typeface="Arial"/>
+              </a:rPr>
+              <a:t>read-only </a:t>
+            </a:r>
+            <a:r>
+              <a:rPr lang="ru-RU" sz="3200" b="0" i="0" u="none" strike="noStrike" cap="none" spc="0">
+                <a:solidFill>
+                  <a:schemeClr val="tx1">
+                    <a:lumMod val="75000"/>
+                    <a:lumOff val="25000"/>
+                  </a:schemeClr>
+                </a:solidFill>
+                <a:latin typeface="Arial"/>
+                <a:ea typeface="Arial"/>
+                <a:cs typeface="Arial"/>
+              </a:rPr>
+              <a:t>директории, изолированно друг от друга, хранение по хешу (благодаря этому можно иметь сразу несколько версий программ и конфликтующее ПО)</a:t>
+            </a:r>
+            <a:endParaRPr sz="3200"/>
+          </a:p>
           <a:p>
             <a:pPr>
               <a:defRPr/>
@@ -4975,7 +5295,7 @@
       </p:grpSpPr>
       <p:sp>
         <p:nvSpPr>
-          <p:cNvPr id="1264777157" name="Title 1"/>
+          <p:cNvPr id="160229788" name="Title 1"/>
           <p:cNvSpPr>
             <a:spLocks noGrp="1"/>
           </p:cNvSpPr>
@@ -5001,7 +5321,7 @@
       </p:sp>
       <p:sp>
         <p:nvSpPr>
-          <p:cNvPr id="1896332224" name="Content Placeholder 2"/>
+          <p:cNvPr id="642236166" name="Content Placeholder 2"/>
           <p:cNvSpPr>
             <a:spLocks noGrp="1"/>
           </p:cNvSpPr>
@@ -5011,13 +5331,73 @@
         </p:nvSpPr>
         <p:spPr bwMode="auto"/>
         <p:txBody>
-          <a:bodyPr/>
+          <a:bodyPr vertOverflow="overflow" horzOverflow="overflow" vert="horz" wrap="square" lIns="91440" tIns="45720" rIns="91440" bIns="45720" numCol="1" spcCol="0" rtlCol="0" fromWordArt="0" anchor="t" anchorCtr="0" forceAA="0" upright="0" compatLnSpc="0">
+            <a:normAutofit/>
+          </a:bodyPr>
           <a:lstStyle/>
           <a:p>
             <a:pPr>
               <a:defRPr/>
             </a:pPr>
-            <a:endParaRPr/>
+            <a:r>
+              <a:rPr lang="ru-RU" sz="2400"/>
+              <a:t>В отличие от классических дистрибутивов (</a:t>
+            </a:r>
+            <a:r>
+              <a:rPr lang="en-US" sz="2400"/>
+              <a:t>debian, ubuntu, arch</a:t>
+            </a:r>
+            <a:r>
+              <a:rPr lang="ru-RU" sz="2400"/>
+              <a:t>)</a:t>
+            </a:r>
+            <a:r>
+              <a:rPr lang="en-US" sz="2400"/>
+              <a:t> </a:t>
+            </a:r>
+            <a:r>
+              <a:rPr lang="ru-RU" sz="2400"/>
+              <a:t>в такой системе установка пакетов производится не императивными комадами, а декларативным конфигом (список программ). Также, изоляция пакетов приводит к детерменированности ОС.</a:t>
+            </a:r>
+            <a:endParaRPr sz="2400"/>
+          </a:p>
+          <a:p>
+            <a:pPr>
+              <a:defRPr/>
+            </a:pPr>
+            <a:endParaRPr sz="2400"/>
+          </a:p>
+          <a:p>
+            <a:pPr>
+              <a:defRPr/>
+            </a:pPr>
+            <a:r>
+              <a:rPr lang="ru-RU" sz="2400"/>
+              <a:t>В </a:t>
+            </a:r>
+            <a:r>
+              <a:rPr lang="en-US" sz="2400"/>
+              <a:t>NixOS </a:t>
+            </a:r>
+            <a:r>
+              <a:rPr lang="ru-RU" sz="2400"/>
+              <a:t>реализована функция откатов – на этапе загрузки вы можете выбрать предыдущую деривацию системы (сохраняется построенную по конфигу систему до очистки, как в </a:t>
+            </a:r>
+            <a:r>
+              <a:rPr lang="en-US" sz="2400"/>
+              <a:t>git</a:t>
+            </a:r>
+            <a:r>
+              <a:rPr lang="ru-RU" sz="2400"/>
+              <a:t>), если последняя деривация содержит ошибки, не функционирует или не соответствует требованиям. Такой же функционал легко реализовать и в моем концепте.</a:t>
+            </a:r>
+            <a:endParaRPr sz="2400"/>
+          </a:p>
+          <a:p>
+            <a:pPr>
+              <a:defRPr/>
+            </a:pPr>
+            <a:endParaRPr sz="2400"/>
           </a:p>
         </p:txBody>
       </p:sp>
@@ -5054,9 +5434,868 @@
           <a:chExt cx="0" cy="0"/>
         </a:xfrm>
       </p:grpSpPr>
+      <p:sp>
+        <p:nvSpPr>
+          <p:cNvPr id="303038640" name="Title 1"/>
+          <p:cNvSpPr>
+            <a:spLocks noGrp="1"/>
+          </p:cNvSpPr>
+          <p:nvPr>
+            <p:ph type="title"/>
+          </p:nvPr>
+        </p:nvSpPr>
+        <p:spPr bwMode="auto"/>
+        <p:txBody>
+          <a:bodyPr/>
+          <a:lstStyle/>
+          <a:p>
+            <a:pPr>
+              <a:defRPr/>
+            </a:pPr>
+            <a:r>
+              <a:rPr lang="ru-RU"/>
+              <a:t>Изоляция пакетов</a:t>
+            </a:r>
+            <a:endParaRPr/>
+          </a:p>
+        </p:txBody>
+      </p:sp>
+      <p:sp>
+        <p:nvSpPr>
+          <p:cNvPr id="1798522328" name=""/>
+          <p:cNvSpPr/>
+          <p:nvPr/>
+        </p:nvSpPr>
+        <p:spPr bwMode="auto">
+          <a:xfrm rot="0" flipH="0" flipV="0">
+            <a:off x="770394" y="1921710"/>
+            <a:ext cx="2272631" cy="1236578"/>
+          </a:xfrm>
+          <a:prstGeom prst="rect">
+            <a:avLst/>
+          </a:prstGeom>
+        </p:spPr>
+        <p:style>
+          <a:lnRef idx="2">
+            <a:schemeClr val="accent1">
+              <a:shade val="50000"/>
+            </a:schemeClr>
+          </a:lnRef>
+          <a:fillRef idx="1">
+            <a:schemeClr val="accent1"/>
+          </a:fillRef>
+          <a:effectRef idx="0">
+            <a:schemeClr val="accent1"/>
+          </a:effectRef>
+          <a:fontRef idx="minor">
+            <a:schemeClr val="lt1"/>
+          </a:fontRef>
+        </p:style>
+        <p:txBody>
+          <a:bodyPr anchor="ctr"/>
+          <a:p>
+            <a:pPr algn="ctr">
+              <a:defRPr/>
+            </a:pPr>
+            <a:r>
+              <a:rPr lang="ru-RU"/>
+              <a:t>Программа 1</a:t>
+            </a:r>
+            <a:endParaRPr/>
+          </a:p>
+        </p:txBody>
+      </p:sp>
+      <p:sp>
+        <p:nvSpPr>
+          <p:cNvPr id="1429978451" name=""/>
+          <p:cNvSpPr/>
+          <p:nvPr/>
+        </p:nvSpPr>
+        <p:spPr bwMode="auto">
+          <a:xfrm rot="0" flipH="0" flipV="0">
+            <a:off x="5802267" y="1921710"/>
+            <a:ext cx="2272630" cy="1236577"/>
+          </a:xfrm>
+          <a:prstGeom prst="rect">
+            <a:avLst/>
+          </a:prstGeom>
+        </p:spPr>
+        <p:style>
+          <a:lnRef idx="2">
+            <a:schemeClr val="accent1">
+              <a:shade val="50000"/>
+            </a:schemeClr>
+          </a:lnRef>
+          <a:fillRef idx="1">
+            <a:schemeClr val="accent1"/>
+          </a:fillRef>
+          <a:effectRef idx="0">
+            <a:schemeClr val="accent1"/>
+          </a:effectRef>
+          <a:fontRef idx="minor">
+            <a:schemeClr val="lt1"/>
+          </a:fontRef>
+        </p:style>
+        <p:txBody>
+          <a:bodyPr anchor="ctr"/>
+          <a:p>
+            <a:pPr algn="ctr">
+              <a:defRPr/>
+            </a:pPr>
+            <a:r>
+              <a:rPr lang="ru-RU"/>
+              <a:t>Программа 2</a:t>
+            </a:r>
+            <a:endParaRPr/>
+          </a:p>
+        </p:txBody>
+      </p:sp>
+      <p:sp>
+        <p:nvSpPr>
+          <p:cNvPr id="209015936" name=""/>
+          <p:cNvSpPr/>
+          <p:nvPr/>
+        </p:nvSpPr>
+        <p:spPr bwMode="auto">
+          <a:xfrm rot="0" flipH="0" flipV="0">
+            <a:off x="636710" y="5031873"/>
+            <a:ext cx="2406315" cy="785394"/>
+          </a:xfrm>
+          <a:prstGeom prst="rect">
+            <a:avLst/>
+          </a:prstGeom>
+        </p:spPr>
+        <p:style>
+          <a:lnRef idx="2">
+            <a:schemeClr val="accent1">
+              <a:shade val="50000"/>
+            </a:schemeClr>
+          </a:lnRef>
+          <a:fillRef idx="1">
+            <a:schemeClr val="accent1"/>
+          </a:fillRef>
+          <a:effectRef idx="0">
+            <a:schemeClr val="accent1"/>
+          </a:effectRef>
+          <a:fontRef idx="minor">
+            <a:schemeClr val="lt1"/>
+          </a:fontRef>
+        </p:style>
+        <p:txBody>
+          <a:bodyPr anchor="ctr"/>
+          <a:p>
+            <a:pPr algn="ctr">
+              <a:defRPr/>
+            </a:pPr>
+            <a:r>
+              <a:rPr lang="ru-RU"/>
+              <a:t>Зависимость 1 </a:t>
+            </a:r>
+            <a:r>
+              <a:rPr lang="en-US"/>
+              <a:t>v1.0</a:t>
+            </a:r>
+            <a:endParaRPr/>
+          </a:p>
+        </p:txBody>
+      </p:sp>
+      <p:sp>
+        <p:nvSpPr>
+          <p:cNvPr id="1028120388" name=""/>
+          <p:cNvSpPr/>
+          <p:nvPr/>
+        </p:nvSpPr>
+        <p:spPr bwMode="auto">
+          <a:xfrm rot="0" flipH="0" flipV="0">
+            <a:off x="3226842" y="5031873"/>
+            <a:ext cx="2406314" cy="785394"/>
+          </a:xfrm>
+          <a:prstGeom prst="rect">
+            <a:avLst/>
+          </a:prstGeom>
+        </p:spPr>
+        <p:style>
+          <a:lnRef idx="2">
+            <a:schemeClr val="accent1">
+              <a:shade val="50000"/>
+            </a:schemeClr>
+          </a:lnRef>
+          <a:fillRef idx="1">
+            <a:schemeClr val="accent1"/>
+          </a:fillRef>
+          <a:effectRef idx="0">
+            <a:schemeClr val="accent1"/>
+          </a:effectRef>
+          <a:fontRef idx="minor">
+            <a:schemeClr val="lt1"/>
+          </a:fontRef>
+        </p:style>
+        <p:txBody>
+          <a:bodyPr anchor="ctr"/>
+          <a:p>
+            <a:pPr algn="ctr">
+              <a:defRPr/>
+            </a:pPr>
+            <a:r>
+              <a:rPr lang="ru-RU"/>
+              <a:t>Общая Зависимость</a:t>
+            </a:r>
+            <a:endParaRPr/>
+          </a:p>
+        </p:txBody>
+      </p:sp>
+      <p:sp>
+        <p:nvSpPr>
+          <p:cNvPr id="816983567" name=""/>
+          <p:cNvSpPr/>
+          <p:nvPr/>
+        </p:nvSpPr>
+        <p:spPr bwMode="auto">
+          <a:xfrm rot="0" flipH="0" flipV="0">
+            <a:off x="5802267" y="5031873"/>
+            <a:ext cx="2406314" cy="785394"/>
+          </a:xfrm>
+          <a:prstGeom prst="rect">
+            <a:avLst/>
+          </a:prstGeom>
+        </p:spPr>
+        <p:style>
+          <a:lnRef idx="2">
+            <a:schemeClr val="accent1">
+              <a:shade val="50000"/>
+            </a:schemeClr>
+          </a:lnRef>
+          <a:fillRef idx="1">
+            <a:schemeClr val="accent1"/>
+          </a:fillRef>
+          <a:effectRef idx="0">
+            <a:schemeClr val="accent1"/>
+          </a:effectRef>
+          <a:fontRef idx="minor">
+            <a:schemeClr val="lt1"/>
+          </a:fontRef>
+        </p:style>
+        <p:txBody>
+          <a:bodyPr anchor="ctr"/>
+          <a:p>
+            <a:pPr algn="ctr">
+              <a:defRPr/>
+            </a:pPr>
+            <a:r>
+              <a:rPr lang="ru-RU"/>
+              <a:t>Зависимость 1 </a:t>
+            </a:r>
+            <a:r>
+              <a:rPr lang="en-US"/>
+              <a:t>v</a:t>
+            </a:r>
+            <a:r>
+              <a:rPr lang="ru-RU"/>
+              <a:t>2</a:t>
+            </a:r>
+            <a:r>
+              <a:rPr lang="en-US"/>
+              <a:t>.0</a:t>
+            </a:r>
+            <a:endParaRPr/>
+          </a:p>
+        </p:txBody>
+      </p:sp>
+      <p:cxnSp>
+        <p:nvCxnSpPr>
+          <p:cNvPr id="1293302894" name=""/>
+          <p:cNvCxnSpPr>
+            <a:stCxn id="1798522328" idx="2"/>
+            <a:endCxn id="209015936" idx="0"/>
+          </p:cNvCxnSpPr>
+          <p:nvPr/>
+        </p:nvCxnSpPr>
+        <p:spPr bwMode="auto">
+          <a:xfrm rot="5399978" flipH="0" flipV="0">
+            <a:off x="936497" y="4061660"/>
+            <a:ext cx="1873583" cy="66841"/>
+          </a:xfrm>
+          <a:prstGeom prst="line">
+            <a:avLst/>
+          </a:prstGeom>
+          <a:ln>
+            <a:tailEnd type="arrow" len="med"/>
+          </a:ln>
+        </p:spPr>
+        <p:style>
+          <a:lnRef idx="1">
+            <a:schemeClr val="accent1">
+              <a:shade val="50000"/>
+            </a:schemeClr>
+          </a:lnRef>
+          <a:fillRef idx="0">
+            <a:schemeClr val="accent1"/>
+          </a:fillRef>
+          <a:effectRef idx="0">
+            <a:schemeClr val="accent1"/>
+          </a:effectRef>
+          <a:fontRef idx="minor">
+            <a:schemeClr val="tx1"/>
+          </a:fontRef>
+        </p:style>
+      </p:cxnSp>
+      <p:cxnSp>
+        <p:nvCxnSpPr>
+          <p:cNvPr id="1177037048" name=""/>
+          <p:cNvCxnSpPr>
+            <a:stCxn id="1798522328" idx="2"/>
+            <a:endCxn id="1028120388" idx="0"/>
+          </p:cNvCxnSpPr>
+          <p:nvPr/>
+        </p:nvCxnSpPr>
+        <p:spPr bwMode="auto">
+          <a:xfrm rot="5399978" flipH="0" flipV="1">
+            <a:off x="2231562" y="2833436"/>
+            <a:ext cx="1873583" cy="2523288"/>
+          </a:xfrm>
+          <a:prstGeom prst="line">
+            <a:avLst/>
+          </a:prstGeom>
+          <a:ln>
+            <a:tailEnd type="arrow" len="med"/>
+          </a:ln>
+        </p:spPr>
+        <p:style>
+          <a:lnRef idx="1">
+            <a:schemeClr val="accent1">
+              <a:shade val="50000"/>
+            </a:schemeClr>
+          </a:lnRef>
+          <a:fillRef idx="0">
+            <a:schemeClr val="accent1"/>
+          </a:fillRef>
+          <a:effectRef idx="0">
+            <a:schemeClr val="accent1"/>
+          </a:effectRef>
+          <a:fontRef idx="minor">
+            <a:schemeClr val="tx1"/>
+          </a:fontRef>
+        </p:style>
+      </p:cxnSp>
+      <p:cxnSp>
+        <p:nvCxnSpPr>
+          <p:cNvPr id="341879370" name=""/>
+          <p:cNvCxnSpPr>
+            <a:stCxn id="1429978451" idx="2"/>
+            <a:endCxn id="1028120388" idx="0"/>
+          </p:cNvCxnSpPr>
+          <p:nvPr/>
+        </p:nvCxnSpPr>
+        <p:spPr bwMode="auto">
+          <a:xfrm rot="5399978" flipH="0" flipV="0">
+            <a:off x="4747498" y="2840788"/>
+            <a:ext cx="1873584" cy="2508583"/>
+          </a:xfrm>
+          <a:prstGeom prst="line">
+            <a:avLst/>
+          </a:prstGeom>
+          <a:ln>
+            <a:tailEnd type="arrow" len="med"/>
+          </a:ln>
+        </p:spPr>
+        <p:style>
+          <a:lnRef idx="1">
+            <a:schemeClr val="accent1">
+              <a:shade val="50000"/>
+            </a:schemeClr>
+          </a:lnRef>
+          <a:fillRef idx="0">
+            <a:schemeClr val="accent1"/>
+          </a:fillRef>
+          <a:effectRef idx="0">
+            <a:schemeClr val="accent1"/>
+          </a:effectRef>
+          <a:fontRef idx="minor">
+            <a:schemeClr val="tx1"/>
+          </a:fontRef>
+        </p:style>
+      </p:cxnSp>
+      <p:cxnSp>
+        <p:nvCxnSpPr>
+          <p:cNvPr id="346472845" name=""/>
+          <p:cNvCxnSpPr>
+            <a:stCxn id="1429978451" idx="2"/>
+            <a:endCxn id="816983567" idx="0"/>
+          </p:cNvCxnSpPr>
+          <p:nvPr/>
+        </p:nvCxnSpPr>
+        <p:spPr bwMode="auto">
+          <a:xfrm rot="5399978" flipH="0" flipV="1">
+            <a:off x="6035211" y="4061659"/>
+            <a:ext cx="1873584" cy="66841"/>
+          </a:xfrm>
+          <a:prstGeom prst="line">
+            <a:avLst/>
+          </a:prstGeom>
+          <a:ln>
+            <a:tailEnd type="arrow" len="med"/>
+          </a:ln>
+        </p:spPr>
+        <p:style>
+          <a:lnRef idx="1">
+            <a:schemeClr val="accent1">
+              <a:shade val="50000"/>
+            </a:schemeClr>
+          </a:lnRef>
+          <a:fillRef idx="0">
+            <a:schemeClr val="accent1"/>
+          </a:fillRef>
+          <a:effectRef idx="0">
+            <a:schemeClr val="accent1"/>
+          </a:effectRef>
+          <a:fontRef idx="minor">
+            <a:schemeClr val="tx1"/>
+          </a:fontRef>
+        </p:style>
+      </p:cxnSp>
+      <p:sp>
+        <p:nvSpPr>
+          <p:cNvPr id="1756794832" name=""/>
+          <p:cNvSpPr txBox="1"/>
+          <p:nvPr/>
+        </p:nvSpPr>
+        <p:spPr bwMode="auto">
+          <a:xfrm rot="0" flipH="0" flipV="0">
+            <a:off x="8607631" y="2005263"/>
+            <a:ext cx="3068944" cy="2560679"/>
+          </a:xfrm>
+          <a:prstGeom prst="rect">
+            <a:avLst/>
+          </a:prstGeom>
+          <a:noFill/>
+        </p:spPr>
+        <p:txBody>
+          <a:bodyPr vertOverflow="overflow" horzOverflow="overflow" vert="horz" wrap="square" lIns="91440" tIns="45720" rIns="91440" bIns="45720" numCol="1" spcCol="0" rtlCol="0" fromWordArt="0" anchor="t" anchorCtr="0" forceAA="0" upright="0" compatLnSpc="0">
+            <a:spAutoFit/>
+          </a:bodyPr>
+          <a:p>
+            <a:pPr>
+              <a:defRPr/>
+            </a:pPr>
+            <a:r>
+              <a:rPr lang="ru-RU"/>
+              <a:t>В область видимости программ будут входить только те зависимости, которые им нужны</a:t>
+            </a:r>
+            <a:br>
+              <a:rPr lang="ru-RU"/>
+            </a:br>
+            <a:r>
+              <a:rPr lang="ru-RU"/>
+              <a:t>Зависимости разных версий имеют разный хеш, значит являются полностью разными для системы</a:t>
+            </a:r>
+            <a:endParaRPr/>
+          </a:p>
+        </p:txBody>
+      </p:sp>
+    </p:spTree>
+  </p:cSld>
+  <p:clrMapOvr>
+    <a:masterClrMapping/>
+  </p:clrMapOvr>
+  <mc:AlternateContent xmlns:mc="http://schemas.openxmlformats.org/markup-compatibility/2006">
+    <mc:Choice xmlns:p159="http://schemas.microsoft.com/office/powerpoint/2015/09/main" xmlns:p14="http://schemas.microsoft.com/office/powerpoint/2010/main" Requires="p159">
+      <p:transition p14:dur="2000" advClick="1"/>
+    </mc:Choice>
+    <mc:Fallback>
+      <p:transition advClick="1"/>
+    </mc:Fallback>
+  </mc:AlternateContent>
+</p:sld>
+</file>
+
+<file path=ppt/slides/slide5.xml><?xml version="1.0" encoding="utf-8"?>
+<p:sld xmlns:a="http://schemas.openxmlformats.org/drawingml/2006/main" xmlns:r="http://schemas.openxmlformats.org/officeDocument/2006/relationships" xmlns:p="http://schemas.openxmlformats.org/presentationml/2006/main" xmlns:m="http://schemas.openxmlformats.org/officeDocument/2006/math" xmlns:w="http://schemas.openxmlformats.org/wordprocessingml/2006/main" xmlns:mc="http://schemas.openxmlformats.org/markup-compatibility/2006" showMasterPhAnim="0" showMasterSp="1" show="1">
+  <p:cSld name="">
+    <p:spTree>
+      <p:nvGrpSpPr>
+        <p:cNvPr id="1" name=""/>
+        <p:cNvGrpSpPr/>
+        <p:nvPr/>
+      </p:nvGrpSpPr>
+      <p:grpSpPr bwMode="auto">
+        <a:xfrm>
+          <a:off x="0" y="0"/>
+          <a:ext cx="0" cy="0"/>
+          <a:chOff x="0" y="0"/>
+          <a:chExt cx="0" cy="0"/>
+        </a:xfrm>
+      </p:grpSpPr>
+      <p:sp>
+        <p:nvSpPr>
+          <p:cNvPr id="1873129903" name="Title 1"/>
+          <p:cNvSpPr>
+            <a:spLocks noGrp="1"/>
+          </p:cNvSpPr>
+          <p:nvPr>
+            <p:ph type="title"/>
+          </p:nvPr>
+        </p:nvSpPr>
+        <p:spPr bwMode="auto"/>
+        <p:txBody>
+          <a:bodyPr/>
+          <a:lstStyle/>
+          <a:p>
+            <a:pPr>
+              <a:defRPr/>
+            </a:pPr>
+            <a:r>
+              <a:rPr lang="ru-RU"/>
+              <a:t>Плюсы концепта</a:t>
+            </a:r>
+            <a:endParaRPr/>
+          </a:p>
+        </p:txBody>
+      </p:sp>
+      <p:sp>
+        <p:nvSpPr>
+          <p:cNvPr id="2029995428" name="Content Placeholder 2"/>
+          <p:cNvSpPr>
+            <a:spLocks noGrp="1"/>
+          </p:cNvSpPr>
+          <p:nvPr>
+            <p:ph idx="1"/>
+          </p:nvPr>
+        </p:nvSpPr>
+        <p:spPr bwMode="auto"/>
+        <p:txBody>
+          <a:bodyPr vertOverflow="overflow" horzOverflow="overflow" vert="horz" wrap="square" lIns="91440" tIns="45720" rIns="91440" bIns="45720" numCol="1" spcCol="0" rtlCol="0" fromWordArt="0" anchor="t" anchorCtr="0" forceAA="0" upright="0" compatLnSpc="0">
+            <a:normAutofit fontScale="80000" lnSpcReduction="4000"/>
+          </a:bodyPr>
+          <a:lstStyle/>
+          <a:p>
+            <a:pPr marL="349965" indent="-349965">
+              <a:buFont typeface="Arial"/>
+              <a:buAutoNum type="arabicPeriod"/>
+              <a:defRPr/>
+            </a:pPr>
+            <a:r>
+              <a:rPr lang="ru-RU" sz="2400" b="1"/>
+              <a:t>Изоляция пакетов </a:t>
+            </a:r>
+            <a:r>
+              <a:rPr lang="ru-RU" sz="2400" b="0"/>
+              <a:t>– система сможет иметь разные версии одного пакета, </a:t>
+            </a:r>
+            <a:r>
+              <a:rPr lang="ru-RU" sz="2400" b="0"/>
+              <a:t>ошибки зависимостей и конфликтов исключены</a:t>
+            </a:r>
+            <a:endParaRPr sz="2400" b="0"/>
+          </a:p>
+          <a:p>
+            <a:pPr marL="349965" indent="-349965">
+              <a:buFont typeface="Arial"/>
+              <a:buAutoNum type="arabicPeriod"/>
+              <a:defRPr/>
+            </a:pPr>
+            <a:r>
+              <a:rPr lang="ru-RU" sz="2400" b="1"/>
+              <a:t>Детерменированность </a:t>
+            </a:r>
+            <a:r>
+              <a:rPr lang="ru-RU" sz="2400" b="0"/>
+              <a:t>– одна и та же конфигурация </a:t>
+            </a:r>
+            <a:r>
+              <a:rPr lang="ru-RU" sz="2400"/>
+              <a:t>приведет к одному и тому же результату</a:t>
+            </a:r>
+            <a:r>
+              <a:rPr lang="ru-RU" sz="2400"/>
+              <a:t>. Драйвера и другие опции, зависящие от платформы, должны быть вынесены в отдельную конфигурацию устройства</a:t>
+            </a:r>
+            <a:endParaRPr sz="2400" b="0"/>
+          </a:p>
+          <a:p>
+            <a:pPr marL="349965" indent="-349965">
+              <a:buFont typeface="Arial"/>
+              <a:buAutoNum type="arabicPeriod"/>
+              <a:defRPr/>
+            </a:pPr>
+            <a:r>
+              <a:rPr lang="ru-RU" sz="2400" b="1"/>
+              <a:t>Реплицируемость </a:t>
+            </a:r>
+            <a:r>
+              <a:rPr lang="ru-RU" sz="2400"/>
+              <a:t>– имея конфигурацию системы, можно сделать её точную копию (за исключением пользовательских файлов)</a:t>
+            </a:r>
+            <a:endParaRPr sz="2400"/>
+          </a:p>
+          <a:p>
+            <a:pPr marL="349965" indent="-349965">
+              <a:buFont typeface="Arial"/>
+              <a:buAutoNum type="arabicPeriod"/>
+              <a:defRPr/>
+            </a:pPr>
+            <a:r>
+              <a:rPr lang="ru-RU" sz="2400" b="1" i="0" u="none" strike="noStrike" cap="none" spc="0">
+                <a:solidFill>
+                  <a:schemeClr val="tx1">
+                    <a:lumMod val="75000"/>
+                    <a:lumOff val="25000"/>
+                  </a:schemeClr>
+                </a:solidFill>
+                <a:latin typeface="+mn-lt"/>
+                <a:ea typeface="+mn-ea"/>
+                <a:cs typeface="+mn-cs"/>
+              </a:rPr>
+              <a:t>Упрощенное администрирование</a:t>
+            </a:r>
+            <a:r>
+              <a:rPr lang="ru-RU" sz="2400" b="0" i="0" u="none" strike="noStrike" cap="none" spc="0">
+                <a:solidFill>
+                  <a:schemeClr val="tx1">
+                    <a:lumMod val="75000"/>
+                    <a:lumOff val="25000"/>
+                  </a:schemeClr>
+                </a:solidFill>
+                <a:latin typeface="+mn-lt"/>
+                <a:ea typeface="+mn-ea"/>
+                <a:cs typeface="+mn-cs"/>
+              </a:rPr>
+              <a:t> – версионирование конфигурационного файла можно вести в </a:t>
+            </a:r>
+            <a:r>
+              <a:rPr lang="en-US" sz="2400" b="0" i="0" u="none" strike="noStrike" cap="none" spc="0">
+                <a:solidFill>
+                  <a:schemeClr val="tx1">
+                    <a:lumMod val="75000"/>
+                    <a:lumOff val="25000"/>
+                  </a:schemeClr>
+                </a:solidFill>
+                <a:latin typeface="+mn-lt"/>
+                <a:ea typeface="+mn-ea"/>
+                <a:cs typeface="+mn-cs"/>
+              </a:rPr>
+              <a:t>git, </a:t>
+            </a:r>
+            <a:r>
+              <a:rPr lang="ru-RU" sz="2400" b="0" i="0" u="none" strike="noStrike" cap="none" spc="0">
+                <a:solidFill>
+                  <a:schemeClr val="tx1">
+                    <a:lumMod val="75000"/>
+                    <a:lumOff val="25000"/>
+                  </a:schemeClr>
+                </a:solidFill>
+                <a:latin typeface="+mn-lt"/>
+                <a:ea typeface="+mn-ea"/>
+                <a:cs typeface="+mn-cs"/>
+              </a:rPr>
+              <a:t>это упрощает аудит действий системных администраторов и дает возможность оперативно отменить изменения при необходимости</a:t>
+            </a:r>
+            <a:endParaRPr sz="2400"/>
+          </a:p>
+          <a:p>
+            <a:pPr marL="349965" indent="-349965">
+              <a:buFont typeface="Arial"/>
+              <a:buAutoNum type="arabicPeriod"/>
+              <a:defRPr/>
+            </a:pPr>
+            <a:r>
+              <a:rPr lang="ru-RU" sz="2400" b="1"/>
+              <a:t>Плавное освоение </a:t>
+            </a:r>
+            <a:r>
+              <a:rPr lang="ru-RU" sz="2400" b="0"/>
+              <a:t>– конфигурационные файлы созданы для чтения и записи из кода, детерменированность системы позволяет сделать пользовательский интерфейс для изменения конфигурации, который не сможет привести к ошибкам в системе. В </a:t>
+            </a:r>
+            <a:r>
+              <a:rPr lang="en-US" sz="2400" b="0"/>
+              <a:t>NixOS </a:t>
+            </a:r>
+            <a:r>
+              <a:rPr lang="ru-RU" sz="2400" b="0"/>
+              <a:t>такой подход усложнен, ведь ее конфигурация выполнена в функциональном языке программирования</a:t>
+            </a:r>
+            <a:endParaRPr lang="ru-RU" sz="2400" b="0"/>
+          </a:p>
+        </p:txBody>
+      </p:sp>
+    </p:spTree>
+  </p:cSld>
+  <p:clrMapOvr>
+    <a:masterClrMapping/>
+  </p:clrMapOvr>
+  <mc:AlternateContent xmlns:mc="http://schemas.openxmlformats.org/markup-compatibility/2006">
+    <mc:Choice xmlns:p159="http://schemas.microsoft.com/office/powerpoint/2015/09/main" xmlns:p14="http://schemas.microsoft.com/office/powerpoint/2010/main" Requires="p159">
+      <p:transition p14:dur="2000" advClick="1"/>
+    </mc:Choice>
+    <mc:Fallback>
+      <p:transition advClick="1"/>
+    </mc:Fallback>
+  </mc:AlternateContent>
+</p:sld>
+</file>
+
+<file path=ppt/slides/slide6.xml><?xml version="1.0" encoding="utf-8"?>
+<p:sld xmlns:a="http://schemas.openxmlformats.org/drawingml/2006/main" xmlns:r="http://schemas.openxmlformats.org/officeDocument/2006/relationships" xmlns:p="http://schemas.openxmlformats.org/presentationml/2006/main" xmlns:m="http://schemas.openxmlformats.org/officeDocument/2006/math" xmlns:w="http://schemas.openxmlformats.org/wordprocessingml/2006/main" xmlns:mc="http://schemas.openxmlformats.org/markup-compatibility/2006" showMasterPhAnim="0" showMasterSp="1" show="1">
+  <p:cSld name="">
+    <p:spTree>
+      <p:nvGrpSpPr>
+        <p:cNvPr id="1" name=""/>
+        <p:cNvGrpSpPr/>
+        <p:nvPr/>
+      </p:nvGrpSpPr>
+      <p:grpSpPr bwMode="auto">
+        <a:xfrm>
+          <a:off x="0" y="0"/>
+          <a:ext cx="0" cy="0"/>
+          <a:chOff x="0" y="0"/>
+          <a:chExt cx="0" cy="0"/>
+        </a:xfrm>
+      </p:grpSpPr>
+      <p:sp>
+        <p:nvSpPr>
+          <p:cNvPr id="639641195" name="Title 1"/>
+          <p:cNvSpPr>
+            <a:spLocks noGrp="1"/>
+          </p:cNvSpPr>
+          <p:nvPr>
+            <p:ph type="title"/>
+          </p:nvPr>
+        </p:nvSpPr>
+        <p:spPr bwMode="auto"/>
+        <p:txBody>
+          <a:bodyPr/>
+          <a:lstStyle/>
+          <a:p>
+            <a:pPr>
+              <a:defRPr/>
+            </a:pPr>
+            <a:r>
+              <a:rPr lang="ru-RU"/>
+              <a:t>Минусы концепта</a:t>
+            </a:r>
+            <a:endParaRPr/>
+          </a:p>
+        </p:txBody>
+      </p:sp>
+      <p:sp>
+        <p:nvSpPr>
+          <p:cNvPr id="874021780" name="Content Placeholder 2"/>
+          <p:cNvSpPr>
+            <a:spLocks noGrp="1"/>
+          </p:cNvSpPr>
+          <p:nvPr>
+            <p:ph idx="1"/>
+          </p:nvPr>
+        </p:nvSpPr>
+        <p:spPr bwMode="auto"/>
+        <p:txBody>
+          <a:bodyPr/>
+          <a:lstStyle/>
+          <a:p>
+            <a:pPr marL="438080" indent="-438080">
+              <a:buFont typeface="Arial"/>
+              <a:buAutoNum type="arabicPeriod"/>
+              <a:defRPr/>
+            </a:pPr>
+            <a:r>
+              <a:rPr lang="ru-RU" sz="2400" b="1"/>
+              <a:t>Больший вес</a:t>
+            </a:r>
+            <a:r>
+              <a:rPr lang="ru-RU" sz="2400" b="0"/>
+              <a:t> – конфигурация, деривации системы будут занимать место, пакетный менеджер хранит больше информации</a:t>
+            </a:r>
+            <a:r>
+              <a:rPr lang="en-US" sz="2400" b="0"/>
+              <a:t>; </a:t>
+            </a:r>
+            <a:r>
+              <a:rPr lang="ru-RU" sz="2400" b="0"/>
+              <a:t>однако, на современном оборудовании затраты памяти не будут значительны</a:t>
+            </a:r>
+            <a:endParaRPr sz="2400" b="0"/>
+          </a:p>
+          <a:p>
+            <a:pPr marL="438080" indent="-438080">
+              <a:buFont typeface="Arial"/>
+              <a:buAutoNum type="arabicPeriod"/>
+              <a:defRPr/>
+            </a:pPr>
+            <a:r>
+              <a:rPr lang="ru-RU" sz="2400" b="1"/>
+              <a:t>Излишняя изоляция</a:t>
+            </a:r>
+            <a:r>
+              <a:rPr lang="ru-RU" sz="2400" b="0"/>
+              <a:t> </a:t>
+            </a:r>
+            <a:r>
+              <a:rPr lang="ru-RU" sz="2400" b="0"/>
+              <a:t>– некоторые программы могут иметь неявные зависимости. Решение</a:t>
+            </a:r>
+            <a:r>
+              <a:rPr lang="en-US" sz="2400" b="0"/>
+              <a:t>: </a:t>
+            </a:r>
+            <a:r>
+              <a:rPr lang="ru-RU" sz="2400" b="0"/>
+              <a:t>конфигурации </a:t>
+            </a:r>
+            <a:r>
+              <a:rPr lang="en-US" sz="2400" b="0"/>
+              <a:t>shell, </a:t>
+            </a:r>
+            <a:r>
+              <a:rPr lang="ru-RU" sz="2400" b="0"/>
+              <a:t>в которых будут описаны необходимые программы (как в </a:t>
+            </a:r>
+            <a:r>
+              <a:rPr lang="en-US" sz="2400" b="0"/>
+              <a:t>NixOS</a:t>
+            </a:r>
+            <a:r>
+              <a:rPr lang="ru-RU" sz="2400" b="0"/>
+              <a:t>)</a:t>
+            </a:r>
+            <a:endParaRPr sz="2400" b="0"/>
+          </a:p>
+        </p:txBody>
+      </p:sp>
+    </p:spTree>
+  </p:cSld>
+  <p:clrMapOvr>
+    <a:masterClrMapping/>
+  </p:clrMapOvr>
+  <mc:AlternateContent xmlns:mc="http://schemas.openxmlformats.org/markup-compatibility/2006">
+    <mc:Choice xmlns:p159="http://schemas.microsoft.com/office/powerpoint/2015/09/main" xmlns:p14="http://schemas.microsoft.com/office/powerpoint/2010/main" Requires="p159">
+      <p:transition p14:dur="2000" advClick="1"/>
+    </mc:Choice>
+    <mc:Fallback>
+      <p:transition advClick="1"/>
+    </mc:Fallback>
+  </mc:AlternateContent>
+</p:sld>
+</file>
+
+<file path=ppt/slides/slide7.xml><?xml version="1.0" encoding="utf-8"?>
+<p:sld xmlns:a="http://schemas.openxmlformats.org/drawingml/2006/main" xmlns:r="http://schemas.openxmlformats.org/officeDocument/2006/relationships" xmlns:p="http://schemas.openxmlformats.org/presentationml/2006/main" xmlns:m="http://schemas.openxmlformats.org/officeDocument/2006/math" xmlns:w="http://schemas.openxmlformats.org/wordprocessingml/2006/main" xmlns:mc="http://schemas.openxmlformats.org/markup-compatibility/2006" showMasterPhAnim="0" showMasterSp="1" show="1">
+  <p:cSld name="">
+    <p:spTree>
+      <p:nvGrpSpPr>
+        <p:cNvPr id="1" name=""/>
+        <p:cNvGrpSpPr/>
+        <p:nvPr/>
+      </p:nvGrpSpPr>
+      <p:grpSpPr bwMode="auto">
+        <a:xfrm>
+          <a:off x="0" y="0"/>
+          <a:ext cx="0" cy="0"/>
+          <a:chOff x="0" y="0"/>
+          <a:chExt cx="0" cy="0"/>
+        </a:xfrm>
+      </p:grpSpPr>
       <p:graphicFrame>
         <p:nvGraphicFramePr>
-          <p:cNvPr id="1396273831" name=""/>
+          <p:cNvPr id="1665604834" name=""/>
           <p:cNvGraphicFramePr>
             <a:graphicFrameLocks xmlns:a="http://schemas.openxmlformats.org/drawingml/2006/main" noChangeAspect="1"/>
           </p:cNvGraphicFramePr>
@@ -5072,7 +6311,7 @@
               <p:embed/>
               <p:pic>
                 <p:nvPicPr>
-                  <p:cNvPr id="1396273831" name=""/>
+                  <p:cNvPr id="1665604834" name=""/>
                   <p:cNvPicPr/>
                   <p:nvPr/>
                 </p:nvPicPr>
@@ -5096,7 +6335,7 @@
       </p:graphicFrame>
       <p:sp>
         <p:nvSpPr>
-          <p:cNvPr id="1520609233" name=""/>
+          <p:cNvPr id="1389840908" name=""/>
           <p:cNvSpPr txBox="1"/>
           <p:nvPr/>
         </p:nvSpPr>

--- a/NewOS.pptx
+++ b/NewOS.pptx
@@ -140,7 +140,7 @@
       </p:grpSpPr>
       <p:sp>
         <p:nvSpPr>
-          <p:cNvPr id="639087279" name="Header Placeholder 1"/>
+          <p:cNvPr id="2108598266" name="Header Placeholder 1"/>
           <p:cNvSpPr>
             <a:spLocks noGrp="1"/>
           </p:cNvSpPr>
@@ -174,7 +174,7 @@
       </p:sp>
       <p:sp>
         <p:nvSpPr>
-          <p:cNvPr id="1458410344" name="Date Placeholder 2"/>
+          <p:cNvPr id="230254865" name="Date Placeholder 2"/>
           <p:cNvSpPr>
             <a:spLocks noGrp="1"/>
           </p:cNvSpPr>
@@ -212,7 +212,7 @@
       </p:sp>
       <p:sp>
         <p:nvSpPr>
-          <p:cNvPr id="744356146" name="Slide Image Placeholder 3"/>
+          <p:cNvPr id="178238473" name="Slide Image Placeholder 3"/>
           <p:cNvSpPr>
             <a:spLocks noChangeAspect="1" noGrp="1" noRot="1"/>
           </p:cNvSpPr>
@@ -248,7 +248,7 @@
       </p:sp>
       <p:sp>
         <p:nvSpPr>
-          <p:cNvPr id="1782463795" name="Notes Placeholder 4"/>
+          <p:cNvPr id="1404196369" name="Notes Placeholder 4"/>
           <p:cNvSpPr>
             <a:spLocks noGrp="1"/>
           </p:cNvSpPr>
@@ -322,7 +322,7 @@
       </p:sp>
       <p:sp>
         <p:nvSpPr>
-          <p:cNvPr id="2041844558" name="Footer Placeholder 5"/>
+          <p:cNvPr id="22363243" name="Footer Placeholder 5"/>
           <p:cNvSpPr>
             <a:spLocks noGrp="1"/>
           </p:cNvSpPr>
@@ -356,7 +356,7 @@
       </p:sp>
       <p:sp>
         <p:nvSpPr>
-          <p:cNvPr id="1391059004" name="Slide Number Placeholder 6"/>
+          <p:cNvPr id="295404267" name="Slide Number Placeholder 6"/>
           <p:cNvSpPr>
             <a:spLocks noGrp="1"/>
           </p:cNvSpPr>
@@ -509,7 +509,7 @@
       </p:grpSpPr>
       <p:sp>
         <p:nvSpPr>
-          <p:cNvPr id="1567567906" name="Slide Image Placeholder 1"/>
+          <p:cNvPr id="1880641827" name="Slide Image Placeholder 1"/>
           <p:cNvSpPr>
             <a:spLocks noChangeAspect="1" noGrp="1" noRot="1"/>
           </p:cNvSpPr>
@@ -526,7 +526,7 @@
       </p:sp>
       <p:sp>
         <p:nvSpPr>
-          <p:cNvPr id="1729913295" name="Notes Placeholder 2"/>
+          <p:cNvPr id="1057471557" name="Notes Placeholder 2"/>
           <p:cNvSpPr>
             <a:spLocks noGrp="1"/>
           </p:cNvSpPr>
@@ -551,7 +551,7 @@
       </p:sp>
       <p:sp>
         <p:nvSpPr>
-          <p:cNvPr id="1888425671" name="Slide Number Placeholder 3"/>
+          <p:cNvPr id="626001236" name="Slide Number Placeholder 3"/>
           <p:cNvSpPr>
             <a:spLocks noGrp="1"/>
           </p:cNvSpPr>
@@ -602,7 +602,7 @@
       </p:grpSpPr>
       <p:sp>
         <p:nvSpPr>
-          <p:cNvPr id="1956330286" name="Slide Image Placeholder 1"/>
+          <p:cNvPr id="951505556" name="Slide Image Placeholder 1"/>
           <p:cNvSpPr>
             <a:spLocks noChangeAspect="1" noGrp="1" noRot="1"/>
           </p:cNvSpPr>
@@ -614,7 +614,7 @@
       </p:sp>
       <p:sp>
         <p:nvSpPr>
-          <p:cNvPr id="287990369" name="Notes Placeholder 2"/>
+          <p:cNvPr id="271360751" name="Notes Placeholder 2"/>
           <p:cNvSpPr>
             <a:spLocks noGrp="1"/>
           </p:cNvSpPr>
@@ -636,7 +636,7 @@
       </p:sp>
       <p:sp>
         <p:nvSpPr>
-          <p:cNvPr id="402690931" name="Slide Number Placeholder 3"/>
+          <p:cNvPr id="1071920953" name="Slide Number Placeholder 3"/>
           <p:cNvSpPr>
             <a:spLocks noGrp="1"/>
           </p:cNvSpPr>
@@ -687,7 +687,7 @@
       </p:grpSpPr>
       <p:sp>
         <p:nvSpPr>
-          <p:cNvPr id="1670007757" name="Slide Image Placeholder 1"/>
+          <p:cNvPr id="1543454238" name="Slide Image Placeholder 1"/>
           <p:cNvSpPr>
             <a:spLocks noChangeAspect="1" noGrp="1" noRot="1"/>
           </p:cNvSpPr>
@@ -699,7 +699,7 @@
       </p:sp>
       <p:sp>
         <p:nvSpPr>
-          <p:cNvPr id="189563855" name="Notes Placeholder 2"/>
+          <p:cNvPr id="1755294033" name="Notes Placeholder 2"/>
           <p:cNvSpPr>
             <a:spLocks noGrp="1"/>
           </p:cNvSpPr>
@@ -721,7 +721,7 @@
       </p:sp>
       <p:sp>
         <p:nvSpPr>
-          <p:cNvPr id="1905213075" name="Slide Number Placeholder 3"/>
+          <p:cNvPr id="1445260690" name="Slide Number Placeholder 3"/>
           <p:cNvSpPr>
             <a:spLocks noGrp="1"/>
           </p:cNvSpPr>
@@ -1027,7 +1027,7 @@
       </p:grpSpPr>
       <p:sp>
         <p:nvSpPr>
-          <p:cNvPr id="529859288" name="Slide Image Placeholder 1"/>
+          <p:cNvPr id="765192077" name="Slide Image Placeholder 1"/>
           <p:cNvSpPr>
             <a:spLocks noChangeAspect="1" noGrp="1" noRot="1"/>
           </p:cNvSpPr>
@@ -1039,7 +1039,7 @@
       </p:sp>
       <p:sp>
         <p:nvSpPr>
-          <p:cNvPr id="1126598975" name="Notes Placeholder 2"/>
+          <p:cNvPr id="1511718943" name="Notes Placeholder 2"/>
           <p:cNvSpPr>
             <a:spLocks noGrp="1"/>
           </p:cNvSpPr>
@@ -1061,7 +1061,7 @@
       </p:sp>
       <p:sp>
         <p:nvSpPr>
-          <p:cNvPr id="218619152" name="Slide Number Placeholder 3"/>
+          <p:cNvPr id="434219899" name="Slide Number Placeholder 3"/>
           <p:cNvSpPr>
             <a:spLocks noGrp="1"/>
           </p:cNvSpPr>
@@ -1112,7 +1112,7 @@
       </p:grpSpPr>
       <p:sp>
         <p:nvSpPr>
-          <p:cNvPr id="759510649" name="Shape 1059"/>
+          <p:cNvPr id="1279116972" name="Shape 1059"/>
           <p:cNvSpPr>
             <a:spLocks noChangeArrowheads="1" noGrp="1"/>
           </p:cNvSpPr>
@@ -1235,7 +1235,7 @@
       </p:sp>
       <p:sp>
         <p:nvSpPr>
-          <p:cNvPr id="1499148453" name="Shape 1060"/>
+          <p:cNvPr id="1402677124" name="Shape 1060"/>
           <p:cNvSpPr>
             <a:spLocks noChangeArrowheads="1" noGrp="1"/>
           </p:cNvSpPr>
@@ -1326,7 +1326,7 @@
       </p:sp>
       <p:sp>
         <p:nvSpPr>
-          <p:cNvPr id="90348516" name="Shape 1061"/>
+          <p:cNvPr id="1493657807" name="Shape 1061"/>
           <p:cNvSpPr>
             <a:spLocks noChangeArrowheads="1" noGrp="1"/>
           </p:cNvSpPr>
@@ -1412,7 +1412,7 @@
       </p:sp>
       <p:sp>
         <p:nvSpPr>
-          <p:cNvPr id="1033458491" name="Shape 1062"/>
+          <p:cNvPr id="797990582" name="Shape 1062"/>
           <p:cNvSpPr>
             <a:spLocks noChangeArrowheads="1" noGrp="1"/>
           </p:cNvSpPr>
@@ -1490,7 +1490,7 @@
       </p:sp>
       <p:sp>
         <p:nvSpPr>
-          <p:cNvPr id="1712314939" name="Shape 1063"/>
+          <p:cNvPr id="420600234" name="Shape 1063"/>
           <p:cNvSpPr>
             <a:spLocks noChangeArrowheads="1" noGrp="1"/>
           </p:cNvSpPr>
@@ -1568,7 +1568,7 @@
       </p:sp>
       <p:sp>
         <p:nvSpPr>
-          <p:cNvPr id="1769507907" name="Subtitle 2"/>
+          <p:cNvPr id="1072651268" name="Subtitle 2"/>
           <p:cNvSpPr>
             <a:spLocks noGrp="1"/>
           </p:cNvSpPr>
@@ -1691,7 +1691,7 @@
       </p:sp>
       <p:sp>
         <p:nvSpPr>
-          <p:cNvPr id="1648982241" name="Date Placeholder 3"/>
+          <p:cNvPr id="218825809" name="Date Placeholder 3"/>
           <p:cNvSpPr>
             <a:spLocks noGrp="1"/>
           </p:cNvSpPr>
@@ -1717,7 +1717,7 @@
       </p:sp>
       <p:sp>
         <p:nvSpPr>
-          <p:cNvPr id="120346733" name="Footer Placeholder 4"/>
+          <p:cNvPr id="993308477" name="Footer Placeholder 4"/>
           <p:cNvSpPr>
             <a:spLocks noGrp="1"/>
           </p:cNvSpPr>
@@ -1739,7 +1739,7 @@
       </p:sp>
       <p:sp>
         <p:nvSpPr>
-          <p:cNvPr id="674026237" name="Slide Number Placeholder 5"/>
+          <p:cNvPr id="1178701703" name="Slide Number Placeholder 5"/>
           <p:cNvSpPr>
             <a:spLocks noGrp="1"/>
           </p:cNvSpPr>
@@ -1765,7 +1765,7 @@
       </p:sp>
       <p:sp>
         <p:nvSpPr>
-          <p:cNvPr id="1990541284" name="Title 6"/>
+          <p:cNvPr id="317761523" name="Title 6"/>
           <p:cNvSpPr>
             <a:spLocks noGrp="1"/>
           </p:cNvSpPr>
@@ -1825,7 +1825,7 @@
       </p:grpSpPr>
       <p:sp>
         <p:nvSpPr>
-          <p:cNvPr id="1971036045" name="Title 1"/>
+          <p:cNvPr id="910598006" name="Title 1"/>
           <p:cNvSpPr>
             <a:spLocks noGrp="1"/>
           </p:cNvSpPr>
@@ -1851,7 +1851,7 @@
       </p:sp>
       <p:sp>
         <p:nvSpPr>
-          <p:cNvPr id="1181778545" name="Vertical Text Placeholder 2"/>
+          <p:cNvPr id="554991035" name="Vertical Text Placeholder 2"/>
           <p:cNvSpPr>
             <a:spLocks noGrp="1"/>
           </p:cNvSpPr>
@@ -1917,7 +1917,7 @@
       </p:sp>
       <p:sp>
         <p:nvSpPr>
-          <p:cNvPr id="1342280512" name="Date Placeholder 3"/>
+          <p:cNvPr id="379768153" name="Date Placeholder 3"/>
           <p:cNvSpPr>
             <a:spLocks noGrp="1"/>
           </p:cNvSpPr>
@@ -1943,7 +1943,7 @@
       </p:sp>
       <p:sp>
         <p:nvSpPr>
-          <p:cNvPr id="1716307415" name="Footer Placeholder 4"/>
+          <p:cNvPr id="292684364" name="Footer Placeholder 4"/>
           <p:cNvSpPr>
             <a:spLocks noGrp="1"/>
           </p:cNvSpPr>
@@ -1965,7 +1965,7 @@
       </p:sp>
       <p:sp>
         <p:nvSpPr>
-          <p:cNvPr id="1837420746" name="Slide Number Placeholder 5"/>
+          <p:cNvPr id="1737392633" name="Slide Number Placeholder 5"/>
           <p:cNvSpPr>
             <a:spLocks noGrp="1"/>
           </p:cNvSpPr>
@@ -2016,7 +2016,7 @@
       </p:grpSpPr>
       <p:sp>
         <p:nvSpPr>
-          <p:cNvPr id="1020016780" name="Vertical Title 1"/>
+          <p:cNvPr id="1946188364" name="Vertical Title 1"/>
           <p:cNvSpPr>
             <a:spLocks noGrp="1"/>
           </p:cNvSpPr>
@@ -2051,7 +2051,7 @@
       </p:sp>
       <p:sp>
         <p:nvSpPr>
-          <p:cNvPr id="624851759" name="Vertical Text Placeholder 2"/>
+          <p:cNvPr id="1813437505" name="Vertical Text Placeholder 2"/>
           <p:cNvSpPr>
             <a:spLocks noGrp="1"/>
           </p:cNvSpPr>
@@ -2122,7 +2122,7 @@
       </p:sp>
       <p:sp>
         <p:nvSpPr>
-          <p:cNvPr id="773970874" name="Date Placeholder 3"/>
+          <p:cNvPr id="1405041722" name="Date Placeholder 3"/>
           <p:cNvSpPr>
             <a:spLocks noGrp="1"/>
           </p:cNvSpPr>
@@ -2148,7 +2148,7 @@
       </p:sp>
       <p:sp>
         <p:nvSpPr>
-          <p:cNvPr id="1550844171" name="Footer Placeholder 4"/>
+          <p:cNvPr id="1064021367" name="Footer Placeholder 4"/>
           <p:cNvSpPr>
             <a:spLocks noGrp="1"/>
           </p:cNvSpPr>
@@ -2170,7 +2170,7 @@
       </p:sp>
       <p:sp>
         <p:nvSpPr>
-          <p:cNvPr id="1961346807" name="Slide Number Placeholder 5"/>
+          <p:cNvPr id="1664803861" name="Slide Number Placeholder 5"/>
           <p:cNvSpPr>
             <a:spLocks noGrp="1"/>
           </p:cNvSpPr>
@@ -2221,7 +2221,7 @@
       </p:grpSpPr>
       <p:sp>
         <p:nvSpPr>
-          <p:cNvPr id="305390640" name="Title 1"/>
+          <p:cNvPr id="933779028" name="Title 1"/>
           <p:cNvSpPr>
             <a:spLocks noGrp="1"/>
           </p:cNvSpPr>
@@ -2247,7 +2247,7 @@
       </p:sp>
       <p:sp>
         <p:nvSpPr>
-          <p:cNvPr id="1863760731" name="Content Placeholder 2"/>
+          <p:cNvPr id="744048502" name="Content Placeholder 2"/>
           <p:cNvSpPr>
             <a:spLocks noGrp="1"/>
           </p:cNvSpPr>
@@ -2313,7 +2313,7 @@
       </p:sp>
       <p:sp>
         <p:nvSpPr>
-          <p:cNvPr id="962656500" name="Date Placeholder 3"/>
+          <p:cNvPr id="1924122059" name="Date Placeholder 3"/>
           <p:cNvSpPr>
             <a:spLocks noGrp="1"/>
           </p:cNvSpPr>
@@ -2339,7 +2339,7 @@
       </p:sp>
       <p:sp>
         <p:nvSpPr>
-          <p:cNvPr id="45267147" name="Footer Placeholder 4"/>
+          <p:cNvPr id="797039444" name="Footer Placeholder 4"/>
           <p:cNvSpPr>
             <a:spLocks noGrp="1"/>
           </p:cNvSpPr>
@@ -2361,7 +2361,7 @@
       </p:sp>
       <p:sp>
         <p:nvSpPr>
-          <p:cNvPr id="413283285" name="Slide Number Placeholder 5"/>
+          <p:cNvPr id="1734289235" name="Slide Number Placeholder 5"/>
           <p:cNvSpPr>
             <a:spLocks noGrp="1"/>
           </p:cNvSpPr>
@@ -2412,7 +2412,7 @@
       </p:grpSpPr>
       <p:sp>
         <p:nvSpPr>
-          <p:cNvPr id="172875140" name="Title 1"/>
+          <p:cNvPr id="1537498821" name="Title 1"/>
           <p:cNvSpPr>
             <a:spLocks noGrp="1"/>
           </p:cNvSpPr>
@@ -2447,7 +2447,7 @@
       </p:sp>
       <p:sp>
         <p:nvSpPr>
-          <p:cNvPr id="1079583559" name="Text Placeholder 2"/>
+          <p:cNvPr id="332666852" name="Text Placeholder 2"/>
           <p:cNvSpPr>
             <a:spLocks noGrp="1"/>
           </p:cNvSpPr>
@@ -2569,7 +2569,7 @@
       </p:sp>
       <p:sp>
         <p:nvSpPr>
-          <p:cNvPr id="1107535263" name="Date Placeholder 3"/>
+          <p:cNvPr id="1388498686" name="Date Placeholder 3"/>
           <p:cNvSpPr>
             <a:spLocks noGrp="1"/>
           </p:cNvSpPr>
@@ -2595,7 +2595,7 @@
       </p:sp>
       <p:sp>
         <p:nvSpPr>
-          <p:cNvPr id="34517582" name="Footer Placeholder 4"/>
+          <p:cNvPr id="296809155" name="Footer Placeholder 4"/>
           <p:cNvSpPr>
             <a:spLocks noGrp="1"/>
           </p:cNvSpPr>
@@ -2617,7 +2617,7 @@
       </p:sp>
       <p:sp>
         <p:nvSpPr>
-          <p:cNvPr id="198496166" name="Slide Number Placeholder 5"/>
+          <p:cNvPr id="1624548187" name="Slide Number Placeholder 5"/>
           <p:cNvSpPr>
             <a:spLocks noGrp="1"/>
           </p:cNvSpPr>
@@ -2668,7 +2668,7 @@
       </p:grpSpPr>
       <p:sp>
         <p:nvSpPr>
-          <p:cNvPr id="1603560526" name="Title 1"/>
+          <p:cNvPr id="1388906550" name="Title 1"/>
           <p:cNvSpPr>
             <a:spLocks noGrp="1"/>
           </p:cNvSpPr>
@@ -2694,7 +2694,7 @@
       </p:sp>
       <p:sp>
         <p:nvSpPr>
-          <p:cNvPr id="310929868" name="Content Placeholder 2"/>
+          <p:cNvPr id="1003499321" name="Content Placeholder 2"/>
           <p:cNvSpPr>
             <a:spLocks noGrp="1"/>
           </p:cNvSpPr>
@@ -2793,7 +2793,7 @@
       </p:sp>
       <p:sp>
         <p:nvSpPr>
-          <p:cNvPr id="230314355" name="Content Placeholder 3"/>
+          <p:cNvPr id="1538560437" name="Content Placeholder 3"/>
           <p:cNvSpPr>
             <a:spLocks noGrp="1"/>
           </p:cNvSpPr>
@@ -2892,7 +2892,7 @@
       </p:sp>
       <p:sp>
         <p:nvSpPr>
-          <p:cNvPr id="593388606" name="Date Placeholder 4"/>
+          <p:cNvPr id="436540363" name="Date Placeholder 4"/>
           <p:cNvSpPr>
             <a:spLocks noGrp="1"/>
           </p:cNvSpPr>
@@ -2918,7 +2918,7 @@
       </p:sp>
       <p:sp>
         <p:nvSpPr>
-          <p:cNvPr id="1738007481" name="Footer Placeholder 5"/>
+          <p:cNvPr id="307330884" name="Footer Placeholder 5"/>
           <p:cNvSpPr>
             <a:spLocks noGrp="1"/>
           </p:cNvSpPr>
@@ -2940,7 +2940,7 @@
       </p:sp>
       <p:sp>
         <p:nvSpPr>
-          <p:cNvPr id="1653987066" name="Slide Number Placeholder 6"/>
+          <p:cNvPr id="1934080556" name="Slide Number Placeholder 6"/>
           <p:cNvSpPr>
             <a:spLocks noGrp="1"/>
           </p:cNvSpPr>
@@ -2991,7 +2991,7 @@
       </p:grpSpPr>
       <p:sp>
         <p:nvSpPr>
-          <p:cNvPr id="1474327859" name="Title 1"/>
+          <p:cNvPr id="1136224456" name="Title 1"/>
           <p:cNvSpPr>
             <a:spLocks noGrp="1"/>
           </p:cNvSpPr>
@@ -3021,7 +3021,7 @@
       </p:sp>
       <p:sp>
         <p:nvSpPr>
-          <p:cNvPr id="500349629" name="Text Placeholder 2"/>
+          <p:cNvPr id="1601162278" name="Text Placeholder 2"/>
           <p:cNvSpPr>
             <a:spLocks noGrp="1"/>
           </p:cNvSpPr>
@@ -3089,7 +3089,7 @@
       </p:sp>
       <p:sp>
         <p:nvSpPr>
-          <p:cNvPr id="1910818692" name="Content Placeholder 3"/>
+          <p:cNvPr id="2068490022" name="Content Placeholder 3"/>
           <p:cNvSpPr>
             <a:spLocks noGrp="1"/>
           </p:cNvSpPr>
@@ -3188,7 +3188,7 @@
       </p:sp>
       <p:sp>
         <p:nvSpPr>
-          <p:cNvPr id="1664108475" name="Text Placeholder 4"/>
+          <p:cNvPr id="2089336012" name="Text Placeholder 4"/>
           <p:cNvSpPr>
             <a:spLocks noGrp="1"/>
           </p:cNvSpPr>
@@ -3256,7 +3256,7 @@
       </p:sp>
       <p:sp>
         <p:nvSpPr>
-          <p:cNvPr id="1105455651" name="Content Placeholder 5"/>
+          <p:cNvPr id="113945666" name="Content Placeholder 5"/>
           <p:cNvSpPr>
             <a:spLocks noGrp="1"/>
           </p:cNvSpPr>
@@ -3355,7 +3355,7 @@
       </p:sp>
       <p:sp>
         <p:nvSpPr>
-          <p:cNvPr id="1234822573" name="Date Placeholder 6"/>
+          <p:cNvPr id="1104023198" name="Date Placeholder 6"/>
           <p:cNvSpPr>
             <a:spLocks noGrp="1"/>
           </p:cNvSpPr>
@@ -3381,7 +3381,7 @@
       </p:sp>
       <p:sp>
         <p:nvSpPr>
-          <p:cNvPr id="1615028625" name="Footer Placeholder 7"/>
+          <p:cNvPr id="5274149" name="Footer Placeholder 7"/>
           <p:cNvSpPr>
             <a:spLocks noGrp="1"/>
           </p:cNvSpPr>
@@ -3403,7 +3403,7 @@
       </p:sp>
       <p:sp>
         <p:nvSpPr>
-          <p:cNvPr id="416797400" name="Slide Number Placeholder 8"/>
+          <p:cNvPr id="105711742" name="Slide Number Placeholder 8"/>
           <p:cNvSpPr>
             <a:spLocks noGrp="1"/>
           </p:cNvSpPr>
@@ -3454,7 +3454,7 @@
       </p:grpSpPr>
       <p:sp>
         <p:nvSpPr>
-          <p:cNvPr id="1709345242" name="Title 1"/>
+          <p:cNvPr id="1754332822" name="Title 1"/>
           <p:cNvSpPr>
             <a:spLocks noGrp="1"/>
           </p:cNvSpPr>
@@ -3480,7 +3480,7 @@
       </p:sp>
       <p:sp>
         <p:nvSpPr>
-          <p:cNvPr id="1580993518" name="Date Placeholder 2"/>
+          <p:cNvPr id="1755267991" name="Date Placeholder 2"/>
           <p:cNvSpPr>
             <a:spLocks noGrp="1"/>
           </p:cNvSpPr>
@@ -3506,7 +3506,7 @@
       </p:sp>
       <p:sp>
         <p:nvSpPr>
-          <p:cNvPr id="753761172" name="Footer Placeholder 3"/>
+          <p:cNvPr id="758301836" name="Footer Placeholder 3"/>
           <p:cNvSpPr>
             <a:spLocks noGrp="1"/>
           </p:cNvSpPr>
@@ -3528,7 +3528,7 @@
       </p:sp>
       <p:sp>
         <p:nvSpPr>
-          <p:cNvPr id="1760195208" name="Slide Number Placeholder 4"/>
+          <p:cNvPr id="1767770692" name="Slide Number Placeholder 4"/>
           <p:cNvSpPr>
             <a:spLocks noGrp="1"/>
           </p:cNvSpPr>
@@ -3579,7 +3579,7 @@
       </p:grpSpPr>
       <p:sp>
         <p:nvSpPr>
-          <p:cNvPr id="622495079" name="Date Placeholder 1"/>
+          <p:cNvPr id="656220776" name="Date Placeholder 1"/>
           <p:cNvSpPr>
             <a:spLocks noGrp="1"/>
           </p:cNvSpPr>
@@ -3605,7 +3605,7 @@
       </p:sp>
       <p:sp>
         <p:nvSpPr>
-          <p:cNvPr id="2033747925" name="Footer Placeholder 2"/>
+          <p:cNvPr id="843718844" name="Footer Placeholder 2"/>
           <p:cNvSpPr>
             <a:spLocks noGrp="1"/>
           </p:cNvSpPr>
@@ -3627,7 +3627,7 @@
       </p:sp>
       <p:sp>
         <p:nvSpPr>
-          <p:cNvPr id="521899360" name="Slide Number Placeholder 3"/>
+          <p:cNvPr id="1052992963" name="Slide Number Placeholder 3"/>
           <p:cNvSpPr>
             <a:spLocks noGrp="1"/>
           </p:cNvSpPr>
@@ -3678,7 +3678,7 @@
       </p:grpSpPr>
       <p:sp>
         <p:nvSpPr>
-          <p:cNvPr id="21233582" name="Title 1"/>
+          <p:cNvPr id="1836068994" name="Title 1"/>
           <p:cNvSpPr>
             <a:spLocks noGrp="1"/>
           </p:cNvSpPr>
@@ -3713,7 +3713,7 @@
       </p:sp>
       <p:sp>
         <p:nvSpPr>
-          <p:cNvPr id="1465728476" name="Content Placeholder 2"/>
+          <p:cNvPr id="1542182367" name="Content Placeholder 2"/>
           <p:cNvSpPr>
             <a:spLocks noGrp="1"/>
           </p:cNvSpPr>
@@ -3812,7 +3812,7 @@
       </p:sp>
       <p:sp>
         <p:nvSpPr>
-          <p:cNvPr id="1186243950" name="Text Placeholder 3"/>
+          <p:cNvPr id="1294362479" name="Text Placeholder 3"/>
           <p:cNvSpPr>
             <a:spLocks noGrp="1"/>
           </p:cNvSpPr>
@@ -3880,7 +3880,7 @@
       </p:sp>
       <p:sp>
         <p:nvSpPr>
-          <p:cNvPr id="936451826" name="Date Placeholder 4"/>
+          <p:cNvPr id="1721664716" name="Date Placeholder 4"/>
           <p:cNvSpPr>
             <a:spLocks noGrp="1"/>
           </p:cNvSpPr>
@@ -3906,7 +3906,7 @@
       </p:sp>
       <p:sp>
         <p:nvSpPr>
-          <p:cNvPr id="1066830190" name="Footer Placeholder 5"/>
+          <p:cNvPr id="1035131322" name="Footer Placeholder 5"/>
           <p:cNvSpPr>
             <a:spLocks noGrp="1"/>
           </p:cNvSpPr>
@@ -3928,7 +3928,7 @@
       </p:sp>
       <p:sp>
         <p:nvSpPr>
-          <p:cNvPr id="163108283" name="Slide Number Placeholder 6"/>
+          <p:cNvPr id="475088388" name="Slide Number Placeholder 6"/>
           <p:cNvSpPr>
             <a:spLocks noGrp="1"/>
           </p:cNvSpPr>
@@ -3979,7 +3979,7 @@
       </p:grpSpPr>
       <p:sp>
         <p:nvSpPr>
-          <p:cNvPr id="1805375120" name="Title 1"/>
+          <p:cNvPr id="1393601599" name="Title 1"/>
           <p:cNvSpPr>
             <a:spLocks noGrp="1"/>
           </p:cNvSpPr>
@@ -4014,7 +4014,7 @@
       </p:sp>
       <p:sp>
         <p:nvSpPr>
-          <p:cNvPr id="437331093" name="Picture Placeholder 2"/>
+          <p:cNvPr id="1057477247" name="Picture Placeholder 2"/>
           <p:cNvSpPr>
             <a:spLocks noGrp="1"/>
           </p:cNvSpPr>
@@ -4078,7 +4078,7 @@
       </p:sp>
       <p:sp>
         <p:nvSpPr>
-          <p:cNvPr id="597662439" name="Text Placeholder 3"/>
+          <p:cNvPr id="1065772238" name="Text Placeholder 3"/>
           <p:cNvSpPr>
             <a:spLocks noGrp="1"/>
           </p:cNvSpPr>
@@ -4146,7 +4146,7 @@
       </p:sp>
       <p:sp>
         <p:nvSpPr>
-          <p:cNvPr id="1713697431" name="Date Placeholder 4"/>
+          <p:cNvPr id="558238400" name="Date Placeholder 4"/>
           <p:cNvSpPr>
             <a:spLocks noGrp="1"/>
           </p:cNvSpPr>
@@ -4172,7 +4172,7 @@
       </p:sp>
       <p:sp>
         <p:nvSpPr>
-          <p:cNvPr id="87580160" name="Footer Placeholder 5"/>
+          <p:cNvPr id="418609496" name="Footer Placeholder 5"/>
           <p:cNvSpPr>
             <a:spLocks noGrp="1"/>
           </p:cNvSpPr>
@@ -4194,7 +4194,7 @@
       </p:sp>
       <p:sp>
         <p:nvSpPr>
-          <p:cNvPr id="876200382" name="Slide Number Placeholder 6"/>
+          <p:cNvPr id="632757267" name="Slide Number Placeholder 6"/>
           <p:cNvSpPr>
             <a:spLocks noGrp="1"/>
           </p:cNvSpPr>
@@ -4250,7 +4250,7 @@
       </p:grpSpPr>
       <p:sp>
         <p:nvSpPr>
-          <p:cNvPr id="537139414" name="Shape 1059"/>
+          <p:cNvPr id="1199735584" name="Shape 1059"/>
           <p:cNvSpPr>
             <a:spLocks noChangeArrowheads="1" noGrp="1"/>
           </p:cNvSpPr>
@@ -4328,7 +4328,7 @@
       </p:sp>
       <p:sp>
         <p:nvSpPr>
-          <p:cNvPr id="1181219286" name="Shape 1060"/>
+          <p:cNvPr id="1442229180" name="Shape 1060"/>
           <p:cNvSpPr>
             <a:spLocks noChangeArrowheads="1" noGrp="1"/>
           </p:cNvSpPr>
@@ -4409,7 +4409,7 @@
       </p:sp>
       <p:sp>
         <p:nvSpPr>
-          <p:cNvPr id="839222690" name="Shape 1061"/>
+          <p:cNvPr id="1242283541" name="Shape 1061"/>
           <p:cNvSpPr>
             <a:spLocks noChangeArrowheads="1" noGrp="1"/>
           </p:cNvSpPr>
@@ -4527,7 +4527,7 @@
       </p:sp>
       <p:sp>
         <p:nvSpPr>
-          <p:cNvPr id="791242161" name="Title 1"/>
+          <p:cNvPr id="1440567704" name="Title 1"/>
           <p:cNvSpPr>
             <a:spLocks noGrp="1"/>
           </p:cNvSpPr>
@@ -4563,7 +4563,7 @@
       </p:sp>
       <p:sp>
         <p:nvSpPr>
-          <p:cNvPr id="708936342" name="Text Placeholder 2"/>
+          <p:cNvPr id="2021520730" name="Text Placeholder 2"/>
           <p:cNvSpPr>
             <a:spLocks noGrp="1"/>
           </p:cNvSpPr>
@@ -4639,7 +4639,7 @@
       </p:sp>
       <p:sp>
         <p:nvSpPr>
-          <p:cNvPr id="107735909" name="Date Placeholder 3"/>
+          <p:cNvPr id="369197367" name="Date Placeholder 3"/>
           <p:cNvSpPr>
             <a:spLocks noGrp="1"/>
           </p:cNvSpPr>
@@ -4683,7 +4683,7 @@
       </p:sp>
       <p:sp>
         <p:nvSpPr>
-          <p:cNvPr id="212372439" name="Footer Placeholder 4"/>
+          <p:cNvPr id="1589603721" name="Footer Placeholder 4"/>
           <p:cNvSpPr>
             <a:spLocks noGrp="1"/>
           </p:cNvSpPr>
@@ -4723,7 +4723,7 @@
       </p:sp>
       <p:sp>
         <p:nvSpPr>
-          <p:cNvPr id="2070104045" name="Slide Number Placeholder 5"/>
+          <p:cNvPr id="1075027648" name="Slide Number Placeholder 5"/>
           <p:cNvSpPr>
             <a:spLocks noGrp="1"/>
           </p:cNvSpPr>
@@ -5071,7 +5071,7 @@
       </p:grpSpPr>
       <p:sp>
         <p:nvSpPr>
-          <p:cNvPr id="864066989" name="Title 1"/>
+          <p:cNvPr id="2065259464" name="Title 1"/>
           <p:cNvSpPr>
             <a:spLocks noGrp="1"/>
           </p:cNvSpPr>
@@ -5097,7 +5097,7 @@
       </p:sp>
       <p:sp>
         <p:nvSpPr>
-          <p:cNvPr id="1907240843" name="Subtitle 2"/>
+          <p:cNvPr id="1146225663" name="Subtitle 2"/>
           <p:cNvSpPr>
             <a:spLocks noGrp="1"/>
           </p:cNvSpPr>
@@ -5152,7 +5152,7 @@
       </p:grpSpPr>
       <p:sp>
         <p:nvSpPr>
-          <p:cNvPr id="322261228" name="Title 1"/>
+          <p:cNvPr id="1162710047" name="Title 1"/>
           <p:cNvSpPr>
             <a:spLocks noGrp="1"/>
           </p:cNvSpPr>
@@ -5178,7 +5178,7 @@
       </p:sp>
       <p:sp>
         <p:nvSpPr>
-          <p:cNvPr id="872800922" name="Content Placeholder 2"/>
+          <p:cNvPr id="1306529329" name="Content Placeholder 2"/>
           <p:cNvSpPr>
             <a:spLocks noGrp="1"/>
           </p:cNvSpPr>
@@ -5295,7 +5295,7 @@
       </p:grpSpPr>
       <p:sp>
         <p:nvSpPr>
-          <p:cNvPr id="160229788" name="Title 1"/>
+          <p:cNvPr id="635980787" name="Title 1"/>
           <p:cNvSpPr>
             <a:spLocks noGrp="1"/>
           </p:cNvSpPr>
@@ -5321,7 +5321,7 @@
       </p:sp>
       <p:sp>
         <p:nvSpPr>
-          <p:cNvPr id="642236166" name="Content Placeholder 2"/>
+          <p:cNvPr id="303634806" name="Content Placeholder 2"/>
           <p:cNvSpPr>
             <a:spLocks noGrp="1"/>
           </p:cNvSpPr>
@@ -5469,7 +5469,7 @@
         <p:spPr bwMode="auto">
           <a:xfrm rot="0" flipH="0" flipV="0">
             <a:off x="770394" y="1921710"/>
-            <a:ext cx="2272631" cy="1236578"/>
+            <a:ext cx="1702580" cy="759839"/>
           </a:xfrm>
           <a:prstGeom prst="rect">
             <a:avLst/>
@@ -5498,10 +5498,10 @@
               <a:defRPr/>
             </a:pPr>
             <a:r>
-              <a:rPr lang="ru-RU"/>
+              <a:rPr lang="ru-RU" sz="1600"/>
               <a:t>Программа 1</a:t>
             </a:r>
-            <a:endParaRPr/>
+            <a:endParaRPr sz="1600"/>
           </a:p>
         </p:txBody>
       </p:sp>
@@ -5513,8 +5513,8 @@
         </p:nvSpPr>
         <p:spPr bwMode="auto">
           <a:xfrm rot="0" flipH="0" flipV="0">
-            <a:off x="5802267" y="1921710"/>
-            <a:ext cx="2272630" cy="1236577"/>
+            <a:off x="3621127" y="3285603"/>
+            <a:ext cx="1702580" cy="759839"/>
           </a:xfrm>
           <a:prstGeom prst="rect">
             <a:avLst/>
@@ -5543,10 +5543,10 @@
               <a:defRPr/>
             </a:pPr>
             <a:r>
-              <a:rPr lang="ru-RU"/>
+              <a:rPr lang="ru-RU" sz="1600"/>
               <a:t>Программа 2</a:t>
             </a:r>
-            <a:endParaRPr/>
+            <a:endParaRPr sz="1600"/>
           </a:p>
         </p:txBody>
       </p:sp>
@@ -5558,8 +5558,8 @@
         </p:nvSpPr>
         <p:spPr bwMode="auto">
           <a:xfrm rot="0" flipH="0" flipV="0">
-            <a:off x="636710" y="5031873"/>
-            <a:ext cx="2406315" cy="785394"/>
+            <a:off x="720318" y="5031873"/>
+            <a:ext cx="1802732" cy="482600"/>
           </a:xfrm>
           <a:prstGeom prst="rect">
             <a:avLst/>
@@ -5588,14 +5588,14 @@
               <a:defRPr/>
             </a:pPr>
             <a:r>
-              <a:rPr lang="ru-RU"/>
+              <a:rPr lang="ru-RU" sz="1200"/>
               <a:t>Зависимость 1 </a:t>
             </a:r>
             <a:r>
-              <a:rPr lang="en-US"/>
+              <a:rPr lang="en-US" sz="1200"/>
               <a:t>v1.0</a:t>
             </a:r>
-            <a:endParaRPr/>
+            <a:endParaRPr sz="1200"/>
           </a:p>
         </p:txBody>
       </p:sp>
@@ -5607,8 +5607,8 @@
         </p:nvSpPr>
         <p:spPr bwMode="auto">
           <a:xfrm rot="0" flipH="0" flipV="0">
-            <a:off x="3226842" y="5031873"/>
-            <a:ext cx="2406314" cy="785394"/>
+            <a:off x="2719761" y="5031873"/>
+            <a:ext cx="1802732" cy="482600"/>
           </a:xfrm>
           <a:prstGeom prst="rect">
             <a:avLst/>
@@ -5637,10 +5637,10 @@
               <a:defRPr/>
             </a:pPr>
             <a:r>
-              <a:rPr lang="ru-RU"/>
+              <a:rPr lang="ru-RU" sz="1200"/>
               <a:t>Общая Зависимость</a:t>
             </a:r>
-            <a:endParaRPr/>
+            <a:endParaRPr sz="1200"/>
           </a:p>
         </p:txBody>
       </p:sp>
@@ -5652,8 +5652,8 @@
         </p:nvSpPr>
         <p:spPr bwMode="auto">
           <a:xfrm rot="0" flipH="0" flipV="0">
-            <a:off x="5802267" y="5031873"/>
-            <a:ext cx="2406314" cy="785394"/>
+            <a:off x="5752191" y="5035899"/>
+            <a:ext cx="1802732" cy="482600"/>
           </a:xfrm>
           <a:prstGeom prst="rect">
             <a:avLst/>
@@ -5682,22 +5682,22 @@
               <a:defRPr/>
             </a:pPr>
             <a:r>
-              <a:rPr lang="ru-RU"/>
+              <a:rPr lang="ru-RU" sz="1200"/>
               <a:t>Зависимость 1 </a:t>
             </a:r>
             <a:r>
-              <a:rPr lang="en-US"/>
+              <a:rPr lang="en-US" sz="1200"/>
               <a:t>v</a:t>
             </a:r>
             <a:r>
-              <a:rPr lang="ru-RU"/>
+              <a:rPr lang="ru-RU" sz="1200"/>
               <a:t>2</a:t>
             </a:r>
             <a:r>
-              <a:rPr lang="en-US"/>
+              <a:rPr lang="en-US" sz="1200"/>
               <a:t>.0</a:t>
             </a:r>
-            <a:endParaRPr/>
+            <a:endParaRPr sz="1200"/>
           </a:p>
         </p:txBody>
       </p:sp>
@@ -5712,8 +5712,8 @@
         </p:nvCxnSpPr>
         <p:spPr bwMode="auto">
           <a:xfrm rot="5399978" flipH="0" flipV="0">
-            <a:off x="936497" y="4061660"/>
-            <a:ext cx="1873583" cy="66841"/>
+            <a:off x="446523" y="3856711"/>
+            <a:ext cx="2350322" cy="0"/>
           </a:xfrm>
           <a:prstGeom prst="line">
             <a:avLst/>
@@ -5750,8 +5750,8 @@
         </p:nvCxnSpPr>
         <p:spPr bwMode="auto">
           <a:xfrm rot="5399978" flipH="0" flipV="1">
-            <a:off x="2231562" y="2833436"/>
-            <a:ext cx="1873583" cy="2523288"/>
+            <a:off x="1446244" y="2856990"/>
+            <a:ext cx="2350322" cy="1999442"/>
           </a:xfrm>
           <a:prstGeom prst="line">
             <a:avLst/>
@@ -5788,8 +5788,8 @@
         </p:nvCxnSpPr>
         <p:spPr bwMode="auto">
           <a:xfrm rot="5399978" flipH="0" flipV="0">
-            <a:off x="4747498" y="2840788"/>
-            <a:ext cx="1873584" cy="2508583"/>
+            <a:off x="3553557" y="4113012"/>
+            <a:ext cx="986430" cy="851290"/>
           </a:xfrm>
           <a:prstGeom prst="line">
             <a:avLst/>
@@ -5826,8 +5826,8 @@
         </p:nvCxnSpPr>
         <p:spPr bwMode="auto">
           <a:xfrm rot="5399978" flipH="0" flipV="1">
-            <a:off x="6035211" y="4061659"/>
-            <a:ext cx="1873584" cy="66841"/>
+            <a:off x="5067759" y="3450101"/>
+            <a:ext cx="990456" cy="2181139"/>
           </a:xfrm>
           <a:prstGeom prst="line">
             <a:avLst/>
@@ -5892,6 +5892,180 @@
           </a:p>
         </p:txBody>
       </p:sp>
+      <p:sp>
+        <p:nvSpPr>
+          <p:cNvPr id="1028047312" name=""/>
+          <p:cNvSpPr/>
+          <p:nvPr/>
+        </p:nvSpPr>
+        <p:spPr bwMode="auto">
+          <a:xfrm rot="0" flipH="0" flipV="0">
+            <a:off x="5802267" y="1700107"/>
+            <a:ext cx="1702579" cy="759838"/>
+          </a:xfrm>
+          <a:prstGeom prst="rect">
+            <a:avLst/>
+          </a:prstGeom>
+        </p:spPr>
+        <p:style>
+          <a:lnRef idx="2">
+            <a:schemeClr val="accent1">
+              <a:shade val="50000"/>
+            </a:schemeClr>
+          </a:lnRef>
+          <a:fillRef idx="1">
+            <a:schemeClr val="accent1"/>
+          </a:fillRef>
+          <a:effectRef idx="0">
+            <a:schemeClr val="accent1"/>
+          </a:effectRef>
+          <a:fontRef idx="minor">
+            <a:schemeClr val="lt1"/>
+          </a:fontRef>
+        </p:style>
+        <p:txBody>
+          <a:bodyPr anchor="ctr"/>
+          <a:p>
+            <a:pPr algn="ctr">
+              <a:defRPr/>
+            </a:pPr>
+            <a:r>
+              <a:rPr lang="ru-RU" sz="1600"/>
+              <a:t>Программа </a:t>
+            </a:r>
+            <a:r>
+              <a:rPr lang="en-US" sz="1600"/>
+              <a:t>3</a:t>
+            </a:r>
+            <a:endParaRPr sz="1600"/>
+          </a:p>
+        </p:txBody>
+      </p:sp>
+      <p:cxnSp>
+        <p:nvCxnSpPr>
+          <p:cNvPr id="2133509873" name=""/>
+          <p:cNvCxnSpPr>
+            <a:stCxn id="1028047312" idx="2"/>
+            <a:endCxn id="1429978451" idx="3"/>
+          </p:cNvCxnSpPr>
+          <p:nvPr/>
+        </p:nvCxnSpPr>
+        <p:spPr bwMode="auto">
+          <a:xfrm rot="5399978" flipH="0" flipV="0">
+            <a:off x="5385845" y="2397810"/>
+            <a:ext cx="1205575" cy="1329849"/>
+          </a:xfrm>
+          <a:prstGeom prst="line">
+            <a:avLst/>
+          </a:prstGeom>
+          <a:ln>
+            <a:tailEnd type="arrow" len="med"/>
+          </a:ln>
+        </p:spPr>
+        <p:style>
+          <a:lnRef idx="1">
+            <a:schemeClr val="accent1">
+              <a:shade val="50000"/>
+            </a:schemeClr>
+          </a:lnRef>
+          <a:fillRef idx="0">
+            <a:schemeClr val="accent1"/>
+          </a:fillRef>
+          <a:effectRef idx="0">
+            <a:schemeClr val="accent1"/>
+          </a:effectRef>
+          <a:fontRef idx="minor">
+            <a:schemeClr val="tx1"/>
+          </a:fontRef>
+        </p:style>
+      </p:cxnSp>
+      <p:sp>
+        <p:nvSpPr>
+          <p:cNvPr id="1418139402" name=""/>
+          <p:cNvSpPr/>
+          <p:nvPr/>
+        </p:nvSpPr>
+        <p:spPr bwMode="auto">
+          <a:xfrm rot="0" flipH="0" flipV="0">
+            <a:off x="5752191" y="3856711"/>
+            <a:ext cx="1802731" cy="482599"/>
+          </a:xfrm>
+          <a:prstGeom prst="rect">
+            <a:avLst/>
+          </a:prstGeom>
+        </p:spPr>
+        <p:style>
+          <a:lnRef idx="2">
+            <a:schemeClr val="accent1">
+              <a:shade val="50000"/>
+            </a:schemeClr>
+          </a:lnRef>
+          <a:fillRef idx="1">
+            <a:schemeClr val="accent1"/>
+          </a:fillRef>
+          <a:effectRef idx="0">
+            <a:schemeClr val="accent1"/>
+          </a:effectRef>
+          <a:fontRef idx="minor">
+            <a:schemeClr val="lt1"/>
+          </a:fontRef>
+        </p:style>
+        <p:txBody>
+          <a:bodyPr anchor="ctr"/>
+          <a:p>
+            <a:pPr algn="ctr">
+              <a:defRPr/>
+            </a:pPr>
+            <a:r>
+              <a:rPr lang="ru-RU" sz="1200"/>
+              <a:t>Зависимость </a:t>
+            </a:r>
+            <a:r>
+              <a:rPr sz="1200"/>
+              <a:t>2</a:t>
+            </a:r>
+            <a:endParaRPr sz="1200"/>
+          </a:p>
+        </p:txBody>
+      </p:sp>
+      <p:cxnSp>
+        <p:nvCxnSpPr>
+          <p:cNvPr id="2086167579" name=""/>
+          <p:cNvCxnSpPr>
+            <a:stCxn id="1028047312" idx="2"/>
+            <a:endCxn id="1418139402" idx="0"/>
+          </p:cNvCxnSpPr>
+          <p:nvPr/>
+        </p:nvCxnSpPr>
+        <p:spPr bwMode="auto">
+          <a:xfrm rot="5399978" flipH="0" flipV="0">
+            <a:off x="5955175" y="3158329"/>
+            <a:ext cx="1396764" cy="0"/>
+          </a:xfrm>
+          <a:prstGeom prst="line">
+            <a:avLst/>
+          </a:prstGeom>
+          <a:ln>
+            <a:tailEnd type="arrow" len="med"/>
+          </a:ln>
+        </p:spPr>
+        <p:style>
+          <a:lnRef idx="1">
+            <a:schemeClr val="accent1">
+              <a:shade val="50000"/>
+            </a:schemeClr>
+          </a:lnRef>
+          <a:fillRef idx="0">
+            <a:schemeClr val="accent1"/>
+          </a:fillRef>
+          <a:effectRef idx="0">
+            <a:schemeClr val="accent1"/>
+          </a:effectRef>
+          <a:fontRef idx="minor">
+            <a:schemeClr val="tx1"/>
+          </a:fontRef>
+        </p:style>
+      </p:cxnSp>
     </p:spTree>
   </p:cSld>
   <p:clrMapOvr>
@@ -6295,7 +6469,7 @@
       </p:grpSpPr>
       <p:graphicFrame>
         <p:nvGraphicFramePr>
-          <p:cNvPr id="1665604834" name=""/>
+          <p:cNvPr id="358329443" name=""/>
           <p:cNvGraphicFramePr>
             <a:graphicFrameLocks xmlns:a="http://schemas.openxmlformats.org/drawingml/2006/main" noChangeAspect="1"/>
           </p:cNvGraphicFramePr>
@@ -6311,7 +6485,7 @@
               <p:embed/>
               <p:pic>
                 <p:nvPicPr>
-                  <p:cNvPr id="1665604834" name=""/>
+                  <p:cNvPr id="358329443" name=""/>
                   <p:cNvPicPr/>
                   <p:nvPr/>
                 </p:nvPicPr>
@@ -6335,7 +6509,7 @@
       </p:graphicFrame>
       <p:sp>
         <p:nvSpPr>
-          <p:cNvPr id="1389840908" name=""/>
+          <p:cNvPr id="2066964927" name=""/>
           <p:cNvSpPr txBox="1"/>
           <p:nvPr/>
         </p:nvSpPr>

--- a/NewOS.pptx
+++ b/NewOS.pptx
@@ -140,7 +140,7 @@
       </p:grpSpPr>
       <p:sp>
         <p:nvSpPr>
-          <p:cNvPr id="2108598266" name="Header Placeholder 1"/>
+          <p:cNvPr id="361059366" name="Header Placeholder 1"/>
           <p:cNvSpPr>
             <a:spLocks noGrp="1"/>
           </p:cNvSpPr>
@@ -174,7 +174,7 @@
       </p:sp>
       <p:sp>
         <p:nvSpPr>
-          <p:cNvPr id="230254865" name="Date Placeholder 2"/>
+          <p:cNvPr id="1309639758" name="Date Placeholder 2"/>
           <p:cNvSpPr>
             <a:spLocks noGrp="1"/>
           </p:cNvSpPr>
@@ -212,7 +212,7 @@
       </p:sp>
       <p:sp>
         <p:nvSpPr>
-          <p:cNvPr id="178238473" name="Slide Image Placeholder 3"/>
+          <p:cNvPr id="2070735860" name="Slide Image Placeholder 3"/>
           <p:cNvSpPr>
             <a:spLocks noChangeAspect="1" noGrp="1" noRot="1"/>
           </p:cNvSpPr>
@@ -248,7 +248,7 @@
       </p:sp>
       <p:sp>
         <p:nvSpPr>
-          <p:cNvPr id="1404196369" name="Notes Placeholder 4"/>
+          <p:cNvPr id="939836685" name="Notes Placeholder 4"/>
           <p:cNvSpPr>
             <a:spLocks noGrp="1"/>
           </p:cNvSpPr>
@@ -322,7 +322,7 @@
       </p:sp>
       <p:sp>
         <p:nvSpPr>
-          <p:cNvPr id="22363243" name="Footer Placeholder 5"/>
+          <p:cNvPr id="984967617" name="Footer Placeholder 5"/>
           <p:cNvSpPr>
             <a:spLocks noGrp="1"/>
           </p:cNvSpPr>
@@ -356,7 +356,7 @@
       </p:sp>
       <p:sp>
         <p:nvSpPr>
-          <p:cNvPr id="295404267" name="Slide Number Placeholder 6"/>
+          <p:cNvPr id="291024504" name="Slide Number Placeholder 6"/>
           <p:cNvSpPr>
             <a:spLocks noGrp="1"/>
           </p:cNvSpPr>
@@ -509,7 +509,7 @@
       </p:grpSpPr>
       <p:sp>
         <p:nvSpPr>
-          <p:cNvPr id="1880641827" name="Slide Image Placeholder 1"/>
+          <p:cNvPr id="1585178268" name="Slide Image Placeholder 1"/>
           <p:cNvSpPr>
             <a:spLocks noChangeAspect="1" noGrp="1" noRot="1"/>
           </p:cNvSpPr>
@@ -526,7 +526,7 @@
       </p:sp>
       <p:sp>
         <p:nvSpPr>
-          <p:cNvPr id="1057471557" name="Notes Placeholder 2"/>
+          <p:cNvPr id="1139204397" name="Notes Placeholder 2"/>
           <p:cNvSpPr>
             <a:spLocks noGrp="1"/>
           </p:cNvSpPr>
@@ -551,7 +551,7 @@
       </p:sp>
       <p:sp>
         <p:nvSpPr>
-          <p:cNvPr id="626001236" name="Slide Number Placeholder 3"/>
+          <p:cNvPr id="208119629" name="Slide Number Placeholder 3"/>
           <p:cNvSpPr>
             <a:spLocks noGrp="1"/>
           </p:cNvSpPr>
@@ -602,7 +602,7 @@
       </p:grpSpPr>
       <p:sp>
         <p:nvSpPr>
-          <p:cNvPr id="951505556" name="Slide Image Placeholder 1"/>
+          <p:cNvPr id="308776732" name="Slide Image Placeholder 1"/>
           <p:cNvSpPr>
             <a:spLocks noChangeAspect="1" noGrp="1" noRot="1"/>
           </p:cNvSpPr>
@@ -614,7 +614,7 @@
       </p:sp>
       <p:sp>
         <p:nvSpPr>
-          <p:cNvPr id="271360751" name="Notes Placeholder 2"/>
+          <p:cNvPr id="784306126" name="Notes Placeholder 2"/>
           <p:cNvSpPr>
             <a:spLocks noGrp="1"/>
           </p:cNvSpPr>
@@ -636,7 +636,7 @@
       </p:sp>
       <p:sp>
         <p:nvSpPr>
-          <p:cNvPr id="1071920953" name="Slide Number Placeholder 3"/>
+          <p:cNvPr id="1730465891" name="Slide Number Placeholder 3"/>
           <p:cNvSpPr>
             <a:spLocks noGrp="1"/>
           </p:cNvSpPr>
@@ -687,7 +687,7 @@
       </p:grpSpPr>
       <p:sp>
         <p:nvSpPr>
-          <p:cNvPr id="1543454238" name="Slide Image Placeholder 1"/>
+          <p:cNvPr id="295326994" name="Slide Image Placeholder 1"/>
           <p:cNvSpPr>
             <a:spLocks noChangeAspect="1" noGrp="1" noRot="1"/>
           </p:cNvSpPr>
@@ -699,7 +699,7 @@
       </p:sp>
       <p:sp>
         <p:nvSpPr>
-          <p:cNvPr id="1755294033" name="Notes Placeholder 2"/>
+          <p:cNvPr id="1883864001" name="Notes Placeholder 2"/>
           <p:cNvSpPr>
             <a:spLocks noGrp="1"/>
           </p:cNvSpPr>
@@ -721,7 +721,7 @@
       </p:sp>
       <p:sp>
         <p:nvSpPr>
-          <p:cNvPr id="1445260690" name="Slide Number Placeholder 3"/>
+          <p:cNvPr id="1118767965" name="Slide Number Placeholder 3"/>
           <p:cNvSpPr>
             <a:spLocks noGrp="1"/>
           </p:cNvSpPr>
@@ -1027,7 +1027,7 @@
       </p:grpSpPr>
       <p:sp>
         <p:nvSpPr>
-          <p:cNvPr id="765192077" name="Slide Image Placeholder 1"/>
+          <p:cNvPr id="185385485" name="Slide Image Placeholder 1"/>
           <p:cNvSpPr>
             <a:spLocks noChangeAspect="1" noGrp="1" noRot="1"/>
           </p:cNvSpPr>
@@ -1039,7 +1039,7 @@
       </p:sp>
       <p:sp>
         <p:nvSpPr>
-          <p:cNvPr id="1511718943" name="Notes Placeholder 2"/>
+          <p:cNvPr id="1140346626" name="Notes Placeholder 2"/>
           <p:cNvSpPr>
             <a:spLocks noGrp="1"/>
           </p:cNvSpPr>
@@ -1061,7 +1061,7 @@
       </p:sp>
       <p:sp>
         <p:nvSpPr>
-          <p:cNvPr id="434219899" name="Slide Number Placeholder 3"/>
+          <p:cNvPr id="894835433" name="Slide Number Placeholder 3"/>
           <p:cNvSpPr>
             <a:spLocks noGrp="1"/>
           </p:cNvSpPr>
@@ -1112,7 +1112,7 @@
       </p:grpSpPr>
       <p:sp>
         <p:nvSpPr>
-          <p:cNvPr id="1279116972" name="Shape 1059"/>
+          <p:cNvPr id="1869460593" name="Shape 1059"/>
           <p:cNvSpPr>
             <a:spLocks noChangeArrowheads="1" noGrp="1"/>
           </p:cNvSpPr>
@@ -1235,7 +1235,7 @@
       </p:sp>
       <p:sp>
         <p:nvSpPr>
-          <p:cNvPr id="1402677124" name="Shape 1060"/>
+          <p:cNvPr id="786129539" name="Shape 1060"/>
           <p:cNvSpPr>
             <a:spLocks noChangeArrowheads="1" noGrp="1"/>
           </p:cNvSpPr>
@@ -1326,7 +1326,7 @@
       </p:sp>
       <p:sp>
         <p:nvSpPr>
-          <p:cNvPr id="1493657807" name="Shape 1061"/>
+          <p:cNvPr id="2065599871" name="Shape 1061"/>
           <p:cNvSpPr>
             <a:spLocks noChangeArrowheads="1" noGrp="1"/>
           </p:cNvSpPr>
@@ -1412,7 +1412,7 @@
       </p:sp>
       <p:sp>
         <p:nvSpPr>
-          <p:cNvPr id="797990582" name="Shape 1062"/>
+          <p:cNvPr id="1254432756" name="Shape 1062"/>
           <p:cNvSpPr>
             <a:spLocks noChangeArrowheads="1" noGrp="1"/>
           </p:cNvSpPr>
@@ -1490,7 +1490,7 @@
       </p:sp>
       <p:sp>
         <p:nvSpPr>
-          <p:cNvPr id="420600234" name="Shape 1063"/>
+          <p:cNvPr id="1788623455" name="Shape 1063"/>
           <p:cNvSpPr>
             <a:spLocks noChangeArrowheads="1" noGrp="1"/>
           </p:cNvSpPr>
@@ -1568,7 +1568,7 @@
       </p:sp>
       <p:sp>
         <p:nvSpPr>
-          <p:cNvPr id="1072651268" name="Subtitle 2"/>
+          <p:cNvPr id="1870270660" name="Subtitle 2"/>
           <p:cNvSpPr>
             <a:spLocks noGrp="1"/>
           </p:cNvSpPr>
@@ -1691,7 +1691,7 @@
       </p:sp>
       <p:sp>
         <p:nvSpPr>
-          <p:cNvPr id="218825809" name="Date Placeholder 3"/>
+          <p:cNvPr id="1043724681" name="Date Placeholder 3"/>
           <p:cNvSpPr>
             <a:spLocks noGrp="1"/>
           </p:cNvSpPr>
@@ -1717,7 +1717,7 @@
       </p:sp>
       <p:sp>
         <p:nvSpPr>
-          <p:cNvPr id="993308477" name="Footer Placeholder 4"/>
+          <p:cNvPr id="1082268170" name="Footer Placeholder 4"/>
           <p:cNvSpPr>
             <a:spLocks noGrp="1"/>
           </p:cNvSpPr>
@@ -1739,7 +1739,7 @@
       </p:sp>
       <p:sp>
         <p:nvSpPr>
-          <p:cNvPr id="1178701703" name="Slide Number Placeholder 5"/>
+          <p:cNvPr id="2048400607" name="Slide Number Placeholder 5"/>
           <p:cNvSpPr>
             <a:spLocks noGrp="1"/>
           </p:cNvSpPr>
@@ -1765,7 +1765,7 @@
       </p:sp>
       <p:sp>
         <p:nvSpPr>
-          <p:cNvPr id="317761523" name="Title 6"/>
+          <p:cNvPr id="717225057" name="Title 6"/>
           <p:cNvSpPr>
             <a:spLocks noGrp="1"/>
           </p:cNvSpPr>
@@ -1825,7 +1825,7 @@
       </p:grpSpPr>
       <p:sp>
         <p:nvSpPr>
-          <p:cNvPr id="910598006" name="Title 1"/>
+          <p:cNvPr id="825653024" name="Title 1"/>
           <p:cNvSpPr>
             <a:spLocks noGrp="1"/>
           </p:cNvSpPr>
@@ -1851,7 +1851,7 @@
       </p:sp>
       <p:sp>
         <p:nvSpPr>
-          <p:cNvPr id="554991035" name="Vertical Text Placeholder 2"/>
+          <p:cNvPr id="608947743" name="Vertical Text Placeholder 2"/>
           <p:cNvSpPr>
             <a:spLocks noGrp="1"/>
           </p:cNvSpPr>
@@ -1917,7 +1917,7 @@
       </p:sp>
       <p:sp>
         <p:nvSpPr>
-          <p:cNvPr id="379768153" name="Date Placeholder 3"/>
+          <p:cNvPr id="1028521474" name="Date Placeholder 3"/>
           <p:cNvSpPr>
             <a:spLocks noGrp="1"/>
           </p:cNvSpPr>
@@ -1943,7 +1943,7 @@
       </p:sp>
       <p:sp>
         <p:nvSpPr>
-          <p:cNvPr id="292684364" name="Footer Placeholder 4"/>
+          <p:cNvPr id="1496210120" name="Footer Placeholder 4"/>
           <p:cNvSpPr>
             <a:spLocks noGrp="1"/>
           </p:cNvSpPr>
@@ -1965,7 +1965,7 @@
       </p:sp>
       <p:sp>
         <p:nvSpPr>
-          <p:cNvPr id="1737392633" name="Slide Number Placeholder 5"/>
+          <p:cNvPr id="4723927" name="Slide Number Placeholder 5"/>
           <p:cNvSpPr>
             <a:spLocks noGrp="1"/>
           </p:cNvSpPr>
@@ -2016,7 +2016,7 @@
       </p:grpSpPr>
       <p:sp>
         <p:nvSpPr>
-          <p:cNvPr id="1946188364" name="Vertical Title 1"/>
+          <p:cNvPr id="380743524" name="Vertical Title 1"/>
           <p:cNvSpPr>
             <a:spLocks noGrp="1"/>
           </p:cNvSpPr>
@@ -2051,7 +2051,7 @@
       </p:sp>
       <p:sp>
         <p:nvSpPr>
-          <p:cNvPr id="1813437505" name="Vertical Text Placeholder 2"/>
+          <p:cNvPr id="1133908295" name="Vertical Text Placeholder 2"/>
           <p:cNvSpPr>
             <a:spLocks noGrp="1"/>
           </p:cNvSpPr>
@@ -2122,7 +2122,7 @@
       </p:sp>
       <p:sp>
         <p:nvSpPr>
-          <p:cNvPr id="1405041722" name="Date Placeholder 3"/>
+          <p:cNvPr id="1231161217" name="Date Placeholder 3"/>
           <p:cNvSpPr>
             <a:spLocks noGrp="1"/>
           </p:cNvSpPr>
@@ -2148,7 +2148,7 @@
       </p:sp>
       <p:sp>
         <p:nvSpPr>
-          <p:cNvPr id="1064021367" name="Footer Placeholder 4"/>
+          <p:cNvPr id="1730099518" name="Footer Placeholder 4"/>
           <p:cNvSpPr>
             <a:spLocks noGrp="1"/>
           </p:cNvSpPr>
@@ -2170,7 +2170,7 @@
       </p:sp>
       <p:sp>
         <p:nvSpPr>
-          <p:cNvPr id="1664803861" name="Slide Number Placeholder 5"/>
+          <p:cNvPr id="569838858" name="Slide Number Placeholder 5"/>
           <p:cNvSpPr>
             <a:spLocks noGrp="1"/>
           </p:cNvSpPr>
@@ -2221,7 +2221,7 @@
       </p:grpSpPr>
       <p:sp>
         <p:nvSpPr>
-          <p:cNvPr id="933779028" name="Title 1"/>
+          <p:cNvPr id="248288446" name="Title 1"/>
           <p:cNvSpPr>
             <a:spLocks noGrp="1"/>
           </p:cNvSpPr>
@@ -2247,7 +2247,7 @@
       </p:sp>
       <p:sp>
         <p:nvSpPr>
-          <p:cNvPr id="744048502" name="Content Placeholder 2"/>
+          <p:cNvPr id="1051737216" name="Content Placeholder 2"/>
           <p:cNvSpPr>
             <a:spLocks noGrp="1"/>
           </p:cNvSpPr>
@@ -2313,7 +2313,7 @@
       </p:sp>
       <p:sp>
         <p:nvSpPr>
-          <p:cNvPr id="1924122059" name="Date Placeholder 3"/>
+          <p:cNvPr id="1119281319" name="Date Placeholder 3"/>
           <p:cNvSpPr>
             <a:spLocks noGrp="1"/>
           </p:cNvSpPr>
@@ -2339,7 +2339,7 @@
       </p:sp>
       <p:sp>
         <p:nvSpPr>
-          <p:cNvPr id="797039444" name="Footer Placeholder 4"/>
+          <p:cNvPr id="1724964292" name="Footer Placeholder 4"/>
           <p:cNvSpPr>
             <a:spLocks noGrp="1"/>
           </p:cNvSpPr>
@@ -2361,7 +2361,7 @@
       </p:sp>
       <p:sp>
         <p:nvSpPr>
-          <p:cNvPr id="1734289235" name="Slide Number Placeholder 5"/>
+          <p:cNvPr id="133652280" name="Slide Number Placeholder 5"/>
           <p:cNvSpPr>
             <a:spLocks noGrp="1"/>
           </p:cNvSpPr>
@@ -2412,7 +2412,7 @@
       </p:grpSpPr>
       <p:sp>
         <p:nvSpPr>
-          <p:cNvPr id="1537498821" name="Title 1"/>
+          <p:cNvPr id="352312761" name="Title 1"/>
           <p:cNvSpPr>
             <a:spLocks noGrp="1"/>
           </p:cNvSpPr>
@@ -2447,7 +2447,7 @@
       </p:sp>
       <p:sp>
         <p:nvSpPr>
-          <p:cNvPr id="332666852" name="Text Placeholder 2"/>
+          <p:cNvPr id="1524868250" name="Text Placeholder 2"/>
           <p:cNvSpPr>
             <a:spLocks noGrp="1"/>
           </p:cNvSpPr>
@@ -2569,7 +2569,7 @@
       </p:sp>
       <p:sp>
         <p:nvSpPr>
-          <p:cNvPr id="1388498686" name="Date Placeholder 3"/>
+          <p:cNvPr id="1861746368" name="Date Placeholder 3"/>
           <p:cNvSpPr>
             <a:spLocks noGrp="1"/>
           </p:cNvSpPr>
@@ -2595,7 +2595,7 @@
       </p:sp>
       <p:sp>
         <p:nvSpPr>
-          <p:cNvPr id="296809155" name="Footer Placeholder 4"/>
+          <p:cNvPr id="2045043956" name="Footer Placeholder 4"/>
           <p:cNvSpPr>
             <a:spLocks noGrp="1"/>
           </p:cNvSpPr>
@@ -2617,7 +2617,7 @@
       </p:sp>
       <p:sp>
         <p:nvSpPr>
-          <p:cNvPr id="1624548187" name="Slide Number Placeholder 5"/>
+          <p:cNvPr id="1857062716" name="Slide Number Placeholder 5"/>
           <p:cNvSpPr>
             <a:spLocks noGrp="1"/>
           </p:cNvSpPr>
@@ -2668,7 +2668,7 @@
       </p:grpSpPr>
       <p:sp>
         <p:nvSpPr>
-          <p:cNvPr id="1388906550" name="Title 1"/>
+          <p:cNvPr id="1356371984" name="Title 1"/>
           <p:cNvSpPr>
             <a:spLocks noGrp="1"/>
           </p:cNvSpPr>
@@ -2694,7 +2694,7 @@
       </p:sp>
       <p:sp>
         <p:nvSpPr>
-          <p:cNvPr id="1003499321" name="Content Placeholder 2"/>
+          <p:cNvPr id="878512103" name="Content Placeholder 2"/>
           <p:cNvSpPr>
             <a:spLocks noGrp="1"/>
           </p:cNvSpPr>
@@ -2793,7 +2793,7 @@
       </p:sp>
       <p:sp>
         <p:nvSpPr>
-          <p:cNvPr id="1538560437" name="Content Placeholder 3"/>
+          <p:cNvPr id="619275361" name="Content Placeholder 3"/>
           <p:cNvSpPr>
             <a:spLocks noGrp="1"/>
           </p:cNvSpPr>
@@ -2892,7 +2892,7 @@
       </p:sp>
       <p:sp>
         <p:nvSpPr>
-          <p:cNvPr id="436540363" name="Date Placeholder 4"/>
+          <p:cNvPr id="99343159" name="Date Placeholder 4"/>
           <p:cNvSpPr>
             <a:spLocks noGrp="1"/>
           </p:cNvSpPr>
@@ -2918,7 +2918,7 @@
       </p:sp>
       <p:sp>
         <p:nvSpPr>
-          <p:cNvPr id="307330884" name="Footer Placeholder 5"/>
+          <p:cNvPr id="150923601" name="Footer Placeholder 5"/>
           <p:cNvSpPr>
             <a:spLocks noGrp="1"/>
           </p:cNvSpPr>
@@ -2940,7 +2940,7 @@
       </p:sp>
       <p:sp>
         <p:nvSpPr>
-          <p:cNvPr id="1934080556" name="Slide Number Placeholder 6"/>
+          <p:cNvPr id="1500724043" name="Slide Number Placeholder 6"/>
           <p:cNvSpPr>
             <a:spLocks noGrp="1"/>
           </p:cNvSpPr>
@@ -2991,7 +2991,7 @@
       </p:grpSpPr>
       <p:sp>
         <p:nvSpPr>
-          <p:cNvPr id="1136224456" name="Title 1"/>
+          <p:cNvPr id="135584551" name="Title 1"/>
           <p:cNvSpPr>
             <a:spLocks noGrp="1"/>
           </p:cNvSpPr>
@@ -3021,7 +3021,7 @@
       </p:sp>
       <p:sp>
         <p:nvSpPr>
-          <p:cNvPr id="1601162278" name="Text Placeholder 2"/>
+          <p:cNvPr id="853339620" name="Text Placeholder 2"/>
           <p:cNvSpPr>
             <a:spLocks noGrp="1"/>
           </p:cNvSpPr>
@@ -3089,7 +3089,7 @@
       </p:sp>
       <p:sp>
         <p:nvSpPr>
-          <p:cNvPr id="2068490022" name="Content Placeholder 3"/>
+          <p:cNvPr id="1158724772" name="Content Placeholder 3"/>
           <p:cNvSpPr>
             <a:spLocks noGrp="1"/>
           </p:cNvSpPr>
@@ -3188,7 +3188,7 @@
       </p:sp>
       <p:sp>
         <p:nvSpPr>
-          <p:cNvPr id="2089336012" name="Text Placeholder 4"/>
+          <p:cNvPr id="1754445514" name="Text Placeholder 4"/>
           <p:cNvSpPr>
             <a:spLocks noGrp="1"/>
           </p:cNvSpPr>
@@ -3256,7 +3256,7 @@
       </p:sp>
       <p:sp>
         <p:nvSpPr>
-          <p:cNvPr id="113945666" name="Content Placeholder 5"/>
+          <p:cNvPr id="456953356" name="Content Placeholder 5"/>
           <p:cNvSpPr>
             <a:spLocks noGrp="1"/>
           </p:cNvSpPr>
@@ -3355,7 +3355,7 @@
       </p:sp>
       <p:sp>
         <p:nvSpPr>
-          <p:cNvPr id="1104023198" name="Date Placeholder 6"/>
+          <p:cNvPr id="897144703" name="Date Placeholder 6"/>
           <p:cNvSpPr>
             <a:spLocks noGrp="1"/>
           </p:cNvSpPr>
@@ -3381,7 +3381,7 @@
       </p:sp>
       <p:sp>
         <p:nvSpPr>
-          <p:cNvPr id="5274149" name="Footer Placeholder 7"/>
+          <p:cNvPr id="1349391697" name="Footer Placeholder 7"/>
           <p:cNvSpPr>
             <a:spLocks noGrp="1"/>
           </p:cNvSpPr>
@@ -3403,7 +3403,7 @@
       </p:sp>
       <p:sp>
         <p:nvSpPr>
-          <p:cNvPr id="105711742" name="Slide Number Placeholder 8"/>
+          <p:cNvPr id="1227761911" name="Slide Number Placeholder 8"/>
           <p:cNvSpPr>
             <a:spLocks noGrp="1"/>
           </p:cNvSpPr>
@@ -3454,7 +3454,7 @@
       </p:grpSpPr>
       <p:sp>
         <p:nvSpPr>
-          <p:cNvPr id="1754332822" name="Title 1"/>
+          <p:cNvPr id="1835939926" name="Title 1"/>
           <p:cNvSpPr>
             <a:spLocks noGrp="1"/>
           </p:cNvSpPr>
@@ -3480,7 +3480,7 @@
       </p:sp>
       <p:sp>
         <p:nvSpPr>
-          <p:cNvPr id="1755267991" name="Date Placeholder 2"/>
+          <p:cNvPr id="453192065" name="Date Placeholder 2"/>
           <p:cNvSpPr>
             <a:spLocks noGrp="1"/>
           </p:cNvSpPr>
@@ -3506,7 +3506,7 @@
       </p:sp>
       <p:sp>
         <p:nvSpPr>
-          <p:cNvPr id="758301836" name="Footer Placeholder 3"/>
+          <p:cNvPr id="1408271412" name="Footer Placeholder 3"/>
           <p:cNvSpPr>
             <a:spLocks noGrp="1"/>
           </p:cNvSpPr>
@@ -3528,7 +3528,7 @@
       </p:sp>
       <p:sp>
         <p:nvSpPr>
-          <p:cNvPr id="1767770692" name="Slide Number Placeholder 4"/>
+          <p:cNvPr id="438167298" name="Slide Number Placeholder 4"/>
           <p:cNvSpPr>
             <a:spLocks noGrp="1"/>
           </p:cNvSpPr>
@@ -3579,7 +3579,7 @@
       </p:grpSpPr>
       <p:sp>
         <p:nvSpPr>
-          <p:cNvPr id="656220776" name="Date Placeholder 1"/>
+          <p:cNvPr id="1246420756" name="Date Placeholder 1"/>
           <p:cNvSpPr>
             <a:spLocks noGrp="1"/>
           </p:cNvSpPr>
@@ -3605,7 +3605,7 @@
       </p:sp>
       <p:sp>
         <p:nvSpPr>
-          <p:cNvPr id="843718844" name="Footer Placeholder 2"/>
+          <p:cNvPr id="899150681" name="Footer Placeholder 2"/>
           <p:cNvSpPr>
             <a:spLocks noGrp="1"/>
           </p:cNvSpPr>
@@ -3627,7 +3627,7 @@
       </p:sp>
       <p:sp>
         <p:nvSpPr>
-          <p:cNvPr id="1052992963" name="Slide Number Placeholder 3"/>
+          <p:cNvPr id="1670094451" name="Slide Number Placeholder 3"/>
           <p:cNvSpPr>
             <a:spLocks noGrp="1"/>
           </p:cNvSpPr>
@@ -3678,7 +3678,7 @@
       </p:grpSpPr>
       <p:sp>
         <p:nvSpPr>
-          <p:cNvPr id="1836068994" name="Title 1"/>
+          <p:cNvPr id="1852984551" name="Title 1"/>
           <p:cNvSpPr>
             <a:spLocks noGrp="1"/>
           </p:cNvSpPr>
@@ -3713,7 +3713,7 @@
       </p:sp>
       <p:sp>
         <p:nvSpPr>
-          <p:cNvPr id="1542182367" name="Content Placeholder 2"/>
+          <p:cNvPr id="431086542" name="Content Placeholder 2"/>
           <p:cNvSpPr>
             <a:spLocks noGrp="1"/>
           </p:cNvSpPr>
@@ -3812,7 +3812,7 @@
       </p:sp>
       <p:sp>
         <p:nvSpPr>
-          <p:cNvPr id="1294362479" name="Text Placeholder 3"/>
+          <p:cNvPr id="69959350" name="Text Placeholder 3"/>
           <p:cNvSpPr>
             <a:spLocks noGrp="1"/>
           </p:cNvSpPr>
@@ -3880,7 +3880,7 @@
       </p:sp>
       <p:sp>
         <p:nvSpPr>
-          <p:cNvPr id="1721664716" name="Date Placeholder 4"/>
+          <p:cNvPr id="299143185" name="Date Placeholder 4"/>
           <p:cNvSpPr>
             <a:spLocks noGrp="1"/>
           </p:cNvSpPr>
@@ -3906,7 +3906,7 @@
       </p:sp>
       <p:sp>
         <p:nvSpPr>
-          <p:cNvPr id="1035131322" name="Footer Placeholder 5"/>
+          <p:cNvPr id="1586032757" name="Footer Placeholder 5"/>
           <p:cNvSpPr>
             <a:spLocks noGrp="1"/>
           </p:cNvSpPr>
@@ -3928,7 +3928,7 @@
       </p:sp>
       <p:sp>
         <p:nvSpPr>
-          <p:cNvPr id="475088388" name="Slide Number Placeholder 6"/>
+          <p:cNvPr id="1134442176" name="Slide Number Placeholder 6"/>
           <p:cNvSpPr>
             <a:spLocks noGrp="1"/>
           </p:cNvSpPr>
@@ -3979,7 +3979,7 @@
       </p:grpSpPr>
       <p:sp>
         <p:nvSpPr>
-          <p:cNvPr id="1393601599" name="Title 1"/>
+          <p:cNvPr id="30734076" name="Title 1"/>
           <p:cNvSpPr>
             <a:spLocks noGrp="1"/>
           </p:cNvSpPr>
@@ -4014,7 +4014,7 @@
       </p:sp>
       <p:sp>
         <p:nvSpPr>
-          <p:cNvPr id="1057477247" name="Picture Placeholder 2"/>
+          <p:cNvPr id="231057162" name="Picture Placeholder 2"/>
           <p:cNvSpPr>
             <a:spLocks noGrp="1"/>
           </p:cNvSpPr>
@@ -4078,7 +4078,7 @@
       </p:sp>
       <p:sp>
         <p:nvSpPr>
-          <p:cNvPr id="1065772238" name="Text Placeholder 3"/>
+          <p:cNvPr id="1339395642" name="Text Placeholder 3"/>
           <p:cNvSpPr>
             <a:spLocks noGrp="1"/>
           </p:cNvSpPr>
@@ -4146,7 +4146,7 @@
       </p:sp>
       <p:sp>
         <p:nvSpPr>
-          <p:cNvPr id="558238400" name="Date Placeholder 4"/>
+          <p:cNvPr id="671653370" name="Date Placeholder 4"/>
           <p:cNvSpPr>
             <a:spLocks noGrp="1"/>
           </p:cNvSpPr>
@@ -4172,7 +4172,7 @@
       </p:sp>
       <p:sp>
         <p:nvSpPr>
-          <p:cNvPr id="418609496" name="Footer Placeholder 5"/>
+          <p:cNvPr id="1561307685" name="Footer Placeholder 5"/>
           <p:cNvSpPr>
             <a:spLocks noGrp="1"/>
           </p:cNvSpPr>
@@ -4194,7 +4194,7 @@
       </p:sp>
       <p:sp>
         <p:nvSpPr>
-          <p:cNvPr id="632757267" name="Slide Number Placeholder 6"/>
+          <p:cNvPr id="1170819538" name="Slide Number Placeholder 6"/>
           <p:cNvSpPr>
             <a:spLocks noGrp="1"/>
           </p:cNvSpPr>
@@ -4250,7 +4250,7 @@
       </p:grpSpPr>
       <p:sp>
         <p:nvSpPr>
-          <p:cNvPr id="1199735584" name="Shape 1059"/>
+          <p:cNvPr id="1201074701" name="Shape 1059"/>
           <p:cNvSpPr>
             <a:spLocks noChangeArrowheads="1" noGrp="1"/>
           </p:cNvSpPr>
@@ -4328,7 +4328,7 @@
       </p:sp>
       <p:sp>
         <p:nvSpPr>
-          <p:cNvPr id="1442229180" name="Shape 1060"/>
+          <p:cNvPr id="756170903" name="Shape 1060"/>
           <p:cNvSpPr>
             <a:spLocks noChangeArrowheads="1" noGrp="1"/>
           </p:cNvSpPr>
@@ -4409,7 +4409,7 @@
       </p:sp>
       <p:sp>
         <p:nvSpPr>
-          <p:cNvPr id="1242283541" name="Shape 1061"/>
+          <p:cNvPr id="779169363" name="Shape 1061"/>
           <p:cNvSpPr>
             <a:spLocks noChangeArrowheads="1" noGrp="1"/>
           </p:cNvSpPr>
@@ -4527,7 +4527,7 @@
       </p:sp>
       <p:sp>
         <p:nvSpPr>
-          <p:cNvPr id="1440567704" name="Title 1"/>
+          <p:cNvPr id="906965478" name="Title 1"/>
           <p:cNvSpPr>
             <a:spLocks noGrp="1"/>
           </p:cNvSpPr>
@@ -4563,7 +4563,7 @@
       </p:sp>
       <p:sp>
         <p:nvSpPr>
-          <p:cNvPr id="2021520730" name="Text Placeholder 2"/>
+          <p:cNvPr id="2069308681" name="Text Placeholder 2"/>
           <p:cNvSpPr>
             <a:spLocks noGrp="1"/>
           </p:cNvSpPr>
@@ -4639,7 +4639,7 @@
       </p:sp>
       <p:sp>
         <p:nvSpPr>
-          <p:cNvPr id="369197367" name="Date Placeholder 3"/>
+          <p:cNvPr id="4846899" name="Date Placeholder 3"/>
           <p:cNvSpPr>
             <a:spLocks noGrp="1"/>
           </p:cNvSpPr>
@@ -4683,7 +4683,7 @@
       </p:sp>
       <p:sp>
         <p:nvSpPr>
-          <p:cNvPr id="1589603721" name="Footer Placeholder 4"/>
+          <p:cNvPr id="751195963" name="Footer Placeholder 4"/>
           <p:cNvSpPr>
             <a:spLocks noGrp="1"/>
           </p:cNvSpPr>
@@ -4723,7 +4723,7 @@
       </p:sp>
       <p:sp>
         <p:nvSpPr>
-          <p:cNvPr id="1075027648" name="Slide Number Placeholder 5"/>
+          <p:cNvPr id="2006390694" name="Slide Number Placeholder 5"/>
           <p:cNvSpPr>
             <a:spLocks noGrp="1"/>
           </p:cNvSpPr>
@@ -5071,7 +5071,7 @@
       </p:grpSpPr>
       <p:sp>
         <p:nvSpPr>
-          <p:cNvPr id="2065259464" name="Title 1"/>
+          <p:cNvPr id="1334267908" name="Title 1"/>
           <p:cNvSpPr>
             <a:spLocks noGrp="1"/>
           </p:cNvSpPr>
@@ -5097,7 +5097,7 @@
       </p:sp>
       <p:sp>
         <p:nvSpPr>
-          <p:cNvPr id="1146225663" name="Subtitle 2"/>
+          <p:cNvPr id="1921203335" name="Subtitle 2"/>
           <p:cNvSpPr>
             <a:spLocks noGrp="1"/>
           </p:cNvSpPr>
@@ -5152,7 +5152,7 @@
       </p:grpSpPr>
       <p:sp>
         <p:nvSpPr>
-          <p:cNvPr id="1162710047" name="Title 1"/>
+          <p:cNvPr id="1126279575" name="Title 1"/>
           <p:cNvSpPr>
             <a:spLocks noGrp="1"/>
           </p:cNvSpPr>
@@ -5178,7 +5178,7 @@
       </p:sp>
       <p:sp>
         <p:nvSpPr>
-          <p:cNvPr id="1306529329" name="Content Placeholder 2"/>
+          <p:cNvPr id="217289123" name="Content Placeholder 2"/>
           <p:cNvSpPr>
             <a:spLocks noGrp="1"/>
           </p:cNvSpPr>
@@ -5295,7 +5295,7 @@
       </p:grpSpPr>
       <p:sp>
         <p:nvSpPr>
-          <p:cNvPr id="635980787" name="Title 1"/>
+          <p:cNvPr id="1127034950" name="Title 1"/>
           <p:cNvSpPr>
             <a:spLocks noGrp="1"/>
           </p:cNvSpPr>
@@ -5321,7 +5321,7 @@
       </p:sp>
       <p:sp>
         <p:nvSpPr>
-          <p:cNvPr id="303634806" name="Content Placeholder 2"/>
+          <p:cNvPr id="322346136" name="Content Placeholder 2"/>
           <p:cNvSpPr>
             <a:spLocks noGrp="1"/>
           </p:cNvSpPr>
@@ -5946,14 +5946,14 @@
           <p:cNvPr id="2133509873" name=""/>
           <p:cNvCxnSpPr>
             <a:stCxn id="1028047312" idx="2"/>
-            <a:endCxn id="1429978451" idx="3"/>
+            <a:endCxn id="1429978451" idx="0"/>
           </p:cNvCxnSpPr>
           <p:nvPr/>
         </p:nvCxnSpPr>
         <p:spPr bwMode="auto">
           <a:xfrm rot="5399978" flipH="0" flipV="0">
-            <a:off x="5385845" y="2397810"/>
-            <a:ext cx="1205575" cy="1329849"/>
+            <a:off x="5150160" y="1782205"/>
+            <a:ext cx="825655" cy="2181139"/>
           </a:xfrm>
           <a:prstGeom prst="line">
             <a:avLst/>
@@ -6469,7 +6469,7 @@
       </p:grpSpPr>
       <p:graphicFrame>
         <p:nvGraphicFramePr>
-          <p:cNvPr id="358329443" name=""/>
+          <p:cNvPr id="2038886563" name=""/>
           <p:cNvGraphicFramePr>
             <a:graphicFrameLocks xmlns:a="http://schemas.openxmlformats.org/drawingml/2006/main" noChangeAspect="1"/>
           </p:cNvGraphicFramePr>
@@ -6485,7 +6485,7 @@
               <p:embed/>
               <p:pic>
                 <p:nvPicPr>
-                  <p:cNvPr id="358329443" name=""/>
+                  <p:cNvPr id="2038886563" name=""/>
                   <p:cNvPicPr/>
                   <p:nvPr/>
                 </p:nvPicPr>
@@ -6509,7 +6509,7 @@
       </p:graphicFrame>
       <p:sp>
         <p:nvSpPr>
-          <p:cNvPr id="2066964927" name=""/>
+          <p:cNvPr id="419554262" name=""/>
           <p:cNvSpPr txBox="1"/>
           <p:nvPr/>
         </p:nvSpPr>

--- a/NewOS.pptx
+++ b/NewOS.pptx
@@ -5,7 +5,7 @@
     <p:sldMasterId id="2147483648" r:id="rId1"/>
   </p:sldMasterIdLst>
   <p:notesMasterIdLst>
-    <p:notesMasterId r:id="rId11"/>
+    <p:notesMasterId r:id="rId13"/>
   </p:notesMasterIdLst>
   <p:sldIdLst>
     <p:sldId id="256" r:id="rId4"/>
@@ -15,6 +15,8 @@
     <p:sldId id="260" r:id="rId8"/>
     <p:sldId id="261" r:id="rId9"/>
     <p:sldId id="262" r:id="rId10"/>
+    <p:sldId id="263" r:id="rId11"/>
+    <p:sldId id="264" r:id="rId12"/>
   </p:sldIdLst>
   <p:sldSz cx="12192000" cy="6858000"/>
   <p:notesSz cx="6858000" cy="9144000"/>
@@ -140,7 +142,7 @@
       </p:grpSpPr>
       <p:sp>
         <p:nvSpPr>
-          <p:cNvPr id="361059366" name="Header Placeholder 1"/>
+          <p:cNvPr id="1202375955" name="Header Placeholder 1"/>
           <p:cNvSpPr>
             <a:spLocks noGrp="1"/>
           </p:cNvSpPr>
@@ -174,7 +176,7 @@
       </p:sp>
       <p:sp>
         <p:nvSpPr>
-          <p:cNvPr id="1309639758" name="Date Placeholder 2"/>
+          <p:cNvPr id="112559219" name="Date Placeholder 2"/>
           <p:cNvSpPr>
             <a:spLocks noGrp="1"/>
           </p:cNvSpPr>
@@ -212,7 +214,7 @@
       </p:sp>
       <p:sp>
         <p:nvSpPr>
-          <p:cNvPr id="2070735860" name="Slide Image Placeholder 3"/>
+          <p:cNvPr id="308262045" name="Slide Image Placeholder 3"/>
           <p:cNvSpPr>
             <a:spLocks noChangeAspect="1" noGrp="1" noRot="1"/>
           </p:cNvSpPr>
@@ -248,7 +250,7 @@
       </p:sp>
       <p:sp>
         <p:nvSpPr>
-          <p:cNvPr id="939836685" name="Notes Placeholder 4"/>
+          <p:cNvPr id="815747378" name="Notes Placeholder 4"/>
           <p:cNvSpPr>
             <a:spLocks noGrp="1"/>
           </p:cNvSpPr>
@@ -322,7 +324,7 @@
       </p:sp>
       <p:sp>
         <p:nvSpPr>
-          <p:cNvPr id="984967617" name="Footer Placeholder 5"/>
+          <p:cNvPr id="1780743927" name="Footer Placeholder 5"/>
           <p:cNvSpPr>
             <a:spLocks noGrp="1"/>
           </p:cNvSpPr>
@@ -356,7 +358,7 @@
       </p:sp>
       <p:sp>
         <p:nvSpPr>
-          <p:cNvPr id="291024504" name="Slide Number Placeholder 6"/>
+          <p:cNvPr id="568006919" name="Slide Number Placeholder 6"/>
           <p:cNvSpPr>
             <a:spLocks noGrp="1"/>
           </p:cNvSpPr>
@@ -509,7 +511,7 @@
       </p:grpSpPr>
       <p:sp>
         <p:nvSpPr>
-          <p:cNvPr id="1585178268" name="Slide Image Placeholder 1"/>
+          <p:cNvPr id="1511679985" name="Slide Image Placeholder 1"/>
           <p:cNvSpPr>
             <a:spLocks noChangeAspect="1" noGrp="1" noRot="1"/>
           </p:cNvSpPr>
@@ -526,7 +528,7 @@
       </p:sp>
       <p:sp>
         <p:nvSpPr>
-          <p:cNvPr id="1139204397" name="Notes Placeholder 2"/>
+          <p:cNvPr id="1742172131" name="Notes Placeholder 2"/>
           <p:cNvSpPr>
             <a:spLocks noGrp="1"/>
           </p:cNvSpPr>
@@ -551,7 +553,7 @@
       </p:sp>
       <p:sp>
         <p:nvSpPr>
-          <p:cNvPr id="208119629" name="Slide Number Placeholder 3"/>
+          <p:cNvPr id="1512840787" name="Slide Number Placeholder 3"/>
           <p:cNvSpPr>
             <a:spLocks noGrp="1"/>
           </p:cNvSpPr>
@@ -602,7 +604,7 @@
       </p:grpSpPr>
       <p:sp>
         <p:nvSpPr>
-          <p:cNvPr id="308776732" name="Slide Image Placeholder 1"/>
+          <p:cNvPr id="2" name="Slide Image Placeholder 1"/>
           <p:cNvSpPr>
             <a:spLocks noChangeAspect="1" noGrp="1" noRot="1"/>
           </p:cNvSpPr>
@@ -614,7 +616,7 @@
       </p:sp>
       <p:sp>
         <p:nvSpPr>
-          <p:cNvPr id="784306126" name="Notes Placeholder 2"/>
+          <p:cNvPr id="3" name="Notes Placeholder 2"/>
           <p:cNvSpPr>
             <a:spLocks noGrp="1"/>
           </p:cNvSpPr>
@@ -636,7 +638,7 @@
       </p:sp>
       <p:sp>
         <p:nvSpPr>
-          <p:cNvPr id="1730465891" name="Slide Number Placeholder 3"/>
+          <p:cNvPr id="4" name="Slide Number Placeholder 3"/>
           <p:cNvSpPr>
             <a:spLocks noGrp="1"/>
           </p:cNvSpPr>
@@ -652,7 +654,7 @@
             <a:pPr>
               <a:defRPr/>
             </a:pPr>
-            <a:fld id="{624947E7-31F4-FC21-E445-8AD8B8180D94}" type="slidenum">
+            <a:fld id="{1C431F9E-29DF-416F-36C9-C3E33D044EA9}" type="slidenum">
               <a:rPr/>
               <a:t/>
             </a:fld>
@@ -687,7 +689,7 @@
       </p:grpSpPr>
       <p:sp>
         <p:nvSpPr>
-          <p:cNvPr id="295326994" name="Slide Image Placeholder 1"/>
+          <p:cNvPr id="2" name="Slide Image Placeholder 1"/>
           <p:cNvSpPr>
             <a:spLocks noChangeAspect="1" noGrp="1" noRot="1"/>
           </p:cNvSpPr>
@@ -699,7 +701,7 @@
       </p:sp>
       <p:sp>
         <p:nvSpPr>
-          <p:cNvPr id="1883864001" name="Notes Placeholder 2"/>
+          <p:cNvPr id="3" name="Notes Placeholder 2"/>
           <p:cNvSpPr>
             <a:spLocks noGrp="1"/>
           </p:cNvSpPr>
@@ -721,7 +723,7 @@
       </p:sp>
       <p:sp>
         <p:nvSpPr>
-          <p:cNvPr id="1118767965" name="Slide Number Placeholder 3"/>
+          <p:cNvPr id="4" name="Slide Number Placeholder 3"/>
           <p:cNvSpPr>
             <a:spLocks noGrp="1"/>
           </p:cNvSpPr>
@@ -737,7 +739,7 @@
             <a:pPr>
               <a:defRPr/>
             </a:pPr>
-            <a:fld id="{D575FE4D-16C6-0674-AA1D-BD1F9A3B9458}" type="slidenum">
+            <a:fld id="{4B9FD17E-15BB-A92C-C4C2-BE878BDB918F}" type="slidenum">
               <a:rPr/>
               <a:t/>
             </a:fld>
@@ -772,7 +774,7 @@
       </p:grpSpPr>
       <p:sp>
         <p:nvSpPr>
-          <p:cNvPr id="2" name="Slide Image Placeholder 1"/>
+          <p:cNvPr id="622757499" name="Slide Image Placeholder 1"/>
           <p:cNvSpPr>
             <a:spLocks noChangeAspect="1" noGrp="1" noRot="1"/>
           </p:cNvSpPr>
@@ -784,7 +786,7 @@
       </p:sp>
       <p:sp>
         <p:nvSpPr>
-          <p:cNvPr id="3" name="Notes Placeholder 2"/>
+          <p:cNvPr id="1150907526" name="Notes Placeholder 2"/>
           <p:cNvSpPr>
             <a:spLocks noGrp="1"/>
           </p:cNvSpPr>
@@ -806,7 +808,7 @@
       </p:sp>
       <p:sp>
         <p:nvSpPr>
-          <p:cNvPr id="4" name="Slide Number Placeholder 3"/>
+          <p:cNvPr id="425144410" name="Slide Number Placeholder 3"/>
           <p:cNvSpPr>
             <a:spLocks noGrp="1"/>
           </p:cNvSpPr>
@@ -822,7 +824,7 @@
             <a:pPr>
               <a:defRPr/>
             </a:pPr>
-            <a:fld id="{AEA6BF44-F722-C903-71DE-C4E232C9016C}" type="slidenum">
+            <a:fld id="{624947E7-31F4-FC21-E445-8AD8B8180D94}" type="slidenum">
               <a:rPr/>
               <a:t/>
             </a:fld>
@@ -857,7 +859,7 @@
       </p:grpSpPr>
       <p:sp>
         <p:nvSpPr>
-          <p:cNvPr id="2" name="Slide Image Placeholder 1"/>
+          <p:cNvPr id="1959772635" name="Slide Image Placeholder 1"/>
           <p:cNvSpPr>
             <a:spLocks noChangeAspect="1" noGrp="1" noRot="1"/>
           </p:cNvSpPr>
@@ -869,7 +871,7 @@
       </p:sp>
       <p:sp>
         <p:nvSpPr>
-          <p:cNvPr id="3" name="Notes Placeholder 2"/>
+          <p:cNvPr id="202111096" name="Notes Placeholder 2"/>
           <p:cNvSpPr>
             <a:spLocks noGrp="1"/>
           </p:cNvSpPr>
@@ -891,7 +893,7 @@
       </p:sp>
       <p:sp>
         <p:nvSpPr>
-          <p:cNvPr id="4" name="Slide Number Placeholder 3"/>
+          <p:cNvPr id="950583928" name="Slide Number Placeholder 3"/>
           <p:cNvSpPr>
             <a:spLocks noGrp="1"/>
           </p:cNvSpPr>
@@ -907,7 +909,7 @@
             <a:pPr>
               <a:defRPr/>
             </a:pPr>
-            <a:fld id="{1B5C3871-37B8-A084-1EB9-71D316FA2BBA}" type="slidenum">
+            <a:fld id="{D575FE4D-16C6-0674-AA1D-BD1F9A3B9458}" type="slidenum">
               <a:rPr/>
               <a:t/>
             </a:fld>
@@ -992,7 +994,7 @@
             <a:pPr>
               <a:defRPr/>
             </a:pPr>
-            <a:fld id="{14E332DF-2599-28D2-AA37-6680C3DB7713}" type="slidenum">
+            <a:fld id="{AEA6BF44-F722-C903-71DE-C4E232C9016C}" type="slidenum">
               <a:rPr/>
               <a:t/>
             </a:fld>
@@ -1027,7 +1029,7 @@
       </p:grpSpPr>
       <p:sp>
         <p:nvSpPr>
-          <p:cNvPr id="185385485" name="Slide Image Placeholder 1"/>
+          <p:cNvPr id="2" name="Slide Image Placeholder 1"/>
           <p:cNvSpPr>
             <a:spLocks noChangeAspect="1" noGrp="1" noRot="1"/>
           </p:cNvSpPr>
@@ -1039,7 +1041,7 @@
       </p:sp>
       <p:sp>
         <p:nvSpPr>
-          <p:cNvPr id="1140346626" name="Notes Placeholder 2"/>
+          <p:cNvPr id="3" name="Notes Placeholder 2"/>
           <p:cNvSpPr>
             <a:spLocks noGrp="1"/>
           </p:cNvSpPr>
@@ -1061,7 +1063,177 @@
       </p:sp>
       <p:sp>
         <p:nvSpPr>
-          <p:cNvPr id="894835433" name="Slide Number Placeholder 3"/>
+          <p:cNvPr id="4" name="Slide Number Placeholder 3"/>
+          <p:cNvSpPr>
+            <a:spLocks noGrp="1"/>
+          </p:cNvSpPr>
+          <p:nvPr>
+            <p:ph type="sldNum" sz="quarter" idx="10"/>
+          </p:nvPr>
+        </p:nvSpPr>
+        <p:spPr bwMode="auto"/>
+        <p:txBody>
+          <a:bodyPr/>
+          <a:lstStyle/>
+          <a:p>
+            <a:pPr>
+              <a:defRPr/>
+            </a:pPr>
+            <a:fld id="{1B5C3871-37B8-A084-1EB9-71D316FA2BBA}" type="slidenum">
+              <a:rPr/>
+              <a:t/>
+            </a:fld>
+            <a:endParaRPr/>
+          </a:p>
+        </p:txBody>
+      </p:sp>
+    </p:spTree>
+  </p:cSld>
+  <p:clrMapOvr>
+    <a:masterClrMapping/>
+  </p:clrMapOvr>
+</p:notes>
+</file>
+
+<file path=ppt/notesSlides/notesSlide8.xml><?xml version="1.0" encoding="utf-8"?>
+<p:notes xmlns:a="http://schemas.openxmlformats.org/drawingml/2006/main" xmlns:r="http://schemas.openxmlformats.org/officeDocument/2006/relationships" xmlns:p="http://schemas.openxmlformats.org/presentationml/2006/main" xmlns:m="http://schemas.openxmlformats.org/officeDocument/2006/math" xmlns:w="http://schemas.openxmlformats.org/wordprocessingml/2006/main">
+  <p:cSld name="">
+    <p:spTree>
+      <p:nvGrpSpPr>
+        <p:cNvPr id="1" name=""/>
+        <p:cNvGrpSpPr/>
+        <p:nvPr/>
+      </p:nvGrpSpPr>
+      <p:grpSpPr bwMode="auto">
+        <a:xfrm>
+          <a:off x="0" y="0"/>
+          <a:ext cx="0" cy="0"/>
+          <a:chOff x="0" y="0"/>
+          <a:chExt cx="0" cy="0"/>
+        </a:xfrm>
+      </p:grpSpPr>
+      <p:sp>
+        <p:nvSpPr>
+          <p:cNvPr id="2" name="Slide Image Placeholder 1"/>
+          <p:cNvSpPr>
+            <a:spLocks noChangeAspect="1" noGrp="1" noRot="1"/>
+          </p:cNvSpPr>
+          <p:nvPr>
+            <p:ph type="sldImg"/>
+          </p:nvPr>
+        </p:nvSpPr>
+        <p:spPr bwMode="auto"/>
+      </p:sp>
+      <p:sp>
+        <p:nvSpPr>
+          <p:cNvPr id="3" name="Notes Placeholder 2"/>
+          <p:cNvSpPr>
+            <a:spLocks noGrp="1"/>
+          </p:cNvSpPr>
+          <p:nvPr>
+            <p:ph type="body" idx="1"/>
+          </p:nvPr>
+        </p:nvSpPr>
+        <p:spPr bwMode="auto"/>
+        <p:txBody>
+          <a:bodyPr/>
+          <a:lstStyle/>
+          <a:p>
+            <a:pPr>
+              <a:defRPr/>
+            </a:pPr>
+            <a:endParaRPr/>
+          </a:p>
+        </p:txBody>
+      </p:sp>
+      <p:sp>
+        <p:nvSpPr>
+          <p:cNvPr id="4" name="Slide Number Placeholder 3"/>
+          <p:cNvSpPr>
+            <a:spLocks noGrp="1"/>
+          </p:cNvSpPr>
+          <p:nvPr>
+            <p:ph type="sldNum" sz="quarter" idx="10"/>
+          </p:nvPr>
+        </p:nvSpPr>
+        <p:spPr bwMode="auto"/>
+        <p:txBody>
+          <a:bodyPr/>
+          <a:lstStyle/>
+          <a:p>
+            <a:pPr>
+              <a:defRPr/>
+            </a:pPr>
+            <a:fld id="{14E332DF-2599-28D2-AA37-6680C3DB7713}" type="slidenum">
+              <a:rPr/>
+              <a:t/>
+            </a:fld>
+            <a:endParaRPr/>
+          </a:p>
+        </p:txBody>
+      </p:sp>
+    </p:spTree>
+  </p:cSld>
+  <p:clrMapOvr>
+    <a:masterClrMapping/>
+  </p:clrMapOvr>
+</p:notes>
+</file>
+
+<file path=ppt/notesSlides/notesSlide9.xml><?xml version="1.0" encoding="utf-8"?>
+<p:notes xmlns:a="http://schemas.openxmlformats.org/drawingml/2006/main" xmlns:r="http://schemas.openxmlformats.org/officeDocument/2006/relationships" xmlns:p="http://schemas.openxmlformats.org/presentationml/2006/main" xmlns:m="http://schemas.openxmlformats.org/officeDocument/2006/math" xmlns:w="http://schemas.openxmlformats.org/wordprocessingml/2006/main">
+  <p:cSld name="">
+    <p:spTree>
+      <p:nvGrpSpPr>
+        <p:cNvPr id="1" name=""/>
+        <p:cNvGrpSpPr/>
+        <p:nvPr/>
+      </p:nvGrpSpPr>
+      <p:grpSpPr bwMode="auto">
+        <a:xfrm>
+          <a:off x="0" y="0"/>
+          <a:ext cx="0" cy="0"/>
+          <a:chOff x="0" y="0"/>
+          <a:chExt cx="0" cy="0"/>
+        </a:xfrm>
+      </p:grpSpPr>
+      <p:sp>
+        <p:nvSpPr>
+          <p:cNvPr id="2069449407" name="Slide Image Placeholder 1"/>
+          <p:cNvSpPr>
+            <a:spLocks noChangeAspect="1" noGrp="1" noRot="1"/>
+          </p:cNvSpPr>
+          <p:nvPr>
+            <p:ph type="sldImg"/>
+          </p:nvPr>
+        </p:nvSpPr>
+        <p:spPr bwMode="auto"/>
+      </p:sp>
+      <p:sp>
+        <p:nvSpPr>
+          <p:cNvPr id="596036639" name="Notes Placeholder 2"/>
+          <p:cNvSpPr>
+            <a:spLocks noGrp="1"/>
+          </p:cNvSpPr>
+          <p:nvPr>
+            <p:ph type="body" idx="1"/>
+          </p:nvPr>
+        </p:nvSpPr>
+        <p:spPr bwMode="auto"/>
+        <p:txBody>
+          <a:bodyPr/>
+          <a:lstStyle/>
+          <a:p>
+            <a:pPr>
+              <a:defRPr/>
+            </a:pPr>
+            <a:endParaRPr/>
+          </a:p>
+        </p:txBody>
+      </p:sp>
+      <p:sp>
+        <p:nvSpPr>
+          <p:cNvPr id="286744172" name="Slide Number Placeholder 3"/>
           <p:cNvSpPr>
             <a:spLocks noGrp="1"/>
           </p:cNvSpPr>
@@ -1112,7 +1284,7 @@
       </p:grpSpPr>
       <p:sp>
         <p:nvSpPr>
-          <p:cNvPr id="1869460593" name="Shape 1059"/>
+          <p:cNvPr id="593198827" name="Shape 1059"/>
           <p:cNvSpPr>
             <a:spLocks noChangeArrowheads="1" noGrp="1"/>
           </p:cNvSpPr>
@@ -1235,7 +1407,7 @@
       </p:sp>
       <p:sp>
         <p:nvSpPr>
-          <p:cNvPr id="786129539" name="Shape 1060"/>
+          <p:cNvPr id="1440044971" name="Shape 1060"/>
           <p:cNvSpPr>
             <a:spLocks noChangeArrowheads="1" noGrp="1"/>
           </p:cNvSpPr>
@@ -1326,7 +1498,7 @@
       </p:sp>
       <p:sp>
         <p:nvSpPr>
-          <p:cNvPr id="2065599871" name="Shape 1061"/>
+          <p:cNvPr id="936130814" name="Shape 1061"/>
           <p:cNvSpPr>
             <a:spLocks noChangeArrowheads="1" noGrp="1"/>
           </p:cNvSpPr>
@@ -1412,7 +1584,7 @@
       </p:sp>
       <p:sp>
         <p:nvSpPr>
-          <p:cNvPr id="1254432756" name="Shape 1062"/>
+          <p:cNvPr id="1500145601" name="Shape 1062"/>
           <p:cNvSpPr>
             <a:spLocks noChangeArrowheads="1" noGrp="1"/>
           </p:cNvSpPr>
@@ -1490,7 +1662,7 @@
       </p:sp>
       <p:sp>
         <p:nvSpPr>
-          <p:cNvPr id="1788623455" name="Shape 1063"/>
+          <p:cNvPr id="962435039" name="Shape 1063"/>
           <p:cNvSpPr>
             <a:spLocks noChangeArrowheads="1" noGrp="1"/>
           </p:cNvSpPr>
@@ -1568,7 +1740,7 @@
       </p:sp>
       <p:sp>
         <p:nvSpPr>
-          <p:cNvPr id="1870270660" name="Subtitle 2"/>
+          <p:cNvPr id="2037772395" name="Subtitle 2"/>
           <p:cNvSpPr>
             <a:spLocks noGrp="1"/>
           </p:cNvSpPr>
@@ -1691,7 +1863,7 @@
       </p:sp>
       <p:sp>
         <p:nvSpPr>
-          <p:cNvPr id="1043724681" name="Date Placeholder 3"/>
+          <p:cNvPr id="694296761" name="Date Placeholder 3"/>
           <p:cNvSpPr>
             <a:spLocks noGrp="1"/>
           </p:cNvSpPr>
@@ -1717,7 +1889,7 @@
       </p:sp>
       <p:sp>
         <p:nvSpPr>
-          <p:cNvPr id="1082268170" name="Footer Placeholder 4"/>
+          <p:cNvPr id="1451787354" name="Footer Placeholder 4"/>
           <p:cNvSpPr>
             <a:spLocks noGrp="1"/>
           </p:cNvSpPr>
@@ -1739,7 +1911,7 @@
       </p:sp>
       <p:sp>
         <p:nvSpPr>
-          <p:cNvPr id="2048400607" name="Slide Number Placeholder 5"/>
+          <p:cNvPr id="1804110981" name="Slide Number Placeholder 5"/>
           <p:cNvSpPr>
             <a:spLocks noGrp="1"/>
           </p:cNvSpPr>
@@ -1765,7 +1937,7 @@
       </p:sp>
       <p:sp>
         <p:nvSpPr>
-          <p:cNvPr id="717225057" name="Title 6"/>
+          <p:cNvPr id="1083776013" name="Title 6"/>
           <p:cNvSpPr>
             <a:spLocks noGrp="1"/>
           </p:cNvSpPr>
@@ -1825,7 +1997,7 @@
       </p:grpSpPr>
       <p:sp>
         <p:nvSpPr>
-          <p:cNvPr id="825653024" name="Title 1"/>
+          <p:cNvPr id="16015873" name="Title 1"/>
           <p:cNvSpPr>
             <a:spLocks noGrp="1"/>
           </p:cNvSpPr>
@@ -1851,7 +2023,7 @@
       </p:sp>
       <p:sp>
         <p:nvSpPr>
-          <p:cNvPr id="608947743" name="Vertical Text Placeholder 2"/>
+          <p:cNvPr id="703479768" name="Vertical Text Placeholder 2"/>
           <p:cNvSpPr>
             <a:spLocks noGrp="1"/>
           </p:cNvSpPr>
@@ -1917,7 +2089,7 @@
       </p:sp>
       <p:sp>
         <p:nvSpPr>
-          <p:cNvPr id="1028521474" name="Date Placeholder 3"/>
+          <p:cNvPr id="490364958" name="Date Placeholder 3"/>
           <p:cNvSpPr>
             <a:spLocks noGrp="1"/>
           </p:cNvSpPr>
@@ -1943,7 +2115,7 @@
       </p:sp>
       <p:sp>
         <p:nvSpPr>
-          <p:cNvPr id="1496210120" name="Footer Placeholder 4"/>
+          <p:cNvPr id="27903344" name="Footer Placeholder 4"/>
           <p:cNvSpPr>
             <a:spLocks noGrp="1"/>
           </p:cNvSpPr>
@@ -1965,7 +2137,7 @@
       </p:sp>
       <p:sp>
         <p:nvSpPr>
-          <p:cNvPr id="4723927" name="Slide Number Placeholder 5"/>
+          <p:cNvPr id="1075261573" name="Slide Number Placeholder 5"/>
           <p:cNvSpPr>
             <a:spLocks noGrp="1"/>
           </p:cNvSpPr>
@@ -2016,7 +2188,7 @@
       </p:grpSpPr>
       <p:sp>
         <p:nvSpPr>
-          <p:cNvPr id="380743524" name="Vertical Title 1"/>
+          <p:cNvPr id="1478176562" name="Vertical Title 1"/>
           <p:cNvSpPr>
             <a:spLocks noGrp="1"/>
           </p:cNvSpPr>
@@ -2051,7 +2223,7 @@
       </p:sp>
       <p:sp>
         <p:nvSpPr>
-          <p:cNvPr id="1133908295" name="Vertical Text Placeholder 2"/>
+          <p:cNvPr id="1982973205" name="Vertical Text Placeholder 2"/>
           <p:cNvSpPr>
             <a:spLocks noGrp="1"/>
           </p:cNvSpPr>
@@ -2122,7 +2294,7 @@
       </p:sp>
       <p:sp>
         <p:nvSpPr>
-          <p:cNvPr id="1231161217" name="Date Placeholder 3"/>
+          <p:cNvPr id="1974783373" name="Date Placeholder 3"/>
           <p:cNvSpPr>
             <a:spLocks noGrp="1"/>
           </p:cNvSpPr>
@@ -2148,7 +2320,7 @@
       </p:sp>
       <p:sp>
         <p:nvSpPr>
-          <p:cNvPr id="1730099518" name="Footer Placeholder 4"/>
+          <p:cNvPr id="364977969" name="Footer Placeholder 4"/>
           <p:cNvSpPr>
             <a:spLocks noGrp="1"/>
           </p:cNvSpPr>
@@ -2170,7 +2342,7 @@
       </p:sp>
       <p:sp>
         <p:nvSpPr>
-          <p:cNvPr id="569838858" name="Slide Number Placeholder 5"/>
+          <p:cNvPr id="384172712" name="Slide Number Placeholder 5"/>
           <p:cNvSpPr>
             <a:spLocks noGrp="1"/>
           </p:cNvSpPr>
@@ -2221,7 +2393,7 @@
       </p:grpSpPr>
       <p:sp>
         <p:nvSpPr>
-          <p:cNvPr id="248288446" name="Title 1"/>
+          <p:cNvPr id="1716484903" name="Title 1"/>
           <p:cNvSpPr>
             <a:spLocks noGrp="1"/>
           </p:cNvSpPr>
@@ -2247,7 +2419,7 @@
       </p:sp>
       <p:sp>
         <p:nvSpPr>
-          <p:cNvPr id="1051737216" name="Content Placeholder 2"/>
+          <p:cNvPr id="1153847357" name="Content Placeholder 2"/>
           <p:cNvSpPr>
             <a:spLocks noGrp="1"/>
           </p:cNvSpPr>
@@ -2313,7 +2485,7 @@
       </p:sp>
       <p:sp>
         <p:nvSpPr>
-          <p:cNvPr id="1119281319" name="Date Placeholder 3"/>
+          <p:cNvPr id="889488967" name="Date Placeholder 3"/>
           <p:cNvSpPr>
             <a:spLocks noGrp="1"/>
           </p:cNvSpPr>
@@ -2339,7 +2511,7 @@
       </p:sp>
       <p:sp>
         <p:nvSpPr>
-          <p:cNvPr id="1724964292" name="Footer Placeholder 4"/>
+          <p:cNvPr id="305393206" name="Footer Placeholder 4"/>
           <p:cNvSpPr>
             <a:spLocks noGrp="1"/>
           </p:cNvSpPr>
@@ -2361,7 +2533,7 @@
       </p:sp>
       <p:sp>
         <p:nvSpPr>
-          <p:cNvPr id="133652280" name="Slide Number Placeholder 5"/>
+          <p:cNvPr id="930934391" name="Slide Number Placeholder 5"/>
           <p:cNvSpPr>
             <a:spLocks noGrp="1"/>
           </p:cNvSpPr>
@@ -2412,7 +2584,7 @@
       </p:grpSpPr>
       <p:sp>
         <p:nvSpPr>
-          <p:cNvPr id="352312761" name="Title 1"/>
+          <p:cNvPr id="1906203635" name="Title 1"/>
           <p:cNvSpPr>
             <a:spLocks noGrp="1"/>
           </p:cNvSpPr>
@@ -2447,7 +2619,7 @@
       </p:sp>
       <p:sp>
         <p:nvSpPr>
-          <p:cNvPr id="1524868250" name="Text Placeholder 2"/>
+          <p:cNvPr id="1513030600" name="Text Placeholder 2"/>
           <p:cNvSpPr>
             <a:spLocks noGrp="1"/>
           </p:cNvSpPr>
@@ -2569,7 +2741,7 @@
       </p:sp>
       <p:sp>
         <p:nvSpPr>
-          <p:cNvPr id="1861746368" name="Date Placeholder 3"/>
+          <p:cNvPr id="1132512516" name="Date Placeholder 3"/>
           <p:cNvSpPr>
             <a:spLocks noGrp="1"/>
           </p:cNvSpPr>
@@ -2595,7 +2767,7 @@
       </p:sp>
       <p:sp>
         <p:nvSpPr>
-          <p:cNvPr id="2045043956" name="Footer Placeholder 4"/>
+          <p:cNvPr id="2081729118" name="Footer Placeholder 4"/>
           <p:cNvSpPr>
             <a:spLocks noGrp="1"/>
           </p:cNvSpPr>
@@ -2617,7 +2789,7 @@
       </p:sp>
       <p:sp>
         <p:nvSpPr>
-          <p:cNvPr id="1857062716" name="Slide Number Placeholder 5"/>
+          <p:cNvPr id="222970605" name="Slide Number Placeholder 5"/>
           <p:cNvSpPr>
             <a:spLocks noGrp="1"/>
           </p:cNvSpPr>
@@ -2668,7 +2840,7 @@
       </p:grpSpPr>
       <p:sp>
         <p:nvSpPr>
-          <p:cNvPr id="1356371984" name="Title 1"/>
+          <p:cNvPr id="1724170498" name="Title 1"/>
           <p:cNvSpPr>
             <a:spLocks noGrp="1"/>
           </p:cNvSpPr>
@@ -2694,7 +2866,7 @@
       </p:sp>
       <p:sp>
         <p:nvSpPr>
-          <p:cNvPr id="878512103" name="Content Placeholder 2"/>
+          <p:cNvPr id="1010421087" name="Content Placeholder 2"/>
           <p:cNvSpPr>
             <a:spLocks noGrp="1"/>
           </p:cNvSpPr>
@@ -2793,7 +2965,7 @@
       </p:sp>
       <p:sp>
         <p:nvSpPr>
-          <p:cNvPr id="619275361" name="Content Placeholder 3"/>
+          <p:cNvPr id="332829360" name="Content Placeholder 3"/>
           <p:cNvSpPr>
             <a:spLocks noGrp="1"/>
           </p:cNvSpPr>
@@ -2892,7 +3064,7 @@
       </p:sp>
       <p:sp>
         <p:nvSpPr>
-          <p:cNvPr id="99343159" name="Date Placeholder 4"/>
+          <p:cNvPr id="496068048" name="Date Placeholder 4"/>
           <p:cNvSpPr>
             <a:spLocks noGrp="1"/>
           </p:cNvSpPr>
@@ -2918,7 +3090,7 @@
       </p:sp>
       <p:sp>
         <p:nvSpPr>
-          <p:cNvPr id="150923601" name="Footer Placeholder 5"/>
+          <p:cNvPr id="732596260" name="Footer Placeholder 5"/>
           <p:cNvSpPr>
             <a:spLocks noGrp="1"/>
           </p:cNvSpPr>
@@ -2940,7 +3112,7 @@
       </p:sp>
       <p:sp>
         <p:nvSpPr>
-          <p:cNvPr id="1500724043" name="Slide Number Placeholder 6"/>
+          <p:cNvPr id="983219877" name="Slide Number Placeholder 6"/>
           <p:cNvSpPr>
             <a:spLocks noGrp="1"/>
           </p:cNvSpPr>
@@ -2991,7 +3163,7 @@
       </p:grpSpPr>
       <p:sp>
         <p:nvSpPr>
-          <p:cNvPr id="135584551" name="Title 1"/>
+          <p:cNvPr id="814879057" name="Title 1"/>
           <p:cNvSpPr>
             <a:spLocks noGrp="1"/>
           </p:cNvSpPr>
@@ -3021,7 +3193,7 @@
       </p:sp>
       <p:sp>
         <p:nvSpPr>
-          <p:cNvPr id="853339620" name="Text Placeholder 2"/>
+          <p:cNvPr id="532343426" name="Text Placeholder 2"/>
           <p:cNvSpPr>
             <a:spLocks noGrp="1"/>
           </p:cNvSpPr>
@@ -3089,7 +3261,7 @@
       </p:sp>
       <p:sp>
         <p:nvSpPr>
-          <p:cNvPr id="1158724772" name="Content Placeholder 3"/>
+          <p:cNvPr id="1271388851" name="Content Placeholder 3"/>
           <p:cNvSpPr>
             <a:spLocks noGrp="1"/>
           </p:cNvSpPr>
@@ -3188,7 +3360,7 @@
       </p:sp>
       <p:sp>
         <p:nvSpPr>
-          <p:cNvPr id="1754445514" name="Text Placeholder 4"/>
+          <p:cNvPr id="1125747004" name="Text Placeholder 4"/>
           <p:cNvSpPr>
             <a:spLocks noGrp="1"/>
           </p:cNvSpPr>
@@ -3256,7 +3428,7 @@
       </p:sp>
       <p:sp>
         <p:nvSpPr>
-          <p:cNvPr id="456953356" name="Content Placeholder 5"/>
+          <p:cNvPr id="447668310" name="Content Placeholder 5"/>
           <p:cNvSpPr>
             <a:spLocks noGrp="1"/>
           </p:cNvSpPr>
@@ -3355,7 +3527,7 @@
       </p:sp>
       <p:sp>
         <p:nvSpPr>
-          <p:cNvPr id="897144703" name="Date Placeholder 6"/>
+          <p:cNvPr id="1970278928" name="Date Placeholder 6"/>
           <p:cNvSpPr>
             <a:spLocks noGrp="1"/>
           </p:cNvSpPr>
@@ -3381,7 +3553,7 @@
       </p:sp>
       <p:sp>
         <p:nvSpPr>
-          <p:cNvPr id="1349391697" name="Footer Placeholder 7"/>
+          <p:cNvPr id="1354121202" name="Footer Placeholder 7"/>
           <p:cNvSpPr>
             <a:spLocks noGrp="1"/>
           </p:cNvSpPr>
@@ -3403,7 +3575,7 @@
       </p:sp>
       <p:sp>
         <p:nvSpPr>
-          <p:cNvPr id="1227761911" name="Slide Number Placeholder 8"/>
+          <p:cNvPr id="458953586" name="Slide Number Placeholder 8"/>
           <p:cNvSpPr>
             <a:spLocks noGrp="1"/>
           </p:cNvSpPr>
@@ -3454,7 +3626,7 @@
       </p:grpSpPr>
       <p:sp>
         <p:nvSpPr>
-          <p:cNvPr id="1835939926" name="Title 1"/>
+          <p:cNvPr id="1998137728" name="Title 1"/>
           <p:cNvSpPr>
             <a:spLocks noGrp="1"/>
           </p:cNvSpPr>
@@ -3480,7 +3652,7 @@
       </p:sp>
       <p:sp>
         <p:nvSpPr>
-          <p:cNvPr id="453192065" name="Date Placeholder 2"/>
+          <p:cNvPr id="1379770097" name="Date Placeholder 2"/>
           <p:cNvSpPr>
             <a:spLocks noGrp="1"/>
           </p:cNvSpPr>
@@ -3506,7 +3678,7 @@
       </p:sp>
       <p:sp>
         <p:nvSpPr>
-          <p:cNvPr id="1408271412" name="Footer Placeholder 3"/>
+          <p:cNvPr id="53930714" name="Footer Placeholder 3"/>
           <p:cNvSpPr>
             <a:spLocks noGrp="1"/>
           </p:cNvSpPr>
@@ -3528,7 +3700,7 @@
       </p:sp>
       <p:sp>
         <p:nvSpPr>
-          <p:cNvPr id="438167298" name="Slide Number Placeholder 4"/>
+          <p:cNvPr id="1961251077" name="Slide Number Placeholder 4"/>
           <p:cNvSpPr>
             <a:spLocks noGrp="1"/>
           </p:cNvSpPr>
@@ -3579,7 +3751,7 @@
       </p:grpSpPr>
       <p:sp>
         <p:nvSpPr>
-          <p:cNvPr id="1246420756" name="Date Placeholder 1"/>
+          <p:cNvPr id="1247777125" name="Date Placeholder 1"/>
           <p:cNvSpPr>
             <a:spLocks noGrp="1"/>
           </p:cNvSpPr>
@@ -3605,7 +3777,7 @@
       </p:sp>
       <p:sp>
         <p:nvSpPr>
-          <p:cNvPr id="899150681" name="Footer Placeholder 2"/>
+          <p:cNvPr id="1930101722" name="Footer Placeholder 2"/>
           <p:cNvSpPr>
             <a:spLocks noGrp="1"/>
           </p:cNvSpPr>
@@ -3627,7 +3799,7 @@
       </p:sp>
       <p:sp>
         <p:nvSpPr>
-          <p:cNvPr id="1670094451" name="Slide Number Placeholder 3"/>
+          <p:cNvPr id="69989703" name="Slide Number Placeholder 3"/>
           <p:cNvSpPr>
             <a:spLocks noGrp="1"/>
           </p:cNvSpPr>
@@ -3678,7 +3850,7 @@
       </p:grpSpPr>
       <p:sp>
         <p:nvSpPr>
-          <p:cNvPr id="1852984551" name="Title 1"/>
+          <p:cNvPr id="860939247" name="Title 1"/>
           <p:cNvSpPr>
             <a:spLocks noGrp="1"/>
           </p:cNvSpPr>
@@ -3713,7 +3885,7 @@
       </p:sp>
       <p:sp>
         <p:nvSpPr>
-          <p:cNvPr id="431086542" name="Content Placeholder 2"/>
+          <p:cNvPr id="1050503249" name="Content Placeholder 2"/>
           <p:cNvSpPr>
             <a:spLocks noGrp="1"/>
           </p:cNvSpPr>
@@ -3812,7 +3984,7 @@
       </p:sp>
       <p:sp>
         <p:nvSpPr>
-          <p:cNvPr id="69959350" name="Text Placeholder 3"/>
+          <p:cNvPr id="1102743475" name="Text Placeholder 3"/>
           <p:cNvSpPr>
             <a:spLocks noGrp="1"/>
           </p:cNvSpPr>
@@ -3880,7 +4052,7 @@
       </p:sp>
       <p:sp>
         <p:nvSpPr>
-          <p:cNvPr id="299143185" name="Date Placeholder 4"/>
+          <p:cNvPr id="1251194183" name="Date Placeholder 4"/>
           <p:cNvSpPr>
             <a:spLocks noGrp="1"/>
           </p:cNvSpPr>
@@ -3906,7 +4078,7 @@
       </p:sp>
       <p:sp>
         <p:nvSpPr>
-          <p:cNvPr id="1586032757" name="Footer Placeholder 5"/>
+          <p:cNvPr id="877092789" name="Footer Placeholder 5"/>
           <p:cNvSpPr>
             <a:spLocks noGrp="1"/>
           </p:cNvSpPr>
@@ -3928,7 +4100,7 @@
       </p:sp>
       <p:sp>
         <p:nvSpPr>
-          <p:cNvPr id="1134442176" name="Slide Number Placeholder 6"/>
+          <p:cNvPr id="1996411946" name="Slide Number Placeholder 6"/>
           <p:cNvSpPr>
             <a:spLocks noGrp="1"/>
           </p:cNvSpPr>
@@ -3979,7 +4151,7 @@
       </p:grpSpPr>
       <p:sp>
         <p:nvSpPr>
-          <p:cNvPr id="30734076" name="Title 1"/>
+          <p:cNvPr id="723796618" name="Title 1"/>
           <p:cNvSpPr>
             <a:spLocks noGrp="1"/>
           </p:cNvSpPr>
@@ -4014,7 +4186,7 @@
       </p:sp>
       <p:sp>
         <p:nvSpPr>
-          <p:cNvPr id="231057162" name="Picture Placeholder 2"/>
+          <p:cNvPr id="480104078" name="Picture Placeholder 2"/>
           <p:cNvSpPr>
             <a:spLocks noGrp="1"/>
           </p:cNvSpPr>
@@ -4078,7 +4250,7 @@
       </p:sp>
       <p:sp>
         <p:nvSpPr>
-          <p:cNvPr id="1339395642" name="Text Placeholder 3"/>
+          <p:cNvPr id="1907001834" name="Text Placeholder 3"/>
           <p:cNvSpPr>
             <a:spLocks noGrp="1"/>
           </p:cNvSpPr>
@@ -4146,7 +4318,7 @@
       </p:sp>
       <p:sp>
         <p:nvSpPr>
-          <p:cNvPr id="671653370" name="Date Placeholder 4"/>
+          <p:cNvPr id="774542992" name="Date Placeholder 4"/>
           <p:cNvSpPr>
             <a:spLocks noGrp="1"/>
           </p:cNvSpPr>
@@ -4172,7 +4344,7 @@
       </p:sp>
       <p:sp>
         <p:nvSpPr>
-          <p:cNvPr id="1561307685" name="Footer Placeholder 5"/>
+          <p:cNvPr id="1483468129" name="Footer Placeholder 5"/>
           <p:cNvSpPr>
             <a:spLocks noGrp="1"/>
           </p:cNvSpPr>
@@ -4194,7 +4366,7 @@
       </p:sp>
       <p:sp>
         <p:nvSpPr>
-          <p:cNvPr id="1170819538" name="Slide Number Placeholder 6"/>
+          <p:cNvPr id="836146933" name="Slide Number Placeholder 6"/>
           <p:cNvSpPr>
             <a:spLocks noGrp="1"/>
           </p:cNvSpPr>
@@ -4250,7 +4422,7 @@
       </p:grpSpPr>
       <p:sp>
         <p:nvSpPr>
-          <p:cNvPr id="1201074701" name="Shape 1059"/>
+          <p:cNvPr id="1123499025" name="Shape 1059"/>
           <p:cNvSpPr>
             <a:spLocks noChangeArrowheads="1" noGrp="1"/>
           </p:cNvSpPr>
@@ -4328,7 +4500,7 @@
       </p:sp>
       <p:sp>
         <p:nvSpPr>
-          <p:cNvPr id="756170903" name="Shape 1060"/>
+          <p:cNvPr id="1332137561" name="Shape 1060"/>
           <p:cNvSpPr>
             <a:spLocks noChangeArrowheads="1" noGrp="1"/>
           </p:cNvSpPr>
@@ -4409,7 +4581,7 @@
       </p:sp>
       <p:sp>
         <p:nvSpPr>
-          <p:cNvPr id="779169363" name="Shape 1061"/>
+          <p:cNvPr id="31622277" name="Shape 1061"/>
           <p:cNvSpPr>
             <a:spLocks noChangeArrowheads="1" noGrp="1"/>
           </p:cNvSpPr>
@@ -4527,7 +4699,7 @@
       </p:sp>
       <p:sp>
         <p:nvSpPr>
-          <p:cNvPr id="906965478" name="Title 1"/>
+          <p:cNvPr id="333259525" name="Title 1"/>
           <p:cNvSpPr>
             <a:spLocks noGrp="1"/>
           </p:cNvSpPr>
@@ -4563,7 +4735,7 @@
       </p:sp>
       <p:sp>
         <p:nvSpPr>
-          <p:cNvPr id="2069308681" name="Text Placeholder 2"/>
+          <p:cNvPr id="1126124611" name="Text Placeholder 2"/>
           <p:cNvSpPr>
             <a:spLocks noGrp="1"/>
           </p:cNvSpPr>
@@ -4639,7 +4811,7 @@
       </p:sp>
       <p:sp>
         <p:nvSpPr>
-          <p:cNvPr id="4846899" name="Date Placeholder 3"/>
+          <p:cNvPr id="1594488426" name="Date Placeholder 3"/>
           <p:cNvSpPr>
             <a:spLocks noGrp="1"/>
           </p:cNvSpPr>
@@ -4683,7 +4855,7 @@
       </p:sp>
       <p:sp>
         <p:nvSpPr>
-          <p:cNvPr id="751195963" name="Footer Placeholder 4"/>
+          <p:cNvPr id="1573854639" name="Footer Placeholder 4"/>
           <p:cNvSpPr>
             <a:spLocks noGrp="1"/>
           </p:cNvSpPr>
@@ -4723,7 +4895,7 @@
       </p:sp>
       <p:sp>
         <p:nvSpPr>
-          <p:cNvPr id="2006390694" name="Slide Number Placeholder 5"/>
+          <p:cNvPr id="1179155136" name="Slide Number Placeholder 5"/>
           <p:cNvSpPr>
             <a:spLocks noGrp="1"/>
           </p:cNvSpPr>
@@ -5071,7 +5243,7 @@
       </p:grpSpPr>
       <p:sp>
         <p:nvSpPr>
-          <p:cNvPr id="1334267908" name="Title 1"/>
+          <p:cNvPr id="1331088816" name="Title 1"/>
           <p:cNvSpPr>
             <a:spLocks noGrp="1"/>
           </p:cNvSpPr>
@@ -5097,7 +5269,7 @@
       </p:sp>
       <p:sp>
         <p:nvSpPr>
-          <p:cNvPr id="1921203335" name="Subtitle 2"/>
+          <p:cNvPr id="817025293" name="Subtitle 2"/>
           <p:cNvSpPr>
             <a:spLocks noGrp="1"/>
           </p:cNvSpPr>
@@ -5152,7 +5324,7 @@
       </p:grpSpPr>
       <p:sp>
         <p:nvSpPr>
-          <p:cNvPr id="1126279575" name="Title 1"/>
+          <p:cNvPr id="1586672053" name="Title 1"/>
           <p:cNvSpPr>
             <a:spLocks noGrp="1"/>
           </p:cNvSpPr>
@@ -5170,15 +5342,19 @@
             </a:pPr>
             <a:r>
               <a:rPr lang="ru-RU"/>
-              <a:t>Основное устройство системы</a:t>
-            </a:r>
-            <a:endParaRPr/>
-          </a:p>
-        </p:txBody>
-      </p:sp>
-      <p:sp>
-        <p:nvSpPr>
-          <p:cNvPr id="217289123" name="Content Placeholder 2"/>
+              <a:t>За что ругают </a:t>
+            </a:r>
+            <a:r>
+              <a:rPr lang="en-US"/>
+              <a:t>NixOS</a:t>
+            </a:r>
+            <a:endParaRPr/>
+          </a:p>
+        </p:txBody>
+      </p:sp>
+      <p:sp>
+        <p:nvSpPr>
+          <p:cNvPr id="990383518" name="Content Placeholder 2"/>
           <p:cNvSpPr>
             <a:spLocks noGrp="1"/>
           </p:cNvSpPr>
@@ -5188,42 +5364,82 @@
         </p:nvSpPr>
         <p:spPr bwMode="auto"/>
         <p:txBody>
-          <a:bodyPr/>
+          <a:bodyPr vertOverflow="overflow" horzOverflow="overflow" vert="horz" wrap="square" lIns="91440" tIns="45720" rIns="91440" bIns="45720" numCol="1" spcCol="0" rtlCol="0" fromWordArt="0" anchor="t" anchorCtr="0" forceAA="0" upright="0" compatLnSpc="0">
+            <a:normAutofit fontScale="60000" lnSpcReduction="8000"/>
+          </a:bodyPr>
           <a:lstStyle/>
           <a:p>
             <a:pPr>
               <a:defRPr/>
             </a:pPr>
             <a:r>
-              <a:rPr lang="ru-RU" sz="3200" b="0" i="0" u="none" strike="noStrike" cap="none" spc="0">
-                <a:solidFill>
-                  <a:schemeClr val="tx1">
-                    <a:lumMod val="75000"/>
-                    <a:lumOff val="25000"/>
-                  </a:schemeClr>
-                </a:solidFill>
-                <a:latin typeface="+mn-lt"/>
-                <a:ea typeface="+mn-ea"/>
-                <a:cs typeface="+mn-cs"/>
-              </a:rPr>
-              <a:t>Ключевая особенность идеи – декларативный принцип. Конфигом будет определяться вся система (система инициализации, пакеты, пользователи, ...)</a:t>
-            </a:r>
-            <a:r>
-              <a:rPr lang="ru-RU" sz="3200" b="0" i="0" u="none" strike="noStrike" cap="none" spc="0">
-                <a:solidFill>
-                  <a:schemeClr val="tx1">
-                    <a:lumMod val="75000"/>
-                    <a:lumOff val="25000"/>
-                  </a:schemeClr>
-                </a:solidFill>
-                <a:latin typeface="+mn-lt"/>
-                <a:ea typeface="+mn-ea"/>
-                <a:cs typeface="+mn-cs"/>
-              </a:rPr>
-              <a:t>. Пакеты будут расположены в </a:t>
-            </a:r>
-            <a:r>
-              <a:rPr lang="en-US" sz="3200" b="0" i="0" u="none" strike="noStrike" cap="none" spc="0">
+              <a:rPr lang="ru-RU" b="1"/>
+              <a:t>Крутая кривая обучения</a:t>
+            </a:r>
+            <a:r>
+              <a:rPr lang="ru-RU"/>
+              <a:t> (</a:t>
+            </a:r>
+            <a:r>
+              <a:rPr lang="en-US"/>
+              <a:t>linux, nix, </a:t>
+            </a:r>
+            <a:r>
+              <a:rPr lang="en-US"/>
+              <a:t>flake, </a:t>
+            </a:r>
+            <a:r>
+              <a:rPr lang="ru-RU"/>
+              <a:t>система модулей, </a:t>
+            </a:r>
+            <a:r>
+              <a:rPr lang="en-US"/>
+              <a:t>derivations, overlays</a:t>
+            </a:r>
+            <a:r>
+              <a:rPr lang="ru-RU"/>
+              <a:t>)</a:t>
+            </a:r>
+            <a:endParaRPr lang="en-US"/>
+          </a:p>
+          <a:p>
+            <a:pPr>
+              <a:defRPr/>
+            </a:pPr>
+            <a:endParaRPr lang="en-US"/>
+          </a:p>
+          <a:p>
+            <a:pPr>
+              <a:defRPr/>
+            </a:pPr>
+            <a:r>
+              <a:rPr lang="ru-RU" b="1"/>
+              <a:t>Непонятные ошибки</a:t>
+            </a:r>
+            <a:r>
+              <a:rPr lang="ru-RU"/>
+              <a:t> языка </a:t>
+            </a:r>
+            <a:r>
+              <a:rPr lang="en-US"/>
+              <a:t>nix</a:t>
+            </a:r>
+            <a:endParaRPr lang="en-US"/>
+          </a:p>
+          <a:p>
+            <a:pPr marL="0" indent="0">
+              <a:buFont typeface="Arial"/>
+              <a:buNone/>
+              <a:defRPr/>
+            </a:pPr>
+            <a:endParaRPr lang="en-US"/>
+          </a:p>
+          <a:p>
+            <a:pPr>
+              <a:defRPr/>
+            </a:pPr>
+            <a:r>
+              <a:rPr lang="en-US" sz="3200" b="1" i="0" u="none" strike="noStrike" cap="none" spc="0">
                 <a:solidFill>
                   <a:schemeClr val="tx1">
                     <a:lumMod val="75000"/>
@@ -5234,29 +5450,109 @@
                 <a:ea typeface="Arial"/>
                 <a:cs typeface="Arial"/>
               </a:rPr>
-              <a:t>read-only </a:t>
-            </a:r>
-            <a:r>
-              <a:rPr lang="ru-RU" sz="3200" b="0" i="0" u="none" strike="noStrike" cap="none" spc="0">
-                <a:solidFill>
-                  <a:schemeClr val="tx1">
-                    <a:lumMod val="75000"/>
-                    <a:lumOff val="25000"/>
-                  </a:schemeClr>
-                </a:solidFill>
-                <a:latin typeface="Arial"/>
-                <a:ea typeface="Arial"/>
-                <a:cs typeface="Arial"/>
-              </a:rPr>
-              <a:t>директории, изолированно друг от друга, хранение по хешу (благодаря этому можно иметь сразу несколько версий программ и конфликтующее ПО)</a:t>
-            </a:r>
-            <a:endParaRPr sz="3200"/>
-          </a:p>
-          <a:p>
-            <a:pPr>
-              <a:defRPr/>
-            </a:pPr>
-            <a:endParaRPr/>
+              <a:t>Документация и примеры разрознены</a:t>
+            </a:r>
+            <a:endParaRPr lang="ru-RU" b="1"/>
+          </a:p>
+          <a:p>
+            <a:pPr>
+              <a:defRPr/>
+            </a:pPr>
+            <a:endParaRPr lang="en-US"/>
+          </a:p>
+          <a:p>
+            <a:pPr>
+              <a:defRPr/>
+            </a:pPr>
+            <a:r>
+              <a:rPr lang="ru-RU"/>
+              <a:t>Нестандартные версии, флаги при компиляции, проприетарные зависимости, непопулярные программы </a:t>
+            </a:r>
+            <a:r>
+              <a:rPr lang="ru-RU" b="1"/>
+              <a:t>требуют код</a:t>
+            </a:r>
+            <a:r>
+              <a:rPr lang="ru-RU"/>
+              <a:t> на </a:t>
+            </a:r>
+            <a:r>
+              <a:rPr lang="en-US"/>
+              <a:t>nix-</a:t>
+            </a:r>
+            <a:r>
+              <a:rPr lang="ru-RU"/>
+              <a:t>е (либо разбираться с </a:t>
+            </a:r>
+            <a:r>
+              <a:rPr lang="en-US"/>
+              <a:t>flake</a:t>
+            </a:r>
+            <a:r>
+              <a:rPr lang="ru-RU"/>
+              <a:t>)</a:t>
+            </a:r>
+            <a:endParaRPr lang="ru-RU"/>
+          </a:p>
+          <a:p>
+            <a:pPr>
+              <a:defRPr/>
+            </a:pPr>
+            <a:endParaRPr lang="ru-RU"/>
+          </a:p>
+          <a:p>
+            <a:pPr>
+              <a:defRPr/>
+            </a:pPr>
+            <a:r>
+              <a:rPr lang="ru-RU" b="1"/>
+              <a:t>Слишком много способов сделать одно и то же</a:t>
+            </a:r>
+            <a:endParaRPr lang="ru-RU"/>
+          </a:p>
+          <a:p>
+            <a:pPr>
+              <a:defRPr/>
+            </a:pPr>
+            <a:endParaRPr lang="ru-RU"/>
+          </a:p>
+          <a:p>
+            <a:pPr>
+              <a:defRPr/>
+            </a:pPr>
+            <a:r>
+              <a:rPr lang="en-US" b="1"/>
+              <a:t>Nix Profile </a:t>
+            </a:r>
+            <a:r>
+              <a:rPr lang="ru-RU" b="1"/>
+              <a:t>нарушает декларативность</a:t>
+            </a:r>
+            <a:endParaRPr lang="ru-RU"/>
+          </a:p>
+          <a:p>
+            <a:pPr>
+              <a:defRPr/>
+            </a:pPr>
+            <a:endParaRPr lang="ru-RU"/>
+          </a:p>
+          <a:p>
+            <a:pPr>
+              <a:defRPr/>
+            </a:pPr>
+            <a:r>
+              <a:rPr lang="ru-RU"/>
+              <a:t>Нужно постоянно поддерживать конфигурацию, </a:t>
+            </a:r>
+            <a:r>
+              <a:rPr lang="ru-RU" b="1"/>
+              <a:t>система становится проектом в </a:t>
+            </a:r>
+            <a:r>
+              <a:rPr lang="en-US" b="1"/>
+              <a:t>git</a:t>
+            </a:r>
+            <a:endParaRPr lang="ru-RU"/>
           </a:p>
         </p:txBody>
       </p:sp>
@@ -5295,7 +5591,7 @@
       </p:grpSpPr>
       <p:sp>
         <p:nvSpPr>
-          <p:cNvPr id="1127034950" name="Title 1"/>
+          <p:cNvPr id="737048710" name="Title 1"/>
           <p:cNvSpPr>
             <a:spLocks noGrp="1"/>
           </p:cNvSpPr>
@@ -5313,15 +5609,19 @@
             </a:pPr>
             <a:r>
               <a:rPr lang="ru-RU"/>
-              <a:t>Отличия от других дистрибутивов</a:t>
-            </a:r>
-            <a:endParaRPr/>
-          </a:p>
-        </p:txBody>
-      </p:sp>
-      <p:sp>
-        <p:nvSpPr>
-          <p:cNvPr id="322346136" name="Content Placeholder 2"/>
+              <a:t>Проблемы </a:t>
+            </a:r>
+            <a:r>
+              <a:rPr lang="en-US"/>
+              <a:t>NixOS</a:t>
+            </a:r>
+            <a:endParaRPr/>
+          </a:p>
+        </p:txBody>
+      </p:sp>
+      <p:sp>
+        <p:nvSpPr>
+          <p:cNvPr id="934581329" name="Content Placeholder 2"/>
           <p:cNvSpPr>
             <a:spLocks noGrp="1"/>
           </p:cNvSpPr>
@@ -5331,73 +5631,145 @@
         </p:nvSpPr>
         <p:spPr bwMode="auto"/>
         <p:txBody>
-          <a:bodyPr vertOverflow="overflow" horzOverflow="overflow" vert="horz" wrap="square" lIns="91440" tIns="45720" rIns="91440" bIns="45720" numCol="1" spcCol="0" rtlCol="0" fromWordArt="0" anchor="t" anchorCtr="0" forceAA="0" upright="0" compatLnSpc="0">
-            <a:normAutofit/>
-          </a:bodyPr>
+          <a:bodyPr/>
           <a:lstStyle/>
           <a:p>
             <a:pPr>
               <a:defRPr/>
             </a:pPr>
             <a:r>
+              <a:rPr lang="ru-RU" sz="2400" b="1"/>
+              <a:t>В устройстве конфигурации</a:t>
+            </a:r>
+            <a:r>
+              <a:rPr lang="en-US" sz="2400" b="1"/>
+              <a:t>:</a:t>
+            </a:r>
+            <a:endParaRPr sz="2400" b="1"/>
+          </a:p>
+          <a:p>
+            <a:pPr lvl="1">
+              <a:defRPr/>
+            </a:pPr>
+            <a:r>
+              <a:rPr lang="ru-RU" sz="2400" b="0"/>
+              <a:t>Есть неявные опции (например, </a:t>
+            </a:r>
+            <a:r>
+              <a:rPr lang="en-US" sz="2400" b="0"/>
+              <a:t>glibc, coreutils, </a:t>
+            </a:r>
+            <a:r>
+              <a:rPr lang="ru-RU" sz="2400" b="0"/>
+              <a:t>система инициализации</a:t>
+            </a:r>
+            <a:r>
+              <a:rPr lang="ru-RU" sz="2400" b="0"/>
+              <a:t>)</a:t>
+            </a:r>
+            <a:endParaRPr sz="2400" b="0"/>
+          </a:p>
+          <a:p>
+            <a:pPr lvl="1">
+              <a:defRPr/>
+            </a:pPr>
+            <a:r>
               <a:rPr lang="ru-RU" sz="2400"/>
-              <a:t>В отличие от классических дистрибутивов (</a:t>
-            </a:r>
-            <a:r>
-              <a:rPr lang="en-US" sz="2400"/>
-              <a:t>debian, ubuntu, arch</a:t>
-            </a:r>
+              <a:t>Опции разбросаны по директориям</a:t>
+            </a:r>
+            <a:endParaRPr sz="2400"/>
+          </a:p>
+          <a:p>
+            <a:pPr lvl="1">
+              <a:defRPr/>
+            </a:pPr>
             <a:r>
               <a:rPr lang="ru-RU" sz="2400"/>
-              <a:t>)</a:t>
-            </a:r>
-            <a:r>
-              <a:rPr lang="en-US" sz="2400"/>
-              <a:t> </a:t>
-            </a:r>
+              <a:t>Сложность поддержки конфигурации</a:t>
+            </a:r>
+            <a:endParaRPr sz="2400"/>
+          </a:p>
+          <a:p>
+            <a:pPr lvl="1">
+              <a:defRPr/>
+            </a:pPr>
             <a:r>
               <a:rPr lang="ru-RU" sz="2400"/>
-              <a:t>в такой системе установка пакетов производится не императивными комадами, а декларативным конфигом (список программ). Также, изоляция пакетов приводит к детерменированности ОС.</a:t>
+              <a:t>Много способов сделать одно и то же</a:t>
             </a:r>
             <a:endParaRPr sz="2400"/>
           </a:p>
           <a:p>
-            <a:pPr>
-              <a:defRPr/>
-            </a:pPr>
+            <a:pPr lvl="1">
+              <a:defRPr/>
+            </a:pPr>
+            <a:r>
+              <a:rPr lang="ru-RU" sz="2400"/>
+              <a:t>Переусложнённость кода, бойлерплейт</a:t>
+            </a:r>
             <a:endParaRPr sz="2400"/>
           </a:p>
           <a:p>
-            <a:pPr>
-              <a:defRPr/>
-            </a:pPr>
-            <a:r>
-              <a:rPr lang="ru-RU" sz="2400"/>
-              <a:t>В </a:t>
-            </a:r>
-            <a:r>
-              <a:rPr lang="en-US" sz="2400"/>
-              <a:t>NixOS </a:t>
-            </a:r>
-            <a:r>
-              <a:rPr lang="ru-RU" sz="2400"/>
-              <a:t>реализована функция откатов – на этапе загрузки вы можете выбрать предыдущую деривацию системы (сохраняется построенную по конфигу систему до очистки, как в </a:t>
-            </a:r>
-            <a:r>
-              <a:rPr lang="en-US" sz="2400"/>
-              <a:t>git</a:t>
-            </a:r>
-            <a:r>
-              <a:rPr lang="ru-RU" sz="2400"/>
-              <a:t>), если последняя деривация содержит ошибки, не функционирует или не соответствует требованиям. Такой же функционал легко реализовать и в моем концепте.</a:t>
-            </a:r>
-            <a:endParaRPr sz="2400"/>
-          </a:p>
-          <a:p>
-            <a:pPr>
-              <a:defRPr/>
-            </a:pPr>
-            <a:endParaRPr sz="2400"/>
+            <a:pPr lvl="0">
+              <a:defRPr/>
+            </a:pPr>
+            <a:r>
+              <a:rPr lang="ru-RU" sz="2400" b="1"/>
+              <a:t>В языке </a:t>
+            </a:r>
+            <a:r>
+              <a:rPr lang="en-US" sz="2400" b="1"/>
+              <a:t>Nix:</a:t>
+            </a:r>
+            <a:endParaRPr sz="2400" b="0"/>
+          </a:p>
+          <a:p>
+            <a:pPr lvl="1">
+              <a:defRPr/>
+            </a:pPr>
+            <a:r>
+              <a:rPr lang="ru-RU" sz="2400" b="0"/>
+              <a:t>Непонятные ошибки</a:t>
+            </a:r>
+            <a:endParaRPr sz="2400" b="0"/>
+          </a:p>
+          <a:p>
+            <a:pPr lvl="1">
+              <a:defRPr/>
+            </a:pPr>
+            <a:r>
+              <a:rPr lang="ru-RU" sz="2400" b="0"/>
+              <a:t>Необходимость изучения языка для пользования ОС</a:t>
+            </a:r>
+            <a:endParaRPr sz="2400" b="0"/>
+          </a:p>
+          <a:p>
+            <a:pPr lvl="0">
+              <a:defRPr/>
+            </a:pPr>
+            <a:r>
+              <a:rPr lang="ru-RU" sz="2400" b="1"/>
+              <a:t>В пакетном менеджере </a:t>
+            </a:r>
+            <a:r>
+              <a:rPr lang="en-US" sz="2400" b="1"/>
+              <a:t>Nix:</a:t>
+            </a:r>
+            <a:endParaRPr sz="2400" b="0"/>
+          </a:p>
+          <a:p>
+            <a:pPr lvl="1">
+              <a:defRPr/>
+            </a:pPr>
+            <a:r>
+              <a:rPr lang="en-US" sz="2400" b="0"/>
+              <a:t>Nix Profiles </a:t>
+            </a:r>
+            <a:r>
+              <a:rPr lang="ru-RU" sz="2400" b="0"/>
+              <a:t>нарушает декларативность</a:t>
+            </a:r>
+            <a:endParaRPr sz="2400" b="0"/>
           </a:p>
         </p:txBody>
       </p:sp>
@@ -5418,6 +5790,290 @@
 </file>
 
 <file path=ppt/slides/slide4.xml><?xml version="1.0" encoding="utf-8"?>
+<p:sld xmlns:a="http://schemas.openxmlformats.org/drawingml/2006/main" xmlns:r="http://schemas.openxmlformats.org/officeDocument/2006/relationships" xmlns:p="http://schemas.openxmlformats.org/presentationml/2006/main" xmlns:m="http://schemas.openxmlformats.org/officeDocument/2006/math" xmlns:w="http://schemas.openxmlformats.org/wordprocessingml/2006/main" xmlns:mc="http://schemas.openxmlformats.org/markup-compatibility/2006" showMasterPhAnim="0" showMasterSp="1" show="1">
+  <p:cSld name="">
+    <p:spTree>
+      <p:nvGrpSpPr>
+        <p:cNvPr id="1" name=""/>
+        <p:cNvGrpSpPr/>
+        <p:nvPr/>
+      </p:nvGrpSpPr>
+      <p:grpSpPr bwMode="auto">
+        <a:xfrm>
+          <a:off x="0" y="0"/>
+          <a:ext cx="0" cy="0"/>
+          <a:chOff x="0" y="0"/>
+          <a:chExt cx="0" cy="0"/>
+        </a:xfrm>
+      </p:grpSpPr>
+      <p:sp>
+        <p:nvSpPr>
+          <p:cNvPr id="1479063724" name="Title 1"/>
+          <p:cNvSpPr>
+            <a:spLocks noGrp="1"/>
+          </p:cNvSpPr>
+          <p:nvPr>
+            <p:ph type="title"/>
+          </p:nvPr>
+        </p:nvSpPr>
+        <p:spPr bwMode="auto"/>
+        <p:txBody>
+          <a:bodyPr/>
+          <a:lstStyle/>
+          <a:p>
+            <a:pPr>
+              <a:defRPr/>
+            </a:pPr>
+            <a:r>
+              <a:rPr lang="ru-RU"/>
+              <a:t>Основное устройство системы</a:t>
+            </a:r>
+            <a:endParaRPr/>
+          </a:p>
+        </p:txBody>
+      </p:sp>
+      <p:sp>
+        <p:nvSpPr>
+          <p:cNvPr id="1104601478" name="Content Placeholder 2"/>
+          <p:cNvSpPr>
+            <a:spLocks noGrp="1"/>
+          </p:cNvSpPr>
+          <p:nvPr>
+            <p:ph idx="1"/>
+          </p:nvPr>
+        </p:nvSpPr>
+        <p:spPr bwMode="auto"/>
+        <p:txBody>
+          <a:bodyPr/>
+          <a:lstStyle/>
+          <a:p>
+            <a:pPr>
+              <a:defRPr/>
+            </a:pPr>
+            <a:r>
+              <a:rPr lang="ru-RU" sz="3200" b="0" i="0" u="none" strike="noStrike" cap="none" spc="0">
+                <a:solidFill>
+                  <a:schemeClr val="tx1">
+                    <a:lumMod val="75000"/>
+                    <a:lumOff val="25000"/>
+                  </a:schemeClr>
+                </a:solidFill>
+                <a:latin typeface="+mn-lt"/>
+                <a:ea typeface="+mn-ea"/>
+                <a:cs typeface="+mn-cs"/>
+              </a:rPr>
+              <a:t>Ключевая особенность идеи – декларативный принцип. Конфигом будет определяться вся система (система инициализации, пакеты, пользователи, ...)</a:t>
+            </a:r>
+            <a:r>
+              <a:rPr lang="ru-RU" sz="3200" b="0" i="0" u="none" strike="noStrike" cap="none" spc="0">
+                <a:solidFill>
+                  <a:schemeClr val="tx1">
+                    <a:lumMod val="75000"/>
+                    <a:lumOff val="25000"/>
+                  </a:schemeClr>
+                </a:solidFill>
+                <a:latin typeface="+mn-lt"/>
+                <a:ea typeface="+mn-ea"/>
+                <a:cs typeface="+mn-cs"/>
+              </a:rPr>
+              <a:t>. Пакеты будут расположены в </a:t>
+            </a:r>
+            <a:r>
+              <a:rPr lang="en-US" sz="3200" b="0" i="0" u="none" strike="noStrike" cap="none" spc="0">
+                <a:solidFill>
+                  <a:schemeClr val="tx1">
+                    <a:lumMod val="75000"/>
+                    <a:lumOff val="25000"/>
+                  </a:schemeClr>
+                </a:solidFill>
+                <a:latin typeface="Arial"/>
+                <a:ea typeface="Arial"/>
+                <a:cs typeface="Arial"/>
+              </a:rPr>
+              <a:t>read-only </a:t>
+            </a:r>
+            <a:r>
+              <a:rPr lang="ru-RU" sz="3200" b="0" i="0" u="none" strike="noStrike" cap="none" spc="0">
+                <a:solidFill>
+                  <a:schemeClr val="tx1">
+                    <a:lumMod val="75000"/>
+                    <a:lumOff val="25000"/>
+                  </a:schemeClr>
+                </a:solidFill>
+                <a:latin typeface="Arial"/>
+                <a:ea typeface="Arial"/>
+                <a:cs typeface="Arial"/>
+              </a:rPr>
+              <a:t>директории, изолированно друг от друга, хранение по хешу (благодаря этому можно иметь сразу несколько версий программ и конфликтующее ПО)</a:t>
+            </a:r>
+            <a:endParaRPr sz="3200"/>
+          </a:p>
+          <a:p>
+            <a:pPr>
+              <a:defRPr/>
+            </a:pPr>
+            <a:endParaRPr/>
+          </a:p>
+        </p:txBody>
+      </p:sp>
+    </p:spTree>
+  </p:cSld>
+  <p:clrMapOvr>
+    <a:masterClrMapping/>
+  </p:clrMapOvr>
+  <mc:AlternateContent xmlns:mc="http://schemas.openxmlformats.org/markup-compatibility/2006">
+    <mc:Choice xmlns:p159="http://schemas.microsoft.com/office/powerpoint/2015/09/main" xmlns:p14="http://schemas.microsoft.com/office/powerpoint/2010/main" Requires="p159">
+      <p:transition p14:dur="2000" advClick="1"/>
+    </mc:Choice>
+    <mc:Fallback>
+      <p:transition advClick="1"/>
+    </mc:Fallback>
+  </mc:AlternateContent>
+</p:sld>
+</file>
+
+<file path=ppt/slides/slide5.xml><?xml version="1.0" encoding="utf-8"?>
+<p:sld xmlns:a="http://schemas.openxmlformats.org/drawingml/2006/main" xmlns:r="http://schemas.openxmlformats.org/officeDocument/2006/relationships" xmlns:p="http://schemas.openxmlformats.org/presentationml/2006/main" xmlns:m="http://schemas.openxmlformats.org/officeDocument/2006/math" xmlns:w="http://schemas.openxmlformats.org/wordprocessingml/2006/main" xmlns:mc="http://schemas.openxmlformats.org/markup-compatibility/2006" showMasterPhAnim="0" showMasterSp="1" show="1">
+  <p:cSld name="">
+    <p:spTree>
+      <p:nvGrpSpPr>
+        <p:cNvPr id="1" name=""/>
+        <p:cNvGrpSpPr/>
+        <p:nvPr/>
+      </p:nvGrpSpPr>
+      <p:grpSpPr bwMode="auto">
+        <a:xfrm>
+          <a:off x="0" y="0"/>
+          <a:ext cx="0" cy="0"/>
+          <a:chOff x="0" y="0"/>
+          <a:chExt cx="0" cy="0"/>
+        </a:xfrm>
+      </p:grpSpPr>
+      <p:sp>
+        <p:nvSpPr>
+          <p:cNvPr id="1705862135" name="Title 1"/>
+          <p:cNvSpPr>
+            <a:spLocks noGrp="1"/>
+          </p:cNvSpPr>
+          <p:nvPr>
+            <p:ph type="title"/>
+          </p:nvPr>
+        </p:nvSpPr>
+        <p:spPr bwMode="auto"/>
+        <p:txBody>
+          <a:bodyPr/>
+          <a:lstStyle/>
+          <a:p>
+            <a:pPr>
+              <a:defRPr/>
+            </a:pPr>
+            <a:r>
+              <a:rPr lang="ru-RU"/>
+              <a:t>Отличия от других дистрибутивов</a:t>
+            </a:r>
+            <a:endParaRPr/>
+          </a:p>
+        </p:txBody>
+      </p:sp>
+      <p:sp>
+        <p:nvSpPr>
+          <p:cNvPr id="1748095952" name="Content Placeholder 2"/>
+          <p:cNvSpPr>
+            <a:spLocks noGrp="1"/>
+          </p:cNvSpPr>
+          <p:nvPr>
+            <p:ph idx="1"/>
+          </p:nvPr>
+        </p:nvSpPr>
+        <p:spPr bwMode="auto"/>
+        <p:txBody>
+          <a:bodyPr vertOverflow="overflow" horzOverflow="overflow" vert="horz" wrap="square" lIns="91440" tIns="45720" rIns="91440" bIns="45720" numCol="1" spcCol="0" rtlCol="0" fromWordArt="0" anchor="t" anchorCtr="0" forceAA="0" upright="0" compatLnSpc="0">
+            <a:normAutofit/>
+          </a:bodyPr>
+          <a:lstStyle/>
+          <a:p>
+            <a:pPr>
+              <a:defRPr/>
+            </a:pPr>
+            <a:r>
+              <a:rPr lang="ru-RU" sz="2400"/>
+              <a:t>В отличие от классических дистрибутивов (</a:t>
+            </a:r>
+            <a:r>
+              <a:rPr lang="en-US" sz="2400"/>
+              <a:t>debian, ubuntu, arch</a:t>
+            </a:r>
+            <a:r>
+              <a:rPr lang="ru-RU" sz="2400"/>
+              <a:t>)</a:t>
+            </a:r>
+            <a:r>
+              <a:rPr lang="en-US" sz="2400"/>
+              <a:t> </a:t>
+            </a:r>
+            <a:r>
+              <a:rPr lang="ru-RU" sz="2400"/>
+              <a:t>в такой системе установка пакетов производится не императивными комадами, а декларативным конфигом (список программ). Также, изоляция пакетов приводит к детерменированности ОС.</a:t>
+            </a:r>
+            <a:endParaRPr sz="2400"/>
+          </a:p>
+          <a:p>
+            <a:pPr>
+              <a:defRPr/>
+            </a:pPr>
+            <a:endParaRPr sz="2400"/>
+          </a:p>
+          <a:p>
+            <a:pPr>
+              <a:defRPr/>
+            </a:pPr>
+            <a:r>
+              <a:rPr lang="ru-RU" sz="2400"/>
+              <a:t>В </a:t>
+            </a:r>
+            <a:r>
+              <a:rPr lang="en-US" sz="2400"/>
+              <a:t>NixOS </a:t>
+            </a:r>
+            <a:r>
+              <a:rPr lang="ru-RU" sz="2400"/>
+              <a:t>реализована функция откатов – на этапе загрузки вы можете выбрать предыдущую деривацию системы (сохраняется построенную по конфигу систему до очистки, как в </a:t>
+            </a:r>
+            <a:r>
+              <a:rPr lang="en-US" sz="2400"/>
+              <a:t>git</a:t>
+            </a:r>
+            <a:r>
+              <a:rPr lang="ru-RU" sz="2400"/>
+              <a:t>), если последняя деривация содержит ошибки, не функционирует или не соответствует требованиям. Такой же функционал легко реализовать и в моем концепте.</a:t>
+            </a:r>
+            <a:endParaRPr sz="2400"/>
+          </a:p>
+          <a:p>
+            <a:pPr>
+              <a:defRPr/>
+            </a:pPr>
+            <a:endParaRPr sz="2400"/>
+          </a:p>
+        </p:txBody>
+      </p:sp>
+    </p:spTree>
+  </p:cSld>
+  <p:clrMapOvr>
+    <a:masterClrMapping/>
+  </p:clrMapOvr>
+  <mc:AlternateContent xmlns:mc="http://schemas.openxmlformats.org/markup-compatibility/2006">
+    <mc:Choice xmlns:p159="http://schemas.microsoft.com/office/powerpoint/2015/09/main" xmlns:p14="http://schemas.microsoft.com/office/powerpoint/2010/main" Requires="p159">
+      <p:transition p14:dur="2000" advClick="1"/>
+    </mc:Choice>
+    <mc:Fallback>
+      <p:transition advClick="1"/>
+    </mc:Fallback>
+  </mc:AlternateContent>
+</p:sld>
+</file>
+
+<file path=ppt/slides/slide6.xml><?xml version="1.0" encoding="utf-8"?>
 <p:sld xmlns:a="http://schemas.openxmlformats.org/drawingml/2006/main" xmlns:r="http://schemas.openxmlformats.org/officeDocument/2006/relationships" xmlns:p="http://schemas.openxmlformats.org/presentationml/2006/main" xmlns:m="http://schemas.openxmlformats.org/officeDocument/2006/math" xmlns:w="http://schemas.openxmlformats.org/wordprocessingml/2006/main" xmlns:mc="http://schemas.openxmlformats.org/markup-compatibility/2006" showMasterPhAnim="0" showMasterSp="1" show="1">
   <p:cSld name="">
     <p:spTree>
@@ -6082,7 +6738,7 @@
 </p:sld>
 </file>
 
-<file path=ppt/slides/slide5.xml><?xml version="1.0" encoding="utf-8"?>
+<file path=ppt/slides/slide7.xml><?xml version="1.0" encoding="utf-8"?>
 <p:sld xmlns:a="http://schemas.openxmlformats.org/drawingml/2006/main" xmlns:r="http://schemas.openxmlformats.org/officeDocument/2006/relationships" xmlns:p="http://schemas.openxmlformats.org/presentationml/2006/main" xmlns:m="http://schemas.openxmlformats.org/officeDocument/2006/math" xmlns:w="http://schemas.openxmlformats.org/wordprocessingml/2006/main" xmlns:mc="http://schemas.openxmlformats.org/markup-compatibility/2006" showMasterPhAnim="0" showMasterSp="1" show="1">
   <p:cSld name="">
     <p:spTree>
@@ -6307,7 +6963,7 @@
 </p:sld>
 </file>
 
-<file path=ppt/slides/slide6.xml><?xml version="1.0" encoding="utf-8"?>
+<file path=ppt/slides/slide8.xml><?xml version="1.0" encoding="utf-8"?>
 <p:sld xmlns:a="http://schemas.openxmlformats.org/drawingml/2006/main" xmlns:r="http://schemas.openxmlformats.org/officeDocument/2006/relationships" xmlns:p="http://schemas.openxmlformats.org/presentationml/2006/main" xmlns:m="http://schemas.openxmlformats.org/officeDocument/2006/math" xmlns:w="http://schemas.openxmlformats.org/wordprocessingml/2006/main" xmlns:mc="http://schemas.openxmlformats.org/markup-compatibility/2006" showMasterPhAnim="0" showMasterSp="1" show="1">
   <p:cSld name="">
     <p:spTree>
@@ -6450,7 +7106,7 @@
 </p:sld>
 </file>
 
-<file path=ppt/slides/slide7.xml><?xml version="1.0" encoding="utf-8"?>
+<file path=ppt/slides/slide9.xml><?xml version="1.0" encoding="utf-8"?>
 <p:sld xmlns:a="http://schemas.openxmlformats.org/drawingml/2006/main" xmlns:r="http://schemas.openxmlformats.org/officeDocument/2006/relationships" xmlns:p="http://schemas.openxmlformats.org/presentationml/2006/main" xmlns:m="http://schemas.openxmlformats.org/officeDocument/2006/math" xmlns:w="http://schemas.openxmlformats.org/wordprocessingml/2006/main" xmlns:mc="http://schemas.openxmlformats.org/markup-compatibility/2006" showMasterPhAnim="0" showMasterSp="1" show="1">
   <p:cSld name="">
     <p:spTree>
@@ -6469,7 +7125,7 @@
       </p:grpSpPr>
       <p:graphicFrame>
         <p:nvGraphicFramePr>
-          <p:cNvPr id="2038886563" name=""/>
+          <p:cNvPr id="792559690" name=""/>
           <p:cNvGraphicFramePr>
             <a:graphicFrameLocks xmlns:a="http://schemas.openxmlformats.org/drawingml/2006/main" noChangeAspect="1"/>
           </p:cNvGraphicFramePr>
@@ -6485,7 +7141,7 @@
               <p:embed/>
               <p:pic>
                 <p:nvPicPr>
-                  <p:cNvPr id="2038886563" name=""/>
+                  <p:cNvPr id="792559690" name=""/>
                   <p:cNvPicPr/>
                   <p:nvPr/>
                 </p:nvPicPr>
@@ -6509,7 +7165,7 @@
       </p:graphicFrame>
       <p:sp>
         <p:nvSpPr>
-          <p:cNvPr id="419554262" name=""/>
+          <p:cNvPr id="465370342" name=""/>
           <p:cNvSpPr txBox="1"/>
           <p:nvPr/>
         </p:nvSpPr>

--- a/NewOS.pptx
+++ b/NewOS.pptx
@@ -142,7 +142,7 @@
       </p:grpSpPr>
       <p:sp>
         <p:nvSpPr>
-          <p:cNvPr id="1202375955" name="Header Placeholder 1"/>
+          <p:cNvPr id="898473751" name="Header Placeholder 1"/>
           <p:cNvSpPr>
             <a:spLocks noGrp="1"/>
           </p:cNvSpPr>
@@ -176,7 +176,7 @@
       </p:sp>
       <p:sp>
         <p:nvSpPr>
-          <p:cNvPr id="112559219" name="Date Placeholder 2"/>
+          <p:cNvPr id="117963730" name="Date Placeholder 2"/>
           <p:cNvSpPr>
             <a:spLocks noGrp="1"/>
           </p:cNvSpPr>
@@ -214,7 +214,7 @@
       </p:sp>
       <p:sp>
         <p:nvSpPr>
-          <p:cNvPr id="308262045" name="Slide Image Placeholder 3"/>
+          <p:cNvPr id="69036204" name="Slide Image Placeholder 3"/>
           <p:cNvSpPr>
             <a:spLocks noChangeAspect="1" noGrp="1" noRot="1"/>
           </p:cNvSpPr>
@@ -250,7 +250,7 @@
       </p:sp>
       <p:sp>
         <p:nvSpPr>
-          <p:cNvPr id="815747378" name="Notes Placeholder 4"/>
+          <p:cNvPr id="126081404" name="Notes Placeholder 4"/>
           <p:cNvSpPr>
             <a:spLocks noGrp="1"/>
           </p:cNvSpPr>
@@ -324,7 +324,7 @@
       </p:sp>
       <p:sp>
         <p:nvSpPr>
-          <p:cNvPr id="1780743927" name="Footer Placeholder 5"/>
+          <p:cNvPr id="1535892479" name="Footer Placeholder 5"/>
           <p:cNvSpPr>
             <a:spLocks noGrp="1"/>
           </p:cNvSpPr>
@@ -358,7 +358,7 @@
       </p:sp>
       <p:sp>
         <p:nvSpPr>
-          <p:cNvPr id="568006919" name="Slide Number Placeholder 6"/>
+          <p:cNvPr id="873290018" name="Slide Number Placeholder 6"/>
           <p:cNvSpPr>
             <a:spLocks noGrp="1"/>
           </p:cNvSpPr>
@@ -511,7 +511,7 @@
       </p:grpSpPr>
       <p:sp>
         <p:nvSpPr>
-          <p:cNvPr id="1511679985" name="Slide Image Placeholder 1"/>
+          <p:cNvPr id="610987600" name="Slide Image Placeholder 1"/>
           <p:cNvSpPr>
             <a:spLocks noChangeAspect="1" noGrp="1" noRot="1"/>
           </p:cNvSpPr>
@@ -528,7 +528,7 @@
       </p:sp>
       <p:sp>
         <p:nvSpPr>
-          <p:cNvPr id="1742172131" name="Notes Placeholder 2"/>
+          <p:cNvPr id="18814441" name="Notes Placeholder 2"/>
           <p:cNvSpPr>
             <a:spLocks noGrp="1"/>
           </p:cNvSpPr>
@@ -553,7 +553,7 @@
       </p:sp>
       <p:sp>
         <p:nvSpPr>
-          <p:cNvPr id="1512840787" name="Slide Number Placeholder 3"/>
+          <p:cNvPr id="443995336" name="Slide Number Placeholder 3"/>
           <p:cNvSpPr>
             <a:spLocks noGrp="1"/>
           </p:cNvSpPr>
@@ -774,7 +774,7 @@
       </p:grpSpPr>
       <p:sp>
         <p:nvSpPr>
-          <p:cNvPr id="622757499" name="Slide Image Placeholder 1"/>
+          <p:cNvPr id="515346077" name="Slide Image Placeholder 1"/>
           <p:cNvSpPr>
             <a:spLocks noChangeAspect="1" noGrp="1" noRot="1"/>
           </p:cNvSpPr>
@@ -786,7 +786,7 @@
       </p:sp>
       <p:sp>
         <p:nvSpPr>
-          <p:cNvPr id="1150907526" name="Notes Placeholder 2"/>
+          <p:cNvPr id="1168814408" name="Notes Placeholder 2"/>
           <p:cNvSpPr>
             <a:spLocks noGrp="1"/>
           </p:cNvSpPr>
@@ -808,7 +808,7 @@
       </p:sp>
       <p:sp>
         <p:nvSpPr>
-          <p:cNvPr id="425144410" name="Slide Number Placeholder 3"/>
+          <p:cNvPr id="1264067187" name="Slide Number Placeholder 3"/>
           <p:cNvSpPr>
             <a:spLocks noGrp="1"/>
           </p:cNvSpPr>
@@ -859,7 +859,7 @@
       </p:grpSpPr>
       <p:sp>
         <p:nvSpPr>
-          <p:cNvPr id="1959772635" name="Slide Image Placeholder 1"/>
+          <p:cNvPr id="2044770019" name="Slide Image Placeholder 1"/>
           <p:cNvSpPr>
             <a:spLocks noChangeAspect="1" noGrp="1" noRot="1"/>
           </p:cNvSpPr>
@@ -871,7 +871,7 @@
       </p:sp>
       <p:sp>
         <p:nvSpPr>
-          <p:cNvPr id="202111096" name="Notes Placeholder 2"/>
+          <p:cNvPr id="302346661" name="Notes Placeholder 2"/>
           <p:cNvSpPr>
             <a:spLocks noGrp="1"/>
           </p:cNvSpPr>
@@ -893,7 +893,7 @@
       </p:sp>
       <p:sp>
         <p:nvSpPr>
-          <p:cNvPr id="950583928" name="Slide Number Placeholder 3"/>
+          <p:cNvPr id="413934154" name="Slide Number Placeholder 3"/>
           <p:cNvSpPr>
             <a:spLocks noGrp="1"/>
           </p:cNvSpPr>
@@ -1199,7 +1199,7 @@
       </p:grpSpPr>
       <p:sp>
         <p:nvSpPr>
-          <p:cNvPr id="2069449407" name="Slide Image Placeholder 1"/>
+          <p:cNvPr id="1563708018" name="Slide Image Placeholder 1"/>
           <p:cNvSpPr>
             <a:spLocks noChangeAspect="1" noGrp="1" noRot="1"/>
           </p:cNvSpPr>
@@ -1211,7 +1211,7 @@
       </p:sp>
       <p:sp>
         <p:nvSpPr>
-          <p:cNvPr id="596036639" name="Notes Placeholder 2"/>
+          <p:cNvPr id="352591881" name="Notes Placeholder 2"/>
           <p:cNvSpPr>
             <a:spLocks noGrp="1"/>
           </p:cNvSpPr>
@@ -1233,7 +1233,7 @@
       </p:sp>
       <p:sp>
         <p:nvSpPr>
-          <p:cNvPr id="286744172" name="Slide Number Placeholder 3"/>
+          <p:cNvPr id="95640832" name="Slide Number Placeholder 3"/>
           <p:cNvSpPr>
             <a:spLocks noGrp="1"/>
           </p:cNvSpPr>
@@ -1284,7 +1284,7 @@
       </p:grpSpPr>
       <p:sp>
         <p:nvSpPr>
-          <p:cNvPr id="593198827" name="Shape 1059"/>
+          <p:cNvPr id="567399707" name="Shape 1059"/>
           <p:cNvSpPr>
             <a:spLocks noChangeArrowheads="1" noGrp="1"/>
           </p:cNvSpPr>
@@ -1407,7 +1407,7 @@
       </p:sp>
       <p:sp>
         <p:nvSpPr>
-          <p:cNvPr id="1440044971" name="Shape 1060"/>
+          <p:cNvPr id="1412152781" name="Shape 1060"/>
           <p:cNvSpPr>
             <a:spLocks noChangeArrowheads="1" noGrp="1"/>
           </p:cNvSpPr>
@@ -1498,7 +1498,7 @@
       </p:sp>
       <p:sp>
         <p:nvSpPr>
-          <p:cNvPr id="936130814" name="Shape 1061"/>
+          <p:cNvPr id="588752901" name="Shape 1061"/>
           <p:cNvSpPr>
             <a:spLocks noChangeArrowheads="1" noGrp="1"/>
           </p:cNvSpPr>
@@ -1584,7 +1584,7 @@
       </p:sp>
       <p:sp>
         <p:nvSpPr>
-          <p:cNvPr id="1500145601" name="Shape 1062"/>
+          <p:cNvPr id="266481663" name="Shape 1062"/>
           <p:cNvSpPr>
             <a:spLocks noChangeArrowheads="1" noGrp="1"/>
           </p:cNvSpPr>
@@ -1662,7 +1662,7 @@
       </p:sp>
       <p:sp>
         <p:nvSpPr>
-          <p:cNvPr id="962435039" name="Shape 1063"/>
+          <p:cNvPr id="2096455674" name="Shape 1063"/>
           <p:cNvSpPr>
             <a:spLocks noChangeArrowheads="1" noGrp="1"/>
           </p:cNvSpPr>
@@ -1740,7 +1740,7 @@
       </p:sp>
       <p:sp>
         <p:nvSpPr>
-          <p:cNvPr id="2037772395" name="Subtitle 2"/>
+          <p:cNvPr id="530739788" name="Subtitle 2"/>
           <p:cNvSpPr>
             <a:spLocks noGrp="1"/>
           </p:cNvSpPr>
@@ -1863,7 +1863,7 @@
       </p:sp>
       <p:sp>
         <p:nvSpPr>
-          <p:cNvPr id="694296761" name="Date Placeholder 3"/>
+          <p:cNvPr id="317066029" name="Date Placeholder 3"/>
           <p:cNvSpPr>
             <a:spLocks noGrp="1"/>
           </p:cNvSpPr>
@@ -1889,7 +1889,7 @@
       </p:sp>
       <p:sp>
         <p:nvSpPr>
-          <p:cNvPr id="1451787354" name="Footer Placeholder 4"/>
+          <p:cNvPr id="1484908332" name="Footer Placeholder 4"/>
           <p:cNvSpPr>
             <a:spLocks noGrp="1"/>
           </p:cNvSpPr>
@@ -1911,7 +1911,7 @@
       </p:sp>
       <p:sp>
         <p:nvSpPr>
-          <p:cNvPr id="1804110981" name="Slide Number Placeholder 5"/>
+          <p:cNvPr id="1280045681" name="Slide Number Placeholder 5"/>
           <p:cNvSpPr>
             <a:spLocks noGrp="1"/>
           </p:cNvSpPr>
@@ -1937,7 +1937,7 @@
       </p:sp>
       <p:sp>
         <p:nvSpPr>
-          <p:cNvPr id="1083776013" name="Title 6"/>
+          <p:cNvPr id="204712526" name="Title 6"/>
           <p:cNvSpPr>
             <a:spLocks noGrp="1"/>
           </p:cNvSpPr>
@@ -1997,7 +1997,7 @@
       </p:grpSpPr>
       <p:sp>
         <p:nvSpPr>
-          <p:cNvPr id="16015873" name="Title 1"/>
+          <p:cNvPr id="818563420" name="Title 1"/>
           <p:cNvSpPr>
             <a:spLocks noGrp="1"/>
           </p:cNvSpPr>
@@ -2023,7 +2023,7 @@
       </p:sp>
       <p:sp>
         <p:nvSpPr>
-          <p:cNvPr id="703479768" name="Vertical Text Placeholder 2"/>
+          <p:cNvPr id="345809717" name="Vertical Text Placeholder 2"/>
           <p:cNvSpPr>
             <a:spLocks noGrp="1"/>
           </p:cNvSpPr>
@@ -2089,7 +2089,7 @@
       </p:sp>
       <p:sp>
         <p:nvSpPr>
-          <p:cNvPr id="490364958" name="Date Placeholder 3"/>
+          <p:cNvPr id="659478445" name="Date Placeholder 3"/>
           <p:cNvSpPr>
             <a:spLocks noGrp="1"/>
           </p:cNvSpPr>
@@ -2115,7 +2115,7 @@
       </p:sp>
       <p:sp>
         <p:nvSpPr>
-          <p:cNvPr id="27903344" name="Footer Placeholder 4"/>
+          <p:cNvPr id="1221059715" name="Footer Placeholder 4"/>
           <p:cNvSpPr>
             <a:spLocks noGrp="1"/>
           </p:cNvSpPr>
@@ -2137,7 +2137,7 @@
       </p:sp>
       <p:sp>
         <p:nvSpPr>
-          <p:cNvPr id="1075261573" name="Slide Number Placeholder 5"/>
+          <p:cNvPr id="385105845" name="Slide Number Placeholder 5"/>
           <p:cNvSpPr>
             <a:spLocks noGrp="1"/>
           </p:cNvSpPr>
@@ -2188,7 +2188,7 @@
       </p:grpSpPr>
       <p:sp>
         <p:nvSpPr>
-          <p:cNvPr id="1478176562" name="Vertical Title 1"/>
+          <p:cNvPr id="735762766" name="Vertical Title 1"/>
           <p:cNvSpPr>
             <a:spLocks noGrp="1"/>
           </p:cNvSpPr>
@@ -2223,7 +2223,7 @@
       </p:sp>
       <p:sp>
         <p:nvSpPr>
-          <p:cNvPr id="1982973205" name="Vertical Text Placeholder 2"/>
+          <p:cNvPr id="1320429909" name="Vertical Text Placeholder 2"/>
           <p:cNvSpPr>
             <a:spLocks noGrp="1"/>
           </p:cNvSpPr>
@@ -2294,7 +2294,7 @@
       </p:sp>
       <p:sp>
         <p:nvSpPr>
-          <p:cNvPr id="1974783373" name="Date Placeholder 3"/>
+          <p:cNvPr id="699073676" name="Date Placeholder 3"/>
           <p:cNvSpPr>
             <a:spLocks noGrp="1"/>
           </p:cNvSpPr>
@@ -2320,7 +2320,7 @@
       </p:sp>
       <p:sp>
         <p:nvSpPr>
-          <p:cNvPr id="364977969" name="Footer Placeholder 4"/>
+          <p:cNvPr id="1428440673" name="Footer Placeholder 4"/>
           <p:cNvSpPr>
             <a:spLocks noGrp="1"/>
           </p:cNvSpPr>
@@ -2342,7 +2342,7 @@
       </p:sp>
       <p:sp>
         <p:nvSpPr>
-          <p:cNvPr id="384172712" name="Slide Number Placeholder 5"/>
+          <p:cNvPr id="2048479532" name="Slide Number Placeholder 5"/>
           <p:cNvSpPr>
             <a:spLocks noGrp="1"/>
           </p:cNvSpPr>
@@ -2393,7 +2393,7 @@
       </p:grpSpPr>
       <p:sp>
         <p:nvSpPr>
-          <p:cNvPr id="1716484903" name="Title 1"/>
+          <p:cNvPr id="1061041677" name="Title 1"/>
           <p:cNvSpPr>
             <a:spLocks noGrp="1"/>
           </p:cNvSpPr>
@@ -2419,7 +2419,7 @@
       </p:sp>
       <p:sp>
         <p:nvSpPr>
-          <p:cNvPr id="1153847357" name="Content Placeholder 2"/>
+          <p:cNvPr id="1903860062" name="Content Placeholder 2"/>
           <p:cNvSpPr>
             <a:spLocks noGrp="1"/>
           </p:cNvSpPr>
@@ -2485,7 +2485,7 @@
       </p:sp>
       <p:sp>
         <p:nvSpPr>
-          <p:cNvPr id="889488967" name="Date Placeholder 3"/>
+          <p:cNvPr id="604382957" name="Date Placeholder 3"/>
           <p:cNvSpPr>
             <a:spLocks noGrp="1"/>
           </p:cNvSpPr>
@@ -2511,7 +2511,7 @@
       </p:sp>
       <p:sp>
         <p:nvSpPr>
-          <p:cNvPr id="305393206" name="Footer Placeholder 4"/>
+          <p:cNvPr id="1267629631" name="Footer Placeholder 4"/>
           <p:cNvSpPr>
             <a:spLocks noGrp="1"/>
           </p:cNvSpPr>
@@ -2533,7 +2533,7 @@
       </p:sp>
       <p:sp>
         <p:nvSpPr>
-          <p:cNvPr id="930934391" name="Slide Number Placeholder 5"/>
+          <p:cNvPr id="1448887668" name="Slide Number Placeholder 5"/>
           <p:cNvSpPr>
             <a:spLocks noGrp="1"/>
           </p:cNvSpPr>
@@ -2584,7 +2584,7 @@
       </p:grpSpPr>
       <p:sp>
         <p:nvSpPr>
-          <p:cNvPr id="1906203635" name="Title 1"/>
+          <p:cNvPr id="213016435" name="Title 1"/>
           <p:cNvSpPr>
             <a:spLocks noGrp="1"/>
           </p:cNvSpPr>
@@ -2619,7 +2619,7 @@
       </p:sp>
       <p:sp>
         <p:nvSpPr>
-          <p:cNvPr id="1513030600" name="Text Placeholder 2"/>
+          <p:cNvPr id="1083803230" name="Text Placeholder 2"/>
           <p:cNvSpPr>
             <a:spLocks noGrp="1"/>
           </p:cNvSpPr>
@@ -2741,7 +2741,7 @@
       </p:sp>
       <p:sp>
         <p:nvSpPr>
-          <p:cNvPr id="1132512516" name="Date Placeholder 3"/>
+          <p:cNvPr id="36361129" name="Date Placeholder 3"/>
           <p:cNvSpPr>
             <a:spLocks noGrp="1"/>
           </p:cNvSpPr>
@@ -2767,7 +2767,7 @@
       </p:sp>
       <p:sp>
         <p:nvSpPr>
-          <p:cNvPr id="2081729118" name="Footer Placeholder 4"/>
+          <p:cNvPr id="44380468" name="Footer Placeholder 4"/>
           <p:cNvSpPr>
             <a:spLocks noGrp="1"/>
           </p:cNvSpPr>
@@ -2789,7 +2789,7 @@
       </p:sp>
       <p:sp>
         <p:nvSpPr>
-          <p:cNvPr id="222970605" name="Slide Number Placeholder 5"/>
+          <p:cNvPr id="1272530025" name="Slide Number Placeholder 5"/>
           <p:cNvSpPr>
             <a:spLocks noGrp="1"/>
           </p:cNvSpPr>
@@ -2840,7 +2840,7 @@
       </p:grpSpPr>
       <p:sp>
         <p:nvSpPr>
-          <p:cNvPr id="1724170498" name="Title 1"/>
+          <p:cNvPr id="1400500703" name="Title 1"/>
           <p:cNvSpPr>
             <a:spLocks noGrp="1"/>
           </p:cNvSpPr>
@@ -2866,7 +2866,7 @@
       </p:sp>
       <p:sp>
         <p:nvSpPr>
-          <p:cNvPr id="1010421087" name="Content Placeholder 2"/>
+          <p:cNvPr id="1991418455" name="Content Placeholder 2"/>
           <p:cNvSpPr>
             <a:spLocks noGrp="1"/>
           </p:cNvSpPr>
@@ -2965,7 +2965,7 @@
       </p:sp>
       <p:sp>
         <p:nvSpPr>
-          <p:cNvPr id="332829360" name="Content Placeholder 3"/>
+          <p:cNvPr id="1385256812" name="Content Placeholder 3"/>
           <p:cNvSpPr>
             <a:spLocks noGrp="1"/>
           </p:cNvSpPr>
@@ -3064,7 +3064,7 @@
       </p:sp>
       <p:sp>
         <p:nvSpPr>
-          <p:cNvPr id="496068048" name="Date Placeholder 4"/>
+          <p:cNvPr id="1119255354" name="Date Placeholder 4"/>
           <p:cNvSpPr>
             <a:spLocks noGrp="1"/>
           </p:cNvSpPr>
@@ -3090,7 +3090,7 @@
       </p:sp>
       <p:sp>
         <p:nvSpPr>
-          <p:cNvPr id="732596260" name="Footer Placeholder 5"/>
+          <p:cNvPr id="1284888427" name="Footer Placeholder 5"/>
           <p:cNvSpPr>
             <a:spLocks noGrp="1"/>
           </p:cNvSpPr>
@@ -3112,7 +3112,7 @@
       </p:sp>
       <p:sp>
         <p:nvSpPr>
-          <p:cNvPr id="983219877" name="Slide Number Placeholder 6"/>
+          <p:cNvPr id="636750287" name="Slide Number Placeholder 6"/>
           <p:cNvSpPr>
             <a:spLocks noGrp="1"/>
           </p:cNvSpPr>
@@ -3163,7 +3163,7 @@
       </p:grpSpPr>
       <p:sp>
         <p:nvSpPr>
-          <p:cNvPr id="814879057" name="Title 1"/>
+          <p:cNvPr id="576907916" name="Title 1"/>
           <p:cNvSpPr>
             <a:spLocks noGrp="1"/>
           </p:cNvSpPr>
@@ -3193,7 +3193,7 @@
       </p:sp>
       <p:sp>
         <p:nvSpPr>
-          <p:cNvPr id="532343426" name="Text Placeholder 2"/>
+          <p:cNvPr id="889634786" name="Text Placeholder 2"/>
           <p:cNvSpPr>
             <a:spLocks noGrp="1"/>
           </p:cNvSpPr>
@@ -3261,7 +3261,7 @@
       </p:sp>
       <p:sp>
         <p:nvSpPr>
-          <p:cNvPr id="1271388851" name="Content Placeholder 3"/>
+          <p:cNvPr id="1878580122" name="Content Placeholder 3"/>
           <p:cNvSpPr>
             <a:spLocks noGrp="1"/>
           </p:cNvSpPr>
@@ -3360,7 +3360,7 @@
       </p:sp>
       <p:sp>
         <p:nvSpPr>
-          <p:cNvPr id="1125747004" name="Text Placeholder 4"/>
+          <p:cNvPr id="1493347496" name="Text Placeholder 4"/>
           <p:cNvSpPr>
             <a:spLocks noGrp="1"/>
           </p:cNvSpPr>
@@ -3428,7 +3428,7 @@
       </p:sp>
       <p:sp>
         <p:nvSpPr>
-          <p:cNvPr id="447668310" name="Content Placeholder 5"/>
+          <p:cNvPr id="1182049177" name="Content Placeholder 5"/>
           <p:cNvSpPr>
             <a:spLocks noGrp="1"/>
           </p:cNvSpPr>
@@ -3527,7 +3527,7 @@
       </p:sp>
       <p:sp>
         <p:nvSpPr>
-          <p:cNvPr id="1970278928" name="Date Placeholder 6"/>
+          <p:cNvPr id="643669439" name="Date Placeholder 6"/>
           <p:cNvSpPr>
             <a:spLocks noGrp="1"/>
           </p:cNvSpPr>
@@ -3553,7 +3553,7 @@
       </p:sp>
       <p:sp>
         <p:nvSpPr>
-          <p:cNvPr id="1354121202" name="Footer Placeholder 7"/>
+          <p:cNvPr id="1792185877" name="Footer Placeholder 7"/>
           <p:cNvSpPr>
             <a:spLocks noGrp="1"/>
           </p:cNvSpPr>
@@ -3575,7 +3575,7 @@
       </p:sp>
       <p:sp>
         <p:nvSpPr>
-          <p:cNvPr id="458953586" name="Slide Number Placeholder 8"/>
+          <p:cNvPr id="1423352149" name="Slide Number Placeholder 8"/>
           <p:cNvSpPr>
             <a:spLocks noGrp="1"/>
           </p:cNvSpPr>
@@ -3626,7 +3626,7 @@
       </p:grpSpPr>
       <p:sp>
         <p:nvSpPr>
-          <p:cNvPr id="1998137728" name="Title 1"/>
+          <p:cNvPr id="202944384" name="Title 1"/>
           <p:cNvSpPr>
             <a:spLocks noGrp="1"/>
           </p:cNvSpPr>
@@ -3652,7 +3652,7 @@
       </p:sp>
       <p:sp>
         <p:nvSpPr>
-          <p:cNvPr id="1379770097" name="Date Placeholder 2"/>
+          <p:cNvPr id="1519054478" name="Date Placeholder 2"/>
           <p:cNvSpPr>
             <a:spLocks noGrp="1"/>
           </p:cNvSpPr>
@@ -3678,7 +3678,7 @@
       </p:sp>
       <p:sp>
         <p:nvSpPr>
-          <p:cNvPr id="53930714" name="Footer Placeholder 3"/>
+          <p:cNvPr id="1730375995" name="Footer Placeholder 3"/>
           <p:cNvSpPr>
             <a:spLocks noGrp="1"/>
           </p:cNvSpPr>
@@ -3700,7 +3700,7 @@
       </p:sp>
       <p:sp>
         <p:nvSpPr>
-          <p:cNvPr id="1961251077" name="Slide Number Placeholder 4"/>
+          <p:cNvPr id="899823875" name="Slide Number Placeholder 4"/>
           <p:cNvSpPr>
             <a:spLocks noGrp="1"/>
           </p:cNvSpPr>
@@ -3751,7 +3751,7 @@
       </p:grpSpPr>
       <p:sp>
         <p:nvSpPr>
-          <p:cNvPr id="1247777125" name="Date Placeholder 1"/>
+          <p:cNvPr id="1135472356" name="Date Placeholder 1"/>
           <p:cNvSpPr>
             <a:spLocks noGrp="1"/>
           </p:cNvSpPr>
@@ -3777,7 +3777,7 @@
       </p:sp>
       <p:sp>
         <p:nvSpPr>
-          <p:cNvPr id="1930101722" name="Footer Placeholder 2"/>
+          <p:cNvPr id="519338693" name="Footer Placeholder 2"/>
           <p:cNvSpPr>
             <a:spLocks noGrp="1"/>
           </p:cNvSpPr>
@@ -3799,7 +3799,7 @@
       </p:sp>
       <p:sp>
         <p:nvSpPr>
-          <p:cNvPr id="69989703" name="Slide Number Placeholder 3"/>
+          <p:cNvPr id="1887693231" name="Slide Number Placeholder 3"/>
           <p:cNvSpPr>
             <a:spLocks noGrp="1"/>
           </p:cNvSpPr>
@@ -3850,7 +3850,7 @@
       </p:grpSpPr>
       <p:sp>
         <p:nvSpPr>
-          <p:cNvPr id="860939247" name="Title 1"/>
+          <p:cNvPr id="1116540571" name="Title 1"/>
           <p:cNvSpPr>
             <a:spLocks noGrp="1"/>
           </p:cNvSpPr>
@@ -3885,7 +3885,7 @@
       </p:sp>
       <p:sp>
         <p:nvSpPr>
-          <p:cNvPr id="1050503249" name="Content Placeholder 2"/>
+          <p:cNvPr id="1025376042" name="Content Placeholder 2"/>
           <p:cNvSpPr>
             <a:spLocks noGrp="1"/>
           </p:cNvSpPr>
@@ -3984,7 +3984,7 @@
       </p:sp>
       <p:sp>
         <p:nvSpPr>
-          <p:cNvPr id="1102743475" name="Text Placeholder 3"/>
+          <p:cNvPr id="1495692626" name="Text Placeholder 3"/>
           <p:cNvSpPr>
             <a:spLocks noGrp="1"/>
           </p:cNvSpPr>
@@ -4052,7 +4052,7 @@
       </p:sp>
       <p:sp>
         <p:nvSpPr>
-          <p:cNvPr id="1251194183" name="Date Placeholder 4"/>
+          <p:cNvPr id="665054998" name="Date Placeholder 4"/>
           <p:cNvSpPr>
             <a:spLocks noGrp="1"/>
           </p:cNvSpPr>
@@ -4078,7 +4078,7 @@
       </p:sp>
       <p:sp>
         <p:nvSpPr>
-          <p:cNvPr id="877092789" name="Footer Placeholder 5"/>
+          <p:cNvPr id="1633054628" name="Footer Placeholder 5"/>
           <p:cNvSpPr>
             <a:spLocks noGrp="1"/>
           </p:cNvSpPr>
@@ -4100,7 +4100,7 @@
       </p:sp>
       <p:sp>
         <p:nvSpPr>
-          <p:cNvPr id="1996411946" name="Slide Number Placeholder 6"/>
+          <p:cNvPr id="1007900443" name="Slide Number Placeholder 6"/>
           <p:cNvSpPr>
             <a:spLocks noGrp="1"/>
           </p:cNvSpPr>
@@ -4151,7 +4151,7 @@
       </p:grpSpPr>
       <p:sp>
         <p:nvSpPr>
-          <p:cNvPr id="723796618" name="Title 1"/>
+          <p:cNvPr id="1647024490" name="Title 1"/>
           <p:cNvSpPr>
             <a:spLocks noGrp="1"/>
           </p:cNvSpPr>
@@ -4186,7 +4186,7 @@
       </p:sp>
       <p:sp>
         <p:nvSpPr>
-          <p:cNvPr id="480104078" name="Picture Placeholder 2"/>
+          <p:cNvPr id="500263217" name="Picture Placeholder 2"/>
           <p:cNvSpPr>
             <a:spLocks noGrp="1"/>
           </p:cNvSpPr>
@@ -4250,7 +4250,7 @@
       </p:sp>
       <p:sp>
         <p:nvSpPr>
-          <p:cNvPr id="1907001834" name="Text Placeholder 3"/>
+          <p:cNvPr id="321829130" name="Text Placeholder 3"/>
           <p:cNvSpPr>
             <a:spLocks noGrp="1"/>
           </p:cNvSpPr>
@@ -4318,7 +4318,7 @@
       </p:sp>
       <p:sp>
         <p:nvSpPr>
-          <p:cNvPr id="774542992" name="Date Placeholder 4"/>
+          <p:cNvPr id="1638641678" name="Date Placeholder 4"/>
           <p:cNvSpPr>
             <a:spLocks noGrp="1"/>
           </p:cNvSpPr>
@@ -4344,7 +4344,7 @@
       </p:sp>
       <p:sp>
         <p:nvSpPr>
-          <p:cNvPr id="1483468129" name="Footer Placeholder 5"/>
+          <p:cNvPr id="1858042269" name="Footer Placeholder 5"/>
           <p:cNvSpPr>
             <a:spLocks noGrp="1"/>
           </p:cNvSpPr>
@@ -4366,7 +4366,7 @@
       </p:sp>
       <p:sp>
         <p:nvSpPr>
-          <p:cNvPr id="836146933" name="Slide Number Placeholder 6"/>
+          <p:cNvPr id="1750154325" name="Slide Number Placeholder 6"/>
           <p:cNvSpPr>
             <a:spLocks noGrp="1"/>
           </p:cNvSpPr>
@@ -4422,7 +4422,7 @@
       </p:grpSpPr>
       <p:sp>
         <p:nvSpPr>
-          <p:cNvPr id="1123499025" name="Shape 1059"/>
+          <p:cNvPr id="979468926" name="Shape 1059"/>
           <p:cNvSpPr>
             <a:spLocks noChangeArrowheads="1" noGrp="1"/>
           </p:cNvSpPr>
@@ -4500,7 +4500,7 @@
       </p:sp>
       <p:sp>
         <p:nvSpPr>
-          <p:cNvPr id="1332137561" name="Shape 1060"/>
+          <p:cNvPr id="1868546632" name="Shape 1060"/>
           <p:cNvSpPr>
             <a:spLocks noChangeArrowheads="1" noGrp="1"/>
           </p:cNvSpPr>
@@ -4581,7 +4581,7 @@
       </p:sp>
       <p:sp>
         <p:nvSpPr>
-          <p:cNvPr id="31622277" name="Shape 1061"/>
+          <p:cNvPr id="544686789" name="Shape 1061"/>
           <p:cNvSpPr>
             <a:spLocks noChangeArrowheads="1" noGrp="1"/>
           </p:cNvSpPr>
@@ -4699,7 +4699,7 @@
       </p:sp>
       <p:sp>
         <p:nvSpPr>
-          <p:cNvPr id="333259525" name="Title 1"/>
+          <p:cNvPr id="593284115" name="Title 1"/>
           <p:cNvSpPr>
             <a:spLocks noGrp="1"/>
           </p:cNvSpPr>
@@ -4735,7 +4735,7 @@
       </p:sp>
       <p:sp>
         <p:nvSpPr>
-          <p:cNvPr id="1126124611" name="Text Placeholder 2"/>
+          <p:cNvPr id="1341295123" name="Text Placeholder 2"/>
           <p:cNvSpPr>
             <a:spLocks noGrp="1"/>
           </p:cNvSpPr>
@@ -4811,7 +4811,7 @@
       </p:sp>
       <p:sp>
         <p:nvSpPr>
-          <p:cNvPr id="1594488426" name="Date Placeholder 3"/>
+          <p:cNvPr id="1098106228" name="Date Placeholder 3"/>
           <p:cNvSpPr>
             <a:spLocks noGrp="1"/>
           </p:cNvSpPr>
@@ -4855,7 +4855,7 @@
       </p:sp>
       <p:sp>
         <p:nvSpPr>
-          <p:cNvPr id="1573854639" name="Footer Placeholder 4"/>
+          <p:cNvPr id="1996954467" name="Footer Placeholder 4"/>
           <p:cNvSpPr>
             <a:spLocks noGrp="1"/>
           </p:cNvSpPr>
@@ -4895,7 +4895,7 @@
       </p:sp>
       <p:sp>
         <p:nvSpPr>
-          <p:cNvPr id="1179155136" name="Slide Number Placeholder 5"/>
+          <p:cNvPr id="2009139170" name="Slide Number Placeholder 5"/>
           <p:cNvSpPr>
             <a:spLocks noGrp="1"/>
           </p:cNvSpPr>
@@ -5243,7 +5243,7 @@
       </p:grpSpPr>
       <p:sp>
         <p:nvSpPr>
-          <p:cNvPr id="1331088816" name="Title 1"/>
+          <p:cNvPr id="1619476708" name="Title 1"/>
           <p:cNvSpPr>
             <a:spLocks noGrp="1"/>
           </p:cNvSpPr>
@@ -5269,7 +5269,7 @@
       </p:sp>
       <p:sp>
         <p:nvSpPr>
-          <p:cNvPr id="817025293" name="Subtitle 2"/>
+          <p:cNvPr id="1696248038" name="Subtitle 2"/>
           <p:cNvSpPr>
             <a:spLocks noGrp="1"/>
           </p:cNvSpPr>
@@ -5362,10 +5362,15 @@
             <p:ph idx="1"/>
           </p:nvPr>
         </p:nvSpPr>
-        <p:spPr bwMode="auto"/>
+        <p:spPr bwMode="auto">
+          <a:xfrm flipH="0" flipV="0">
+            <a:off x="609598" y="1600200"/>
+            <a:ext cx="10972800" cy="3212430"/>
+          </a:xfrm>
+        </p:spPr>
         <p:txBody>
           <a:bodyPr vertOverflow="overflow" horzOverflow="overflow" vert="horz" wrap="square" lIns="91440" tIns="45720" rIns="91440" bIns="45720" numCol="1" spcCol="0" rtlCol="0" fromWordArt="0" anchor="t" anchorCtr="0" forceAA="0" upright="0" compatLnSpc="0">
-            <a:normAutofit fontScale="60000" lnSpcReduction="8000"/>
+            <a:normAutofit fontScale="50000" lnSpcReduction="10000"/>
           </a:bodyPr>
           <a:lstStyle/>
           <a:p>
@@ -5553,6 +5558,92 @@
               <a:t>git</a:t>
             </a:r>
             <a:endParaRPr lang="ru-RU"/>
+          </a:p>
+        </p:txBody>
+      </p:sp>
+      <p:pic>
+        <p:nvPicPr>
+          <p:cNvPr id="1698612184" name=""/>
+          <p:cNvPicPr>
+            <a:picLocks noChangeAspect="1"/>
+          </p:cNvPicPr>
+          <p:nvPr/>
+        </p:nvPicPr>
+        <p:blipFill rotWithShape="1">
+          <a:blip r:embed="rId3"/>
+          <a:stretch/>
+        </p:blipFill>
+        <p:spPr bwMode="auto">
+          <a:xfrm flipH="0" flipV="0">
+            <a:off x="609598" y="4862763"/>
+            <a:ext cx="9301157" cy="1909669"/>
+          </a:xfrm>
+          <a:prstGeom prst="rect">
+            <a:avLst/>
+          </a:prstGeom>
+        </p:spPr>
+      </p:pic>
+      <p:sp>
+        <p:nvSpPr>
+          <p:cNvPr id="1184025891" name=""/>
+          <p:cNvSpPr txBox="1"/>
+          <p:nvPr/>
+        </p:nvSpPr>
+        <p:spPr bwMode="auto">
+          <a:xfrm rot="0" flipH="0" flipV="0">
+            <a:off x="10044736" y="4963026"/>
+            <a:ext cx="1958070" cy="823319"/>
+          </a:xfrm>
+          <a:prstGeom prst="rect">
+            <a:avLst/>
+          </a:prstGeom>
+          <a:noFill/>
+        </p:spPr>
+        <p:txBody>
+          <a:bodyPr vertOverflow="overflow" horzOverflow="overflow" vert="horz" wrap="square" lIns="91440" tIns="45720" rIns="91440" bIns="45720" numCol="1" spcCol="0" rtlCol="0" fromWordArt="0" anchor="t" anchorCtr="0" forceAA="0" upright="0" compatLnSpc="0">
+            <a:spAutoFit/>
+          </a:bodyPr>
+          <a:p>
+            <a:pPr>
+              <a:defRPr/>
+            </a:pPr>
+            <a:r>
+              <a:rPr lang="ru-RU" sz="1200" i="1">
+                <a:solidFill>
+                  <a:schemeClr val="bg1">
+                    <a:lumMod val="50000"/>
+                  </a:schemeClr>
+                </a:solidFill>
+              </a:rPr>
+              <a:t>Скриншот ошибки перестройки системы. Путь </a:t>
+            </a:r>
+            <a:r>
+              <a:rPr lang="en-US" sz="1200" i="1">
+                <a:solidFill>
+                  <a:schemeClr val="bg1">
+                    <a:lumMod val="50000"/>
+                  </a:schemeClr>
+                </a:solidFill>
+              </a:rPr>
+              <a:t>modules </a:t>
+            </a:r>
+            <a:r>
+              <a:rPr lang="ru-RU" sz="1200" i="1">
+                <a:solidFill>
+                  <a:schemeClr val="bg1">
+                    <a:lumMod val="50000"/>
+                  </a:schemeClr>
+                </a:solidFill>
+              </a:rPr>
+              <a:t>на самом деле сущестаует</a:t>
+            </a:r>
+            <a:endParaRPr sz="1200" i="1">
+              <a:solidFill>
+                <a:schemeClr val="bg1">
+                  <a:lumMod val="50000"/>
+                </a:schemeClr>
+              </a:solidFill>
+            </a:endParaRPr>
           </a:p>
         </p:txBody>
       </p:sp>
@@ -5808,7 +5899,7 @@
       </p:grpSpPr>
       <p:sp>
         <p:nvSpPr>
-          <p:cNvPr id="1479063724" name="Title 1"/>
+          <p:cNvPr id="1068563865" name="Title 1"/>
           <p:cNvSpPr>
             <a:spLocks noGrp="1"/>
           </p:cNvSpPr>
@@ -5834,7 +5925,7 @@
       </p:sp>
       <p:sp>
         <p:nvSpPr>
-          <p:cNvPr id="1104601478" name="Content Placeholder 2"/>
+          <p:cNvPr id="1982436273" name="Content Placeholder 2"/>
           <p:cNvSpPr>
             <a:spLocks noGrp="1"/>
           </p:cNvSpPr>
@@ -5951,7 +6042,7 @@
       </p:grpSpPr>
       <p:sp>
         <p:nvSpPr>
-          <p:cNvPr id="1705862135" name="Title 1"/>
+          <p:cNvPr id="1125232834" name="Title 1"/>
           <p:cNvSpPr>
             <a:spLocks noGrp="1"/>
           </p:cNvSpPr>
@@ -5977,7 +6068,7 @@
       </p:sp>
       <p:sp>
         <p:nvSpPr>
-          <p:cNvPr id="1748095952" name="Content Placeholder 2"/>
+          <p:cNvPr id="112325861" name="Content Placeholder 2"/>
           <p:cNvSpPr>
             <a:spLocks noGrp="1"/>
           </p:cNvSpPr>
@@ -7125,7 +7216,7 @@
       </p:grpSpPr>
       <p:graphicFrame>
         <p:nvGraphicFramePr>
-          <p:cNvPr id="792559690" name=""/>
+          <p:cNvPr id="1151084559" name=""/>
           <p:cNvGraphicFramePr>
             <a:graphicFrameLocks xmlns:a="http://schemas.openxmlformats.org/drawingml/2006/main" noChangeAspect="1"/>
           </p:cNvGraphicFramePr>
@@ -7141,7 +7232,7 @@
               <p:embed/>
               <p:pic>
                 <p:nvPicPr>
-                  <p:cNvPr id="792559690" name=""/>
+                  <p:cNvPr id="1151084559" name=""/>
                   <p:cNvPicPr/>
                   <p:nvPr/>
                 </p:nvPicPr>
@@ -7165,7 +7256,7 @@
       </p:graphicFrame>
       <p:sp>
         <p:nvSpPr>
-          <p:cNvPr id="465370342" name=""/>
+          <p:cNvPr id="1663225000" name=""/>
           <p:cNvSpPr txBox="1"/>
           <p:nvPr/>
         </p:nvSpPr>
